--- a/final_cuckoo_search/submit/Cuckoo_Search_via_Levy_Flights_Final.pptx
+++ b/final_cuckoo_search/submit/Cuckoo_Search_via_Levy_Flights_Final.pptx
@@ -2,22 +2,22 @@
 <file path=ppt/presentation.xml><?xml version="1.0" encoding="utf-8"?>
 <p:presentation xmlns:p="http://schemas.openxmlformats.org/presentationml/2006/main">
   <p:sldMasterIdLst>
-    <p:sldMasterId xmlns:r="http://schemas.openxmlformats.org/officeDocument/2006/relationships" id="2147483648" r:id="Ra2e61ff1cc8c4b76"/>
+    <p:sldMasterId xmlns:r="http://schemas.openxmlformats.org/officeDocument/2006/relationships" id="2147483648" r:id="R179be3483509419a"/>
   </p:sldMasterIdLst>
   <p:notesMasterIdLst>
-    <p:notesMasterId xmlns:r="http://schemas.openxmlformats.org/officeDocument/2006/relationships" r:id="R732721b5d656426f"/>
+    <p:notesMasterId xmlns:r="http://schemas.openxmlformats.org/officeDocument/2006/relationships" r:id="R57e7e8d029d1463b"/>
   </p:notesMasterIdLst>
   <p:sldIdLst>
-    <p:sldId xmlns:r="http://schemas.openxmlformats.org/officeDocument/2006/relationships" id="256" r:id="Rfa766d7a73004e19"/>
-    <p:sldId xmlns:r="http://schemas.openxmlformats.org/officeDocument/2006/relationships" id="257" r:id="Rbb486551fb364d76"/>
-    <p:sldId xmlns:r="http://schemas.openxmlformats.org/officeDocument/2006/relationships" id="258" r:id="R63c52fdf980c477f"/>
-    <p:sldId xmlns:r="http://schemas.openxmlformats.org/officeDocument/2006/relationships" id="259" r:id="R525d3db30c53485c"/>
-    <p:sldId xmlns:r="http://schemas.openxmlformats.org/officeDocument/2006/relationships" id="260" r:id="Re419ee07524c4957"/>
-    <p:sldId xmlns:r="http://schemas.openxmlformats.org/officeDocument/2006/relationships" id="261" r:id="R27274489f242403d"/>
-    <p:sldId xmlns:r="http://schemas.openxmlformats.org/officeDocument/2006/relationships" id="262" r:id="Rfa5b7705b3a4496d"/>
-    <p:sldId xmlns:r="http://schemas.openxmlformats.org/officeDocument/2006/relationships" id="263" r:id="R61110f358d2b4493"/>
-    <p:sldId xmlns:r="http://schemas.openxmlformats.org/officeDocument/2006/relationships" id="264" r:id="R8905eb45c7a44d44"/>
-    <p:sldId xmlns:r="http://schemas.openxmlformats.org/officeDocument/2006/relationships" id="265" r:id="R3d76acffe1554069"/>
+    <p:sldId xmlns:r="http://schemas.openxmlformats.org/officeDocument/2006/relationships" id="256" r:id="Rea640ed2f8ba4285"/>
+    <p:sldId xmlns:r="http://schemas.openxmlformats.org/officeDocument/2006/relationships" id="257" r:id="Rc6967a9f2b4f4780"/>
+    <p:sldId xmlns:r="http://schemas.openxmlformats.org/officeDocument/2006/relationships" id="258" r:id="Re2aedc9f98f94ffe"/>
+    <p:sldId xmlns:r="http://schemas.openxmlformats.org/officeDocument/2006/relationships" id="259" r:id="R645f777063c0478a"/>
+    <p:sldId xmlns:r="http://schemas.openxmlformats.org/officeDocument/2006/relationships" id="260" r:id="R3bd189be5cee46d7"/>
+    <p:sldId xmlns:r="http://schemas.openxmlformats.org/officeDocument/2006/relationships" id="261" r:id="R25cabb636fe94ec3"/>
+    <p:sldId xmlns:r="http://schemas.openxmlformats.org/officeDocument/2006/relationships" id="262" r:id="R0747ebb192e641b9"/>
+    <p:sldId xmlns:r="http://schemas.openxmlformats.org/officeDocument/2006/relationships" id="263" r:id="Rf327b62e4a024dcd"/>
+    <p:sldId xmlns:r="http://schemas.openxmlformats.org/officeDocument/2006/relationships" id="264" r:id="R1a50087e026e4f2b"/>
+    <p:sldId xmlns:r="http://schemas.openxmlformats.org/officeDocument/2006/relationships" id="265" r:id="R111af2a6dfdb40cc"/>
   </p:sldIdLst>
   <p:sldSz cx="18288000" cy="10287000"/>
   <p:notesSz cx="6858000" cy="9144000"/>
@@ -1158,7 +1158,7 @@
   </p:cSld>
   <p:clrMap bg1="lt1" tx1="dk1" bg2="lt2" tx2="dk2" accent1="accent1" accent2="accent2" accent3="accent3" accent4="accent4" accent5="accent5" accent6="accent6" hlink="hlink" folHlink="folHlink"/>
   <p:sldLayoutIdLst>
-    <p:sldLayoutId xmlns:r="http://schemas.openxmlformats.org/officeDocument/2006/relationships" id="2147483649" r:id="Re5da603d1a454d6f"/>
+    <p:sldLayoutId xmlns:r="http://schemas.openxmlformats.org/officeDocument/2006/relationships" id="2147483649" r:id="Rdb3900931e2e4f79"/>
   </p:sldLayoutIdLst>
   <p:txStyles>
     <p:titleStyle>
@@ -1457,7 +1457,7 @@
           <p:cNvPr id="1" name="slide-background">
             <a:extLst xmlns:a="http://schemas.openxmlformats.org/drawingml/2006/main">
               <a:ext uri="{FF2B5EF4-FFF2-40B4-BE49-F238E27FC236}">
-                <a16:creationId xmlns:a16="http://schemas.microsoft.com/office/drawing/2014/main" id="{7877F1DA-1129-4012-900A-F8CC6B6A7682}"/>
+                <a16:creationId xmlns:a16="http://schemas.microsoft.com/office/drawing/2014/main" id="{27B379A8-1D8C-4AEE-A70B-A067181E561E}"/>
               </a:ext>
             </a:extLst>
           </p:cNvPr>
@@ -1484,7 +1484,7 @@
           <p:cNvPr id="2" name="cover-rule">
             <a:extLst xmlns:a="http://schemas.openxmlformats.org/drawingml/2006/main">
               <a:ext uri="{FF2B5EF4-FFF2-40B4-BE49-F238E27FC236}">
-                <a16:creationId xmlns:a16="http://schemas.microsoft.com/office/drawing/2014/main" id="{650AF989-1021-453D-BFEA-8721A930BA83}"/>
+                <a16:creationId xmlns:a16="http://schemas.microsoft.com/office/drawing/2014/main" id="{8E14AA2E-24CB-46E2-BDE0-26BDE704F0A8}"/>
               </a:ext>
             </a:extLst>
           </p:cNvPr>
@@ -1517,7 +1517,7 @@
           <p:cNvPr id="3" name="cover-title-1">
             <a:extLst xmlns:a="http://schemas.openxmlformats.org/drawingml/2006/main">
               <a:ext uri="{FF2B5EF4-FFF2-40B4-BE49-F238E27FC236}">
-                <a16:creationId xmlns:a16="http://schemas.microsoft.com/office/drawing/2014/main" id="{2E9CAA4A-E935-4581-A8FD-B421D02C2E7B}"/>
+                <a16:creationId xmlns:a16="http://schemas.microsoft.com/office/drawing/2014/main" id="{E8DF4D08-BF48-4716-8232-A67D4F0988FC}"/>
               </a:ext>
             </a:extLst>
           </p:cNvPr>
@@ -1562,7 +1562,7 @@
           <p:cNvPr id="4" name="cover-title-2">
             <a:extLst xmlns:a="http://schemas.openxmlformats.org/drawingml/2006/main">
               <a:ext uri="{FF2B5EF4-FFF2-40B4-BE49-F238E27FC236}">
-                <a16:creationId xmlns:a16="http://schemas.microsoft.com/office/drawing/2014/main" id="{6A88ED0F-77AE-41A4-8D51-5D84F3C9E80D}"/>
+                <a16:creationId xmlns:a16="http://schemas.microsoft.com/office/drawing/2014/main" id="{3DF0FB11-FC7F-4DBD-BAB9-1482D778EB1C}"/>
               </a:ext>
             </a:extLst>
           </p:cNvPr>
@@ -1607,7 +1607,7 @@
           <p:cNvPr id="5" name="cover-subtitle">
             <a:extLst xmlns:a="http://schemas.openxmlformats.org/drawingml/2006/main">
               <a:ext uri="{FF2B5EF4-FFF2-40B4-BE49-F238E27FC236}">
-                <a16:creationId xmlns:a16="http://schemas.microsoft.com/office/drawing/2014/main" id="{6B7198D5-260C-401A-B465-B459510DDEDA}"/>
+                <a16:creationId xmlns:a16="http://schemas.microsoft.com/office/drawing/2014/main" id="{67F2A75A-8754-4CEC-B7FB-CEE021C5361F}"/>
               </a:ext>
             </a:extLst>
           </p:cNvPr>
@@ -1652,7 +1652,7 @@
           <p:cNvPr id="6" name="cover-source">
             <a:extLst xmlns:a="http://schemas.openxmlformats.org/drawingml/2006/main">
               <a:ext uri="{FF2B5EF4-FFF2-40B4-BE49-F238E27FC236}">
-                <a16:creationId xmlns:a16="http://schemas.microsoft.com/office/drawing/2014/main" id="{ADBB9971-A6E0-4CE0-B3FF-BFA929DF540E}"/>
+                <a16:creationId xmlns:a16="http://schemas.microsoft.com/office/drawing/2014/main" id="{9D96D398-BB80-4564-B020-C1C7C1E0E0AF}"/>
               </a:ext>
             </a:extLst>
           </p:cNvPr>
@@ -1695,7 +1695,7 @@
     </p:spTree>
     <p:extLst>
       <p:ext uri="{BB962C8B-B14F-4D97-AF65-F5344CB8AC3E}">
-        <p14:creationId xmlns:p14="http://schemas.microsoft.com/office/powerpoint/2010/main" val="110005807"/>
+        <p14:creationId xmlns:p14="http://schemas.microsoft.com/office/powerpoint/2010/main" val="1330832346"/>
       </p:ext>
     </p:extLst>
   </p:cSld>
@@ -1719,7 +1719,7 @@
           <p:cNvPr id="1" name="slide-background">
             <a:extLst xmlns:a="http://schemas.openxmlformats.org/drawingml/2006/main">
               <a:ext uri="{FF2B5EF4-FFF2-40B4-BE49-F238E27FC236}">
-                <a16:creationId xmlns:a16="http://schemas.microsoft.com/office/drawing/2014/main" id="{16AA8667-BF7F-4A51-A372-A743F9CA5999}"/>
+                <a16:creationId xmlns:a16="http://schemas.microsoft.com/office/drawing/2014/main" id="{EF83404A-C665-4B07-BA4B-318C572EA9C9}"/>
               </a:ext>
             </a:extLst>
           </p:cNvPr>
@@ -1746,7 +1746,7 @@
           <p:cNvPr id="2" name="closing-rule">
             <a:extLst xmlns:a="http://schemas.openxmlformats.org/drawingml/2006/main">
               <a:ext uri="{FF2B5EF4-FFF2-40B4-BE49-F238E27FC236}">
-                <a16:creationId xmlns:a16="http://schemas.microsoft.com/office/drawing/2014/main" id="{11BE24F5-7E46-4D79-954C-E79FF27A6E74}"/>
+                <a16:creationId xmlns:a16="http://schemas.microsoft.com/office/drawing/2014/main" id="{BC65F509-11F9-44BB-A767-9EAC86AC0C6F}"/>
               </a:ext>
             </a:extLst>
           </p:cNvPr>
@@ -1779,7 +1779,7 @@
           <p:cNvPr id="3" name="closing-kicker">
             <a:extLst xmlns:a="http://schemas.openxmlformats.org/drawingml/2006/main">
               <a:ext uri="{FF2B5EF4-FFF2-40B4-BE49-F238E27FC236}">
-                <a16:creationId xmlns:a16="http://schemas.microsoft.com/office/drawing/2014/main" id="{0E8BC857-A379-49C0-9B1C-81AF722EA09E}"/>
+                <a16:creationId xmlns:a16="http://schemas.microsoft.com/office/drawing/2014/main" id="{3A4ACE45-72CF-4AD8-8C15-37B1004746DB}"/>
               </a:ext>
             </a:extLst>
           </p:cNvPr>
@@ -1824,7 +1824,7 @@
           <p:cNvPr id="4" name="closing-title">
             <a:extLst xmlns:a="http://schemas.openxmlformats.org/drawingml/2006/main">
               <a:ext uri="{FF2B5EF4-FFF2-40B4-BE49-F238E27FC236}">
-                <a16:creationId xmlns:a16="http://schemas.microsoft.com/office/drawing/2014/main" id="{A476C176-5CF2-43BD-96CC-FEF382A6C286}"/>
+                <a16:creationId xmlns:a16="http://schemas.microsoft.com/office/drawing/2014/main" id="{769B524D-20C6-4109-BA85-D62F795F4BB8}"/>
               </a:ext>
             </a:extLst>
           </p:cNvPr>
@@ -1869,7 +1869,7 @@
           <p:cNvPr id="5" name="closing-subtitle">
             <a:extLst xmlns:a="http://schemas.openxmlformats.org/drawingml/2006/main">
               <a:ext uri="{FF2B5EF4-FFF2-40B4-BE49-F238E27FC236}">
-                <a16:creationId xmlns:a16="http://schemas.microsoft.com/office/drawing/2014/main" id="{4E004551-A860-4FB0-A719-60CAA98F451B}"/>
+                <a16:creationId xmlns:a16="http://schemas.microsoft.com/office/drawing/2014/main" id="{879AA651-331C-4913-9036-DF441DAF7508}"/>
               </a:ext>
             </a:extLst>
           </p:cNvPr>
@@ -1914,7 +1914,7 @@
           <p:cNvPr id="6" name="questions">
             <a:extLst xmlns:a="http://schemas.openxmlformats.org/drawingml/2006/main">
               <a:ext uri="{FF2B5EF4-FFF2-40B4-BE49-F238E27FC236}">
-                <a16:creationId xmlns:a16="http://schemas.microsoft.com/office/drawing/2014/main" id="{A5E59372-0216-458D-9F80-219A92307B1D}"/>
+                <a16:creationId xmlns:a16="http://schemas.microsoft.com/office/drawing/2014/main" id="{96956012-217E-4455-94F5-666BA3748418}"/>
               </a:ext>
             </a:extLst>
           </p:cNvPr>
@@ -1957,7 +1957,7 @@
     </p:spTree>
     <p:extLst>
       <p:ext uri="{BB962C8B-B14F-4D97-AF65-F5344CB8AC3E}">
-        <p14:creationId xmlns:p14="http://schemas.microsoft.com/office/powerpoint/2010/main" val="715052802"/>
+        <p14:creationId xmlns:p14="http://schemas.microsoft.com/office/powerpoint/2010/main" val="1953066978"/>
       </p:ext>
     </p:extLst>
   </p:cSld>
@@ -1981,7 +1981,7 @@
           <p:cNvPr id="1" name="slide-background">
             <a:extLst xmlns:a="http://schemas.openxmlformats.org/drawingml/2006/main">
               <a:ext uri="{FF2B5EF4-FFF2-40B4-BE49-F238E27FC236}">
-                <a16:creationId xmlns:a16="http://schemas.microsoft.com/office/drawing/2014/main" id="{DDEFB783-EEE7-476D-A6DD-FE2EDCAD73EA}"/>
+                <a16:creationId xmlns:a16="http://schemas.microsoft.com/office/drawing/2014/main" id="{8A0F036E-3D17-488A-9281-2731D77ECF96}"/>
               </a:ext>
             </a:extLst>
           </p:cNvPr>
@@ -2008,7 +2008,7 @@
           <p:cNvPr id="2" name="kicker">
             <a:extLst xmlns:a="http://schemas.openxmlformats.org/drawingml/2006/main">
               <a:ext uri="{FF2B5EF4-FFF2-40B4-BE49-F238E27FC236}">
-                <a16:creationId xmlns:a16="http://schemas.microsoft.com/office/drawing/2014/main" id="{887184D7-6755-4499-9D08-4C8F070C6288}"/>
+                <a16:creationId xmlns:a16="http://schemas.microsoft.com/office/drawing/2014/main" id="{089A0E4F-DD1F-4504-B03D-D82B64829CDD}"/>
               </a:ext>
             </a:extLst>
           </p:cNvPr>
@@ -2053,7 +2053,7 @@
           <p:cNvPr id="3" name="slide-title">
             <a:extLst xmlns:a="http://schemas.openxmlformats.org/drawingml/2006/main">
               <a:ext uri="{FF2B5EF4-FFF2-40B4-BE49-F238E27FC236}">
-                <a16:creationId xmlns:a16="http://schemas.microsoft.com/office/drawing/2014/main" id="{4BE7D942-FF29-443C-A085-491925A9E7AB}"/>
+                <a16:creationId xmlns:a16="http://schemas.microsoft.com/office/drawing/2014/main" id="{30B54B1E-EE12-4FA7-A275-28E1C703302B}"/>
               </a:ext>
             </a:extLst>
           </p:cNvPr>
@@ -2098,7 +2098,7 @@
           <p:cNvPr id="4" name="slide-subtitle">
             <a:extLst xmlns:a="http://schemas.openxmlformats.org/drawingml/2006/main">
               <a:ext uri="{FF2B5EF4-FFF2-40B4-BE49-F238E27FC236}">
-                <a16:creationId xmlns:a16="http://schemas.microsoft.com/office/drawing/2014/main" id="{59BE886D-39A5-44A8-981F-3DB9D49F5E0F}"/>
+                <a16:creationId xmlns:a16="http://schemas.microsoft.com/office/drawing/2014/main" id="{A47E7156-2D20-4444-B279-6BFF9790664B}"/>
               </a:ext>
             </a:extLst>
           </p:cNvPr>
@@ -2110,7 +2110,7 @@
         <p:spPr>
           <a:xfrm xmlns:a="http://schemas.openxmlformats.org/drawingml/2006/main">
             <a:off x="819150" y="1771650"/>
-            <a:ext cx="10648950" cy="323850"/>
+            <a:ext cx="11239500" cy="628650"/>
           </a:xfrm>
           <a:prstGeom xmlns:a="http://schemas.openxmlformats.org/drawingml/2006/main" prst="rect">
             <a:avLst/>
@@ -2133,7 +2133,7 @@
                   <a:srgbClr val="5F6368"/>
                 </a:solidFill>
               </a:rPr>
-              <a:t>CS keeps good nests, perturbs them with Levy flights, and periodically replaces discovered weak nests.</a:t>
+              <a:t>Related to evolutionary algorithms and PSO through population search; distinctive because exploration uses heavy-tailed Levy flights.</a:t>
             </a:r>
           </a:p>
         </p:txBody>
@@ -2143,18 +2143,18 @@
           <p:cNvPr id="5" name="force-title-1">
             <a:extLst xmlns:a="http://schemas.openxmlformats.org/drawingml/2006/main">
               <a:ext uri="{FF2B5EF4-FFF2-40B4-BE49-F238E27FC236}">
-                <a16:creationId xmlns:a16="http://schemas.microsoft.com/office/drawing/2014/main" id="{69AB194B-CE8F-44DB-9920-5AA51EF19247}"/>
-              </a:ext>
-            </a:extLst>
-          </p:cNvPr>
-          <p:cNvSpPr>
-            <a:spLocks xmlns:a="http://schemas.openxmlformats.org/drawingml/2006/main" noGrp="1"/>
-          </p:cNvSpPr>
-          <p:nvPr/>
-        </p:nvSpPr>
-        <p:spPr>
-          <a:xfrm xmlns:a="http://schemas.openxmlformats.org/drawingml/2006/main">
-            <a:off x="819150" y="4933950"/>
+                <a16:creationId xmlns:a16="http://schemas.microsoft.com/office/drawing/2014/main" id="{012F9FAA-1C40-443C-9D35-59569C274B0F}"/>
+              </a:ext>
+            </a:extLst>
+          </p:cNvPr>
+          <p:cNvSpPr>
+            <a:spLocks xmlns:a="http://schemas.openxmlformats.org/drawingml/2006/main" noGrp="1"/>
+          </p:cNvSpPr>
+          <p:nvPr/>
+        </p:nvSpPr>
+        <p:spPr>
+          <a:xfrm xmlns:a="http://schemas.openxmlformats.org/drawingml/2006/main">
+            <a:off x="819150" y="5086350"/>
             <a:ext cx="8058150" cy="666750"/>
           </a:xfrm>
           <a:prstGeom xmlns:a="http://schemas.openxmlformats.org/drawingml/2006/main" prst="rect">
@@ -2188,18 +2188,18 @@
           <p:cNvPr id="6" name="bullet-mark">
             <a:extLst xmlns:a="http://schemas.openxmlformats.org/drawingml/2006/main">
               <a:ext uri="{FF2B5EF4-FFF2-40B4-BE49-F238E27FC236}">
-                <a16:creationId xmlns:a16="http://schemas.microsoft.com/office/drawing/2014/main" id="{5B5A6CE5-E569-4928-A19D-B4AD294D1490}"/>
-              </a:ext>
-            </a:extLst>
-          </p:cNvPr>
-          <p:cNvSpPr>
-            <a:spLocks xmlns:a="http://schemas.openxmlformats.org/drawingml/2006/main" noGrp="1"/>
-          </p:cNvSpPr>
-          <p:nvPr/>
-        </p:nvSpPr>
-        <p:spPr>
-          <a:xfrm xmlns:a="http://schemas.openxmlformats.org/drawingml/2006/main">
-            <a:off x="819150" y="5886450"/>
+                <a16:creationId xmlns:a16="http://schemas.microsoft.com/office/drawing/2014/main" id="{FF61CEA6-C05C-49E2-8120-3E1A4EEE7A5D}"/>
+              </a:ext>
+            </a:extLst>
+          </p:cNvPr>
+          <p:cNvSpPr>
+            <a:spLocks xmlns:a="http://schemas.openxmlformats.org/drawingml/2006/main" noGrp="1"/>
+          </p:cNvSpPr>
+          <p:nvPr/>
+        </p:nvSpPr>
+        <p:spPr>
+          <a:xfrm xmlns:a="http://schemas.openxmlformats.org/drawingml/2006/main">
+            <a:off x="819150" y="6038850"/>
             <a:ext cx="152400" cy="152400"/>
           </a:xfrm>
           <a:prstGeom xmlns:a="http://schemas.openxmlformats.org/drawingml/2006/main" prst="ellipse">
@@ -2215,18 +2215,18 @@
           <p:cNvPr id="7" name="bullet-text">
             <a:extLst xmlns:a="http://schemas.openxmlformats.org/drawingml/2006/main">
               <a:ext uri="{FF2B5EF4-FFF2-40B4-BE49-F238E27FC236}">
-                <a16:creationId xmlns:a16="http://schemas.microsoft.com/office/drawing/2014/main" id="{5BAAA56B-00A9-43E2-8B13-9AC9C7096B00}"/>
-              </a:ext>
-            </a:extLst>
-          </p:cNvPr>
-          <p:cNvSpPr>
-            <a:spLocks xmlns:a="http://schemas.openxmlformats.org/drawingml/2006/main" noGrp="1"/>
-          </p:cNvSpPr>
-          <p:nvPr/>
-        </p:nvSpPr>
-        <p:spPr>
-          <a:xfrm xmlns:a="http://schemas.openxmlformats.org/drawingml/2006/main">
-            <a:off x="1143000" y="5791200"/>
+                <a16:creationId xmlns:a16="http://schemas.microsoft.com/office/drawing/2014/main" id="{4D8E6962-A084-4DB4-998C-0BAE6A51589E}"/>
+              </a:ext>
+            </a:extLst>
+          </p:cNvPr>
+          <p:cNvSpPr>
+            <a:spLocks xmlns:a="http://schemas.openxmlformats.org/drawingml/2006/main" noGrp="1"/>
+          </p:cNvSpPr>
+          <p:nvPr/>
+        </p:nvSpPr>
+        <p:spPr>
+          <a:xfrm xmlns:a="http://schemas.openxmlformats.org/drawingml/2006/main">
+            <a:off x="1143000" y="5943600"/>
             <a:ext cx="7734300" cy="342900"/>
           </a:xfrm>
           <a:prstGeom xmlns:a="http://schemas.openxmlformats.org/drawingml/2006/main" prst="rect">
@@ -2260,18 +2260,18 @@
           <p:cNvPr id="8" name="bullet-mark">
             <a:extLst xmlns:a="http://schemas.openxmlformats.org/drawingml/2006/main">
               <a:ext uri="{FF2B5EF4-FFF2-40B4-BE49-F238E27FC236}">
-                <a16:creationId xmlns:a16="http://schemas.microsoft.com/office/drawing/2014/main" id="{72236C5E-4F79-45A6-BFC0-9BB8C8F4A2E3}"/>
-              </a:ext>
-            </a:extLst>
-          </p:cNvPr>
-          <p:cNvSpPr>
-            <a:spLocks xmlns:a="http://schemas.openxmlformats.org/drawingml/2006/main" noGrp="1"/>
-          </p:cNvSpPr>
-          <p:nvPr/>
-        </p:nvSpPr>
-        <p:spPr>
-          <a:xfrm xmlns:a="http://schemas.openxmlformats.org/drawingml/2006/main">
-            <a:off x="819150" y="6400800"/>
+                <a16:creationId xmlns:a16="http://schemas.microsoft.com/office/drawing/2014/main" id="{7A9D7EAE-0340-4352-A4B8-BAFE72080F62}"/>
+              </a:ext>
+            </a:extLst>
+          </p:cNvPr>
+          <p:cNvSpPr>
+            <a:spLocks xmlns:a="http://schemas.openxmlformats.org/drawingml/2006/main" noGrp="1"/>
+          </p:cNvSpPr>
+          <p:nvPr/>
+        </p:nvSpPr>
+        <p:spPr>
+          <a:xfrm xmlns:a="http://schemas.openxmlformats.org/drawingml/2006/main">
+            <a:off x="819150" y="6553200"/>
             <a:ext cx="152400" cy="152400"/>
           </a:xfrm>
           <a:prstGeom xmlns:a="http://schemas.openxmlformats.org/drawingml/2006/main" prst="ellipse">
@@ -2287,18 +2287,18 @@
           <p:cNvPr id="9" name="bullet-text">
             <a:extLst xmlns:a="http://schemas.openxmlformats.org/drawingml/2006/main">
               <a:ext uri="{FF2B5EF4-FFF2-40B4-BE49-F238E27FC236}">
-                <a16:creationId xmlns:a16="http://schemas.microsoft.com/office/drawing/2014/main" id="{6C550BDC-743C-409A-95E3-8418F4F2A93D}"/>
-              </a:ext>
-            </a:extLst>
-          </p:cNvPr>
-          <p:cNvSpPr>
-            <a:spLocks xmlns:a="http://schemas.openxmlformats.org/drawingml/2006/main" noGrp="1"/>
-          </p:cNvSpPr>
-          <p:nvPr/>
-        </p:nvSpPr>
-        <p:spPr>
-          <a:xfrm xmlns:a="http://schemas.openxmlformats.org/drawingml/2006/main">
-            <a:off x="1143000" y="6305550"/>
+                <a16:creationId xmlns:a16="http://schemas.microsoft.com/office/drawing/2014/main" id="{116C4D17-5163-4A9D-85C1-B52FEB7660E4}"/>
+              </a:ext>
+            </a:extLst>
+          </p:cNvPr>
+          <p:cNvSpPr>
+            <a:spLocks xmlns:a="http://schemas.openxmlformats.org/drawingml/2006/main" noGrp="1"/>
+          </p:cNvSpPr>
+          <p:nvPr/>
+        </p:nvSpPr>
+        <p:spPr>
+          <a:xfrm xmlns:a="http://schemas.openxmlformats.org/drawingml/2006/main">
+            <a:off x="1143000" y="6457950"/>
             <a:ext cx="7734300" cy="342900"/>
           </a:xfrm>
           <a:prstGeom xmlns:a="http://schemas.openxmlformats.org/drawingml/2006/main" prst="rect">
@@ -2332,18 +2332,18 @@
           <p:cNvPr id="10" name="force-title-2">
             <a:extLst xmlns:a="http://schemas.openxmlformats.org/drawingml/2006/main">
               <a:ext uri="{FF2B5EF4-FFF2-40B4-BE49-F238E27FC236}">
-                <a16:creationId xmlns:a16="http://schemas.microsoft.com/office/drawing/2014/main" id="{C186CCAA-0687-4E28-82B8-53411F410CC4}"/>
-              </a:ext>
-            </a:extLst>
-          </p:cNvPr>
-          <p:cNvSpPr>
-            <a:spLocks xmlns:a="http://schemas.openxmlformats.org/drawingml/2006/main" noGrp="1"/>
-          </p:cNvSpPr>
-          <p:nvPr/>
-        </p:nvSpPr>
-        <p:spPr>
-          <a:xfrm xmlns:a="http://schemas.openxmlformats.org/drawingml/2006/main">
-            <a:off x="9410700" y="4933950"/>
+                <a16:creationId xmlns:a16="http://schemas.microsoft.com/office/drawing/2014/main" id="{5F61BDCB-A8D1-4097-81FE-C779F6095A53}"/>
+              </a:ext>
+            </a:extLst>
+          </p:cNvPr>
+          <p:cNvSpPr>
+            <a:spLocks xmlns:a="http://schemas.openxmlformats.org/drawingml/2006/main" noGrp="1"/>
+          </p:cNvSpPr>
+          <p:nvPr/>
+        </p:nvSpPr>
+        <p:spPr>
+          <a:xfrm xmlns:a="http://schemas.openxmlformats.org/drawingml/2006/main">
+            <a:off x="9410700" y="5086350"/>
             <a:ext cx="8058150" cy="666750"/>
           </a:xfrm>
           <a:prstGeom xmlns:a="http://schemas.openxmlformats.org/drawingml/2006/main" prst="rect">
@@ -2377,18 +2377,18 @@
           <p:cNvPr id="11" name="bullet-mark">
             <a:extLst xmlns:a="http://schemas.openxmlformats.org/drawingml/2006/main">
               <a:ext uri="{FF2B5EF4-FFF2-40B4-BE49-F238E27FC236}">
-                <a16:creationId xmlns:a16="http://schemas.microsoft.com/office/drawing/2014/main" id="{8415CEAB-C1E9-40B4-9448-E773B6CFD3C6}"/>
-              </a:ext>
-            </a:extLst>
-          </p:cNvPr>
-          <p:cNvSpPr>
-            <a:spLocks xmlns:a="http://schemas.openxmlformats.org/drawingml/2006/main" noGrp="1"/>
-          </p:cNvSpPr>
-          <p:nvPr/>
-        </p:nvSpPr>
-        <p:spPr>
-          <a:xfrm xmlns:a="http://schemas.openxmlformats.org/drawingml/2006/main">
-            <a:off x="9410700" y="5886450"/>
+                <a16:creationId xmlns:a16="http://schemas.microsoft.com/office/drawing/2014/main" id="{D94EA917-7B38-47E7-9248-B44075C1D7DA}"/>
+              </a:ext>
+            </a:extLst>
+          </p:cNvPr>
+          <p:cNvSpPr>
+            <a:spLocks xmlns:a="http://schemas.openxmlformats.org/drawingml/2006/main" noGrp="1"/>
+          </p:cNvSpPr>
+          <p:nvPr/>
+        </p:nvSpPr>
+        <p:spPr>
+          <a:xfrm xmlns:a="http://schemas.openxmlformats.org/drawingml/2006/main">
+            <a:off x="9410700" y="6038850"/>
             <a:ext cx="152400" cy="152400"/>
           </a:xfrm>
           <a:prstGeom xmlns:a="http://schemas.openxmlformats.org/drawingml/2006/main" prst="ellipse">
@@ -2404,18 +2404,18 @@
           <p:cNvPr id="12" name="bullet-text">
             <a:extLst xmlns:a="http://schemas.openxmlformats.org/drawingml/2006/main">
               <a:ext uri="{FF2B5EF4-FFF2-40B4-BE49-F238E27FC236}">
-                <a16:creationId xmlns:a16="http://schemas.microsoft.com/office/drawing/2014/main" id="{F802C9B5-1274-4EE0-BA1A-238767811B43}"/>
-              </a:ext>
-            </a:extLst>
-          </p:cNvPr>
-          <p:cNvSpPr>
-            <a:spLocks xmlns:a="http://schemas.openxmlformats.org/drawingml/2006/main" noGrp="1"/>
-          </p:cNvSpPr>
-          <p:nvPr/>
-        </p:nvSpPr>
-        <p:spPr>
-          <a:xfrm xmlns:a="http://schemas.openxmlformats.org/drawingml/2006/main">
-            <a:off x="9734550" y="5791200"/>
+                <a16:creationId xmlns:a16="http://schemas.microsoft.com/office/drawing/2014/main" id="{198CA39F-F75D-439B-91E8-5C896D4D0165}"/>
+              </a:ext>
+            </a:extLst>
+          </p:cNvPr>
+          <p:cNvSpPr>
+            <a:spLocks xmlns:a="http://schemas.openxmlformats.org/drawingml/2006/main" noGrp="1"/>
+          </p:cNvSpPr>
+          <p:nvPr/>
+        </p:nvSpPr>
+        <p:spPr>
+          <a:xfrm xmlns:a="http://schemas.openxmlformats.org/drawingml/2006/main">
+            <a:off x="9734550" y="5943600"/>
             <a:ext cx="7734300" cy="342900"/>
           </a:xfrm>
           <a:prstGeom xmlns:a="http://schemas.openxmlformats.org/drawingml/2006/main" prst="rect">
@@ -2449,18 +2449,18 @@
           <p:cNvPr id="13" name="bullet-mark">
             <a:extLst xmlns:a="http://schemas.openxmlformats.org/drawingml/2006/main">
               <a:ext uri="{FF2B5EF4-FFF2-40B4-BE49-F238E27FC236}">
-                <a16:creationId xmlns:a16="http://schemas.microsoft.com/office/drawing/2014/main" id="{C2100D44-500D-434A-84FB-F81D023DAD20}"/>
-              </a:ext>
-            </a:extLst>
-          </p:cNvPr>
-          <p:cNvSpPr>
-            <a:spLocks xmlns:a="http://schemas.openxmlformats.org/drawingml/2006/main" noGrp="1"/>
-          </p:cNvSpPr>
-          <p:nvPr/>
-        </p:nvSpPr>
-        <p:spPr>
-          <a:xfrm xmlns:a="http://schemas.openxmlformats.org/drawingml/2006/main">
-            <a:off x="9410700" y="6400800"/>
+                <a16:creationId xmlns:a16="http://schemas.microsoft.com/office/drawing/2014/main" id="{E12A21A3-CB43-465B-846A-0EDC3067C511}"/>
+              </a:ext>
+            </a:extLst>
+          </p:cNvPr>
+          <p:cNvSpPr>
+            <a:spLocks xmlns:a="http://schemas.openxmlformats.org/drawingml/2006/main" noGrp="1"/>
+          </p:cNvSpPr>
+          <p:nvPr/>
+        </p:nvSpPr>
+        <p:spPr>
+          <a:xfrm xmlns:a="http://schemas.openxmlformats.org/drawingml/2006/main">
+            <a:off x="9410700" y="6553200"/>
             <a:ext cx="152400" cy="152400"/>
           </a:xfrm>
           <a:prstGeom xmlns:a="http://schemas.openxmlformats.org/drawingml/2006/main" prst="ellipse">
@@ -2476,18 +2476,18 @@
           <p:cNvPr id="14" name="bullet-text">
             <a:extLst xmlns:a="http://schemas.openxmlformats.org/drawingml/2006/main">
               <a:ext uri="{FF2B5EF4-FFF2-40B4-BE49-F238E27FC236}">
-                <a16:creationId xmlns:a16="http://schemas.microsoft.com/office/drawing/2014/main" id="{B438E3C0-AB76-490A-BB91-21B19E1C41F1}"/>
-              </a:ext>
-            </a:extLst>
-          </p:cNvPr>
-          <p:cNvSpPr>
-            <a:spLocks xmlns:a="http://schemas.openxmlformats.org/drawingml/2006/main" noGrp="1"/>
-          </p:cNvSpPr>
-          <p:nvPr/>
-        </p:nvSpPr>
-        <p:spPr>
-          <a:xfrm xmlns:a="http://schemas.openxmlformats.org/drawingml/2006/main">
-            <a:off x="9734550" y="6305550"/>
+                <a16:creationId xmlns:a16="http://schemas.microsoft.com/office/drawing/2014/main" id="{168B27DB-D9C3-4F4F-9837-B6B0C26F11FE}"/>
+              </a:ext>
+            </a:extLst>
+          </p:cNvPr>
+          <p:cNvSpPr>
+            <a:spLocks xmlns:a="http://schemas.openxmlformats.org/drawingml/2006/main" noGrp="1"/>
+          </p:cNvSpPr>
+          <p:nvPr/>
+        </p:nvSpPr>
+        <p:spPr>
+          <a:xfrm xmlns:a="http://schemas.openxmlformats.org/drawingml/2006/main">
+            <a:off x="9734550" y="6457950"/>
             <a:ext cx="7734300" cy="342900"/>
           </a:xfrm>
           <a:prstGeom xmlns:a="http://schemas.openxmlformats.org/drawingml/2006/main" prst="rect">
@@ -2521,7 +2521,7 @@
           <p:cNvPr id="15" name="source-footer">
             <a:extLst xmlns:a="http://schemas.openxmlformats.org/drawingml/2006/main">
               <a:ext uri="{FF2B5EF4-FFF2-40B4-BE49-F238E27FC236}">
-                <a16:creationId xmlns:a16="http://schemas.microsoft.com/office/drawing/2014/main" id="{97A124DE-C7CD-41A6-8559-70239EE8EA1F}"/>
+                <a16:creationId xmlns:a16="http://schemas.microsoft.com/office/drawing/2014/main" id="{52FBBCA4-757F-4BD1-B52D-0847B56AECAF}"/>
               </a:ext>
             </a:extLst>
           </p:cNvPr>
@@ -2564,7 +2564,7 @@
     </p:spTree>
     <p:extLst>
       <p:ext uri="{BB962C8B-B14F-4D97-AF65-F5344CB8AC3E}">
-        <p14:creationId xmlns:p14="http://schemas.microsoft.com/office/powerpoint/2010/main" val="695499649"/>
+        <p14:creationId xmlns:p14="http://schemas.microsoft.com/office/powerpoint/2010/main" val="2007950881"/>
       </p:ext>
     </p:extLst>
   </p:cSld>
@@ -2588,7 +2588,7 @@
           <p:cNvPr id="1" name="slide-background">
             <a:extLst xmlns:a="http://schemas.openxmlformats.org/drawingml/2006/main">
               <a:ext uri="{FF2B5EF4-FFF2-40B4-BE49-F238E27FC236}">
-                <a16:creationId xmlns:a16="http://schemas.microsoft.com/office/drawing/2014/main" id="{C8FCBADE-E3ED-4150-A493-951458C51EF8}"/>
+                <a16:creationId xmlns:a16="http://schemas.microsoft.com/office/drawing/2014/main" id="{644AA2B5-9DD3-48B5-926B-1A49956A6C97}"/>
               </a:ext>
             </a:extLst>
           </p:cNvPr>
@@ -2615,7 +2615,7 @@
           <p:cNvPr id="2" name="kicker">
             <a:extLst xmlns:a="http://schemas.openxmlformats.org/drawingml/2006/main">
               <a:ext uri="{FF2B5EF4-FFF2-40B4-BE49-F238E27FC236}">
-                <a16:creationId xmlns:a16="http://schemas.microsoft.com/office/drawing/2014/main" id="{1EDD0968-09E2-43C9-906D-A2BDE657CCF1}"/>
+                <a16:creationId xmlns:a16="http://schemas.microsoft.com/office/drawing/2014/main" id="{02197CF2-5B7D-4DE3-9E88-A953E5EEA2AE}"/>
               </a:ext>
             </a:extLst>
           </p:cNvPr>
@@ -2660,7 +2660,7 @@
           <p:cNvPr id="3" name="slide-title">
             <a:extLst xmlns:a="http://schemas.openxmlformats.org/drawingml/2006/main">
               <a:ext uri="{FF2B5EF4-FFF2-40B4-BE49-F238E27FC236}">
-                <a16:creationId xmlns:a16="http://schemas.microsoft.com/office/drawing/2014/main" id="{DF5F09BE-E33B-475B-A422-5D24978E2B58}"/>
+                <a16:creationId xmlns:a16="http://schemas.microsoft.com/office/drawing/2014/main" id="{EC97FC3A-B24A-4204-BAF3-FF153CFBE56D}"/>
               </a:ext>
             </a:extLst>
           </p:cNvPr>
@@ -2705,7 +2705,7 @@
           <p:cNvPr id="4" name="slide-subtitle">
             <a:extLst xmlns:a="http://schemas.openxmlformats.org/drawingml/2006/main">
               <a:ext uri="{FF2B5EF4-FFF2-40B4-BE49-F238E27FC236}">
-                <a16:creationId xmlns:a16="http://schemas.microsoft.com/office/drawing/2014/main" id="{9F666AAE-6715-48E5-812A-F6CF20EF181D}"/>
+                <a16:creationId xmlns:a16="http://schemas.microsoft.com/office/drawing/2014/main" id="{79494B17-E1EE-4BEC-9D30-50DFC37A8ECD}"/>
               </a:ext>
             </a:extLst>
           </p:cNvPr>
@@ -2750,7 +2750,7 @@
           <p:cNvPr id="5" name="h1">
             <a:extLst xmlns:a="http://schemas.openxmlformats.org/drawingml/2006/main">
               <a:ext uri="{FF2B5EF4-FFF2-40B4-BE49-F238E27FC236}">
-                <a16:creationId xmlns:a16="http://schemas.microsoft.com/office/drawing/2014/main" id="{6BC98CBA-222C-4705-B0DE-05CE1FB2C0BE}"/>
+                <a16:creationId xmlns:a16="http://schemas.microsoft.com/office/drawing/2014/main" id="{AAE3F422-2DED-4CFD-86EA-CD09DC4173BC}"/>
               </a:ext>
             </a:extLst>
           </p:cNvPr>
@@ -2762,25 +2762,25 @@
         <p:spPr>
           <a:xfrm xmlns:a="http://schemas.openxmlformats.org/drawingml/2006/main">
             <a:off x="819150" y="2381250"/>
-            <a:ext cx="3790950" cy="1600200"/>
-          </a:xfrm>
-          <a:prstGeom xmlns:a="http://schemas.openxmlformats.org/drawingml/2006/main" prst="rect">
-            <a:avLst/>
-          </a:prstGeom>
-        </p:spPr>
-        <p:txBody>
-          <a:bodyPr xmlns:a="http://schemas.openxmlformats.org/drawingml/2006/main" lIns="0" tIns="0" rIns="0" bIns="0"/>
-          <a:lstStyle xmlns:a="http://schemas.openxmlformats.org/drawingml/2006/main"/>
-          <a:p xmlns:a="http://schemas.openxmlformats.org/drawingml/2006/main">
-            <a:pPr>
-              <a:defRPr sz="2175" b="1">
+            <a:ext cx="3886200" cy="266700"/>
+          </a:xfrm>
+          <a:prstGeom xmlns:a="http://schemas.openxmlformats.org/drawingml/2006/main" prst="rect">
+            <a:avLst/>
+          </a:prstGeom>
+        </p:spPr>
+        <p:txBody>
+          <a:bodyPr xmlns:a="http://schemas.openxmlformats.org/drawingml/2006/main" lIns="0" tIns="0" rIns="0" bIns="0"/>
+          <a:lstStyle xmlns:a="http://schemas.openxmlformats.org/drawingml/2006/main"/>
+          <a:p xmlns:a="http://schemas.openxmlformats.org/drawingml/2006/main">
+            <a:pPr>
+              <a:defRPr sz="1650" b="1">
                 <a:solidFill>
                   <a:srgbClr val="246A73"/>
                 </a:solidFill>
               </a:defRPr>
             </a:pPr>
             <a:r>
-              <a:rPr sz="2175" b="1">
+              <a:rPr sz="1650" b="1">
                 <a:solidFill>
                   <a:srgbClr val="246A73"/>
                 </a:solidFill>
@@ -2795,37 +2795,37 @@
           <p:cNvPr id="6" name="h2">
             <a:extLst xmlns:a="http://schemas.openxmlformats.org/drawingml/2006/main">
               <a:ext uri="{FF2B5EF4-FFF2-40B4-BE49-F238E27FC236}">
-                <a16:creationId xmlns:a16="http://schemas.microsoft.com/office/drawing/2014/main" id="{5FB5D7C3-6585-4278-86C7-2E1CB0477F4F}"/>
-              </a:ext>
-            </a:extLst>
-          </p:cNvPr>
-          <p:cNvSpPr>
-            <a:spLocks xmlns:a="http://schemas.openxmlformats.org/drawingml/2006/main" noGrp="1"/>
-          </p:cNvSpPr>
-          <p:nvPr/>
-        </p:nvSpPr>
-        <p:spPr>
-          <a:xfrm xmlns:a="http://schemas.openxmlformats.org/drawingml/2006/main">
-            <a:off x="4914900" y="2381250"/>
-            <a:ext cx="6115050" cy="1600200"/>
-          </a:xfrm>
-          <a:prstGeom xmlns:a="http://schemas.openxmlformats.org/drawingml/2006/main" prst="rect">
-            <a:avLst/>
-          </a:prstGeom>
-        </p:spPr>
-        <p:txBody>
-          <a:bodyPr xmlns:a="http://schemas.openxmlformats.org/drawingml/2006/main" lIns="0" tIns="0" rIns="0" bIns="0"/>
-          <a:lstStyle xmlns:a="http://schemas.openxmlformats.org/drawingml/2006/main"/>
-          <a:p xmlns:a="http://schemas.openxmlformats.org/drawingml/2006/main">
-            <a:pPr>
-              <a:defRPr sz="2175" b="1">
+                <a16:creationId xmlns:a16="http://schemas.microsoft.com/office/drawing/2014/main" id="{0AFE2486-0D27-4EB0-ADB7-C74F37F01D6D}"/>
+              </a:ext>
+            </a:extLst>
+          </p:cNvPr>
+          <p:cNvSpPr>
+            <a:spLocks xmlns:a="http://schemas.openxmlformats.org/drawingml/2006/main" noGrp="1"/>
+          </p:cNvSpPr>
+          <p:nvPr/>
+        </p:nvSpPr>
+        <p:spPr>
+          <a:xfrm xmlns:a="http://schemas.openxmlformats.org/drawingml/2006/main">
+            <a:off x="5048250" y="2381250"/>
+            <a:ext cx="5829300" cy="266700"/>
+          </a:xfrm>
+          <a:prstGeom xmlns:a="http://schemas.openxmlformats.org/drawingml/2006/main" prst="rect">
+            <a:avLst/>
+          </a:prstGeom>
+        </p:spPr>
+        <p:txBody>
+          <a:bodyPr xmlns:a="http://schemas.openxmlformats.org/drawingml/2006/main" lIns="0" tIns="0" rIns="0" bIns="0"/>
+          <a:lstStyle xmlns:a="http://schemas.openxmlformats.org/drawingml/2006/main"/>
+          <a:p xmlns:a="http://schemas.openxmlformats.org/drawingml/2006/main">
+            <a:pPr>
+              <a:defRPr sz="1650" b="1">
                 <a:solidFill>
                   <a:srgbClr val="246A73"/>
                 </a:solidFill>
               </a:defRPr>
             </a:pPr>
             <a:r>
-              <a:rPr sz="2175" b="1">
+              <a:rPr sz="1650" b="1">
                 <a:solidFill>
                   <a:srgbClr val="246A73"/>
                 </a:solidFill>
@@ -2840,37 +2840,37 @@
           <p:cNvPr id="7" name="h3">
             <a:extLst xmlns:a="http://schemas.openxmlformats.org/drawingml/2006/main">
               <a:ext uri="{FF2B5EF4-FFF2-40B4-BE49-F238E27FC236}">
-                <a16:creationId xmlns:a16="http://schemas.microsoft.com/office/drawing/2014/main" id="{9912EF92-6D4F-4D3A-B892-5EE6E686185A}"/>
-              </a:ext>
-            </a:extLst>
-          </p:cNvPr>
-          <p:cNvSpPr>
-            <a:spLocks xmlns:a="http://schemas.openxmlformats.org/drawingml/2006/main" noGrp="1"/>
-          </p:cNvSpPr>
-          <p:nvPr/>
-        </p:nvSpPr>
-        <p:spPr>
-          <a:xfrm xmlns:a="http://schemas.openxmlformats.org/drawingml/2006/main">
-            <a:off x="11353800" y="2381250"/>
-            <a:ext cx="6115050" cy="1600200"/>
-          </a:xfrm>
-          <a:prstGeom xmlns:a="http://schemas.openxmlformats.org/drawingml/2006/main" prst="rect">
-            <a:avLst/>
-          </a:prstGeom>
-        </p:spPr>
-        <p:txBody>
-          <a:bodyPr xmlns:a="http://schemas.openxmlformats.org/drawingml/2006/main" lIns="0" tIns="0" rIns="0" bIns="0"/>
-          <a:lstStyle xmlns:a="http://schemas.openxmlformats.org/drawingml/2006/main"/>
-          <a:p xmlns:a="http://schemas.openxmlformats.org/drawingml/2006/main">
-            <a:pPr>
-              <a:defRPr sz="2175" b="1">
+                <a16:creationId xmlns:a16="http://schemas.microsoft.com/office/drawing/2014/main" id="{712A2978-40F9-45CF-95F4-54AE3A79EFC9}"/>
+              </a:ext>
+            </a:extLst>
+          </p:cNvPr>
+          <p:cNvSpPr>
+            <a:spLocks xmlns:a="http://schemas.openxmlformats.org/drawingml/2006/main" noGrp="1"/>
+          </p:cNvSpPr>
+          <p:nvPr/>
+        </p:nvSpPr>
+        <p:spPr>
+          <a:xfrm xmlns:a="http://schemas.openxmlformats.org/drawingml/2006/main">
+            <a:off x="11220450" y="2381250"/>
+            <a:ext cx="6248400" cy="266700"/>
+          </a:xfrm>
+          <a:prstGeom xmlns:a="http://schemas.openxmlformats.org/drawingml/2006/main" prst="rect">
+            <a:avLst/>
+          </a:prstGeom>
+        </p:spPr>
+        <p:txBody>
+          <a:bodyPr xmlns:a="http://schemas.openxmlformats.org/drawingml/2006/main" lIns="0" tIns="0" rIns="0" bIns="0"/>
+          <a:lstStyle xmlns:a="http://schemas.openxmlformats.org/drawingml/2006/main"/>
+          <a:p xmlns:a="http://schemas.openxmlformats.org/drawingml/2006/main">
+            <a:pPr>
+              <a:defRPr sz="1650" b="1">
                 <a:solidFill>
                   <a:srgbClr val="246A73"/>
                 </a:solidFill>
               </a:defRPr>
             </a:pPr>
             <a:r>
-              <a:rPr sz="2175" b="1">
+              <a:rPr sz="1650" b="1">
                 <a:solidFill>
                   <a:srgbClr val="246A73"/>
                 </a:solidFill>
@@ -2882,42 +2882,75 @@
       </p:sp>
       <p:sp>
         <p:nvSpPr>
-          <p:cNvPr id="8" name="r1c1">
-            <a:extLst xmlns:a="http://schemas.openxmlformats.org/drawingml/2006/main">
-              <a:ext uri="{FF2B5EF4-FFF2-40B4-BE49-F238E27FC236}">
-                <a16:creationId xmlns:a16="http://schemas.microsoft.com/office/drawing/2014/main" id="{C5289769-FC54-48A7-8924-F71679EA3918}"/>
-              </a:ext>
-            </a:extLst>
-          </p:cNvPr>
-          <p:cNvSpPr>
-            <a:spLocks xmlns:a="http://schemas.openxmlformats.org/drawingml/2006/main" noGrp="1"/>
-          </p:cNvSpPr>
-          <p:nvPr/>
-        </p:nvSpPr>
-        <p:spPr>
-          <a:xfrm xmlns:a="http://schemas.openxmlformats.org/drawingml/2006/main">
-            <a:off x="819150" y="4114800"/>
-            <a:ext cx="3790950" cy="1600200"/>
-          </a:xfrm>
-          <a:prstGeom xmlns:a="http://schemas.openxmlformats.org/drawingml/2006/main" prst="rect">
-            <a:avLst/>
-          </a:prstGeom>
-        </p:spPr>
-        <p:txBody>
-          <a:bodyPr xmlns:a="http://schemas.openxmlformats.org/drawingml/2006/main" lIns="0" tIns="0" rIns="0" bIns="0"/>
-          <a:lstStyle xmlns:a="http://schemas.openxmlformats.org/drawingml/2006/main"/>
-          <a:p xmlns:a="http://schemas.openxmlformats.org/drawingml/2006/main">
-            <a:pPr>
-              <a:defRPr sz="2175">
-                <a:solidFill>
-                  <a:srgbClr val="1F2933"/>
-                </a:solidFill>
-              </a:defRPr>
-            </a:pPr>
-            <a:r>
-              <a:rPr sz="2175">
-                <a:solidFill>
-                  <a:srgbClr val="1F2933"/>
+          <p:cNvPr id="8" name="one-egg-rule">
+            <a:extLst xmlns:a="http://schemas.openxmlformats.org/drawingml/2006/main">
+              <a:ext uri="{FF2B5EF4-FFF2-40B4-BE49-F238E27FC236}">
+                <a16:creationId xmlns:a16="http://schemas.microsoft.com/office/drawing/2014/main" id="{75D99340-7525-45DC-8823-FDC7CDF5409D}"/>
+              </a:ext>
+            </a:extLst>
+          </p:cNvPr>
+          <p:cNvSpPr>
+            <a:spLocks xmlns:a="http://schemas.openxmlformats.org/drawingml/2006/main" noGrp="1"/>
+          </p:cNvSpPr>
+          <p:nvPr/>
+        </p:nvSpPr>
+        <p:spPr>
+          <a:xfrm xmlns:a="http://schemas.openxmlformats.org/drawingml/2006/main">
+            <a:off x="819150" y="2686050"/>
+            <a:ext cx="16649700" cy="19050"/>
+          </a:xfrm>
+          <a:prstGeom xmlns:a="http://schemas.openxmlformats.org/drawingml/2006/main" prst="rect">
+            <a:avLst/>
+          </a:prstGeom>
+          <a:solidFill xmlns:a="http://schemas.openxmlformats.org/drawingml/2006/main">
+            <a:srgbClr val="D8D1C8"/>
+          </a:solidFill>
+          <a:ln xmlns:a="http://schemas.openxmlformats.org/drawingml/2006/main" w="0">
+            <a:solidFill>
+              <a:srgbClr val="D8D1C8"/>
+            </a:solidFill>
+            <a:prstDash val="solid"/>
+          </a:ln>
+        </p:spPr>
+      </p:sp>
+      <p:sp>
+        <p:nvSpPr>
+          <p:cNvPr id="9" name="paper-rule-cell">
+            <a:extLst xmlns:a="http://schemas.openxmlformats.org/drawingml/2006/main">
+              <a:ext uri="{FF2B5EF4-FFF2-40B4-BE49-F238E27FC236}">
+                <a16:creationId xmlns:a16="http://schemas.microsoft.com/office/drawing/2014/main" id="{AD005D34-9AF4-4596-9B64-800F5EA7D328}"/>
+              </a:ext>
+            </a:extLst>
+          </p:cNvPr>
+          <p:cNvSpPr>
+            <a:spLocks xmlns:a="http://schemas.openxmlformats.org/drawingml/2006/main" noGrp="1"/>
+          </p:cNvSpPr>
+          <p:nvPr/>
+        </p:nvSpPr>
+        <p:spPr>
+          <a:xfrm xmlns:a="http://schemas.openxmlformats.org/drawingml/2006/main">
+            <a:off x="819150" y="2952750"/>
+            <a:ext cx="3886200" cy="381000"/>
+          </a:xfrm>
+          <a:prstGeom xmlns:a="http://schemas.openxmlformats.org/drawingml/2006/main" prst="rect">
+            <a:avLst/>
+          </a:prstGeom>
+        </p:spPr>
+        <p:txBody>
+          <a:bodyPr xmlns:a="http://schemas.openxmlformats.org/drawingml/2006/main" lIns="0" tIns="0" rIns="0" bIns="0"/>
+          <a:lstStyle xmlns:a="http://schemas.openxmlformats.org/drawingml/2006/main"/>
+          <a:p xmlns:a="http://schemas.openxmlformats.org/drawingml/2006/main">
+            <a:pPr>
+              <a:defRPr sz="2400" b="1">
+                <a:solidFill>
+                  <a:srgbClr val="246A73"/>
+                </a:solidFill>
+              </a:defRPr>
+            </a:pPr>
+            <a:r>
+              <a:rPr sz="2400" b="1">
+                <a:solidFill>
+                  <a:srgbClr val="246A73"/>
                 </a:solidFill>
               </a:rPr>
               <a:t>One egg</a:t>
@@ -2927,87 +2960,87 @@
       </p:sp>
       <p:sp>
         <p:nvSpPr>
-          <p:cNvPr id="9" name="r1c2">
-            <a:extLst xmlns:a="http://schemas.openxmlformats.org/drawingml/2006/main">
-              <a:ext uri="{FF2B5EF4-FFF2-40B4-BE49-F238E27FC236}">
-                <a16:creationId xmlns:a16="http://schemas.microsoft.com/office/drawing/2014/main" id="{307422CC-DBCA-416D-869B-DDDD02A91FC2}"/>
-              </a:ext>
-            </a:extLst>
-          </p:cNvPr>
-          <p:cNvSpPr>
-            <a:spLocks xmlns:a="http://schemas.openxmlformats.org/drawingml/2006/main" noGrp="1"/>
-          </p:cNvSpPr>
-          <p:nvPr/>
-        </p:nvSpPr>
-        <p:spPr>
-          <a:xfrm xmlns:a="http://schemas.openxmlformats.org/drawingml/2006/main">
-            <a:off x="4914900" y="4114800"/>
-            <a:ext cx="6115050" cy="1600200"/>
-          </a:xfrm>
-          <a:prstGeom xmlns:a="http://schemas.openxmlformats.org/drawingml/2006/main" prst="rect">
-            <a:avLst/>
-          </a:prstGeom>
-        </p:spPr>
-        <p:txBody>
-          <a:bodyPr xmlns:a="http://schemas.openxmlformats.org/drawingml/2006/main" lIns="0" tIns="0" rIns="0" bIns="0"/>
-          <a:lstStyle xmlns:a="http://schemas.openxmlformats.org/drawingml/2006/main"/>
-          <a:p xmlns:a="http://schemas.openxmlformats.org/drawingml/2006/main">
-            <a:pPr>
-              <a:defRPr sz="2175">
-                <a:solidFill>
-                  <a:srgbClr val="1F2933"/>
-                </a:solidFill>
-              </a:defRPr>
-            </a:pPr>
-            <a:r>
-              <a:rPr sz="2175">
-                <a:solidFill>
-                  <a:srgbClr val="1F2933"/>
-                </a:solidFill>
-              </a:rPr>
-              <a:t>One new candidate solution</a:t>
-            </a:r>
-          </a:p>
-        </p:txBody>
-      </p:sp>
-      <p:sp>
-        <p:nvSpPr>
-          <p:cNvPr id="10" name="r1c3">
-            <a:extLst xmlns:a="http://schemas.openxmlformats.org/drawingml/2006/main">
-              <a:ext uri="{FF2B5EF4-FFF2-40B4-BE49-F238E27FC236}">
-                <a16:creationId xmlns:a16="http://schemas.microsoft.com/office/drawing/2014/main" id="{FCCB16E8-55C0-4553-9736-2504A9CB2F62}"/>
-              </a:ext>
-            </a:extLst>
-          </p:cNvPr>
-          <p:cNvSpPr>
-            <a:spLocks xmlns:a="http://schemas.openxmlformats.org/drawingml/2006/main" noGrp="1"/>
-          </p:cNvSpPr>
-          <p:nvPr/>
-        </p:nvSpPr>
-        <p:spPr>
-          <a:xfrm xmlns:a="http://schemas.openxmlformats.org/drawingml/2006/main">
-            <a:off x="11353800" y="4114800"/>
-            <a:ext cx="6115050" cy="1600200"/>
-          </a:xfrm>
-          <a:prstGeom xmlns:a="http://schemas.openxmlformats.org/drawingml/2006/main" prst="rect">
-            <a:avLst/>
-          </a:prstGeom>
-        </p:spPr>
-        <p:txBody>
-          <a:bodyPr xmlns:a="http://schemas.openxmlformats.org/drawingml/2006/main" lIns="0" tIns="0" rIns="0" bIns="0"/>
-          <a:lstStyle xmlns:a="http://schemas.openxmlformats.org/drawingml/2006/main"/>
-          <a:p xmlns:a="http://schemas.openxmlformats.org/drawingml/2006/main">
-            <a:pPr>
-              <a:defRPr sz="2175">
-                <a:solidFill>
-                  <a:srgbClr val="1F2933"/>
-                </a:solidFill>
-              </a:defRPr>
-            </a:pPr>
-            <a:r>
-              <a:rPr sz="2175">
-                <a:solidFill>
-                  <a:srgbClr val="1F2933"/>
+          <p:cNvPr id="10" name="meaning-cell">
+            <a:extLst xmlns:a="http://schemas.openxmlformats.org/drawingml/2006/main">
+              <a:ext uri="{FF2B5EF4-FFF2-40B4-BE49-F238E27FC236}">
+                <a16:creationId xmlns:a16="http://schemas.microsoft.com/office/drawing/2014/main" id="{EE8B88B8-0EE7-4F66-A885-25782F7D540A}"/>
+              </a:ext>
+            </a:extLst>
+          </p:cNvPr>
+          <p:cNvSpPr>
+            <a:spLocks xmlns:a="http://schemas.openxmlformats.org/drawingml/2006/main" noGrp="1"/>
+          </p:cNvSpPr>
+          <p:nvPr/>
+        </p:nvSpPr>
+        <p:spPr>
+          <a:xfrm xmlns:a="http://schemas.openxmlformats.org/drawingml/2006/main">
+            <a:off x="5048250" y="2952750"/>
+            <a:ext cx="5829300" cy="381000"/>
+          </a:xfrm>
+          <a:prstGeom xmlns:a="http://schemas.openxmlformats.org/drawingml/2006/main" prst="rect">
+            <a:avLst/>
+          </a:prstGeom>
+        </p:spPr>
+        <p:txBody>
+          <a:bodyPr xmlns:a="http://schemas.openxmlformats.org/drawingml/2006/main" lIns="0" tIns="0" rIns="0" bIns="0"/>
+          <a:lstStyle xmlns:a="http://schemas.openxmlformats.org/drawingml/2006/main"/>
+          <a:p xmlns:a="http://schemas.openxmlformats.org/drawingml/2006/main">
+            <a:pPr>
+              <a:defRPr sz="1875">
+                <a:solidFill>
+                  <a:srgbClr val="1F2933"/>
+                </a:solidFill>
+              </a:defRPr>
+            </a:pPr>
+            <a:r>
+              <a:rPr sz="1875">
+                <a:solidFill>
+                  <a:srgbClr val="1F2933"/>
+                </a:solidFill>
+              </a:rPr>
+              <a:t>new candidate solution</a:t>
+            </a:r>
+          </a:p>
+        </p:txBody>
+      </p:sp>
+      <p:sp>
+        <p:nvSpPr>
+          <p:cNvPr id="11" name="implementation-cell">
+            <a:extLst xmlns:a="http://schemas.openxmlformats.org/drawingml/2006/main">
+              <a:ext uri="{FF2B5EF4-FFF2-40B4-BE49-F238E27FC236}">
+                <a16:creationId xmlns:a16="http://schemas.microsoft.com/office/drawing/2014/main" id="{633CE4EA-53B9-44B8-B860-A1F8423D021D}"/>
+              </a:ext>
+            </a:extLst>
+          </p:cNvPr>
+          <p:cNvSpPr>
+            <a:spLocks xmlns:a="http://schemas.openxmlformats.org/drawingml/2006/main" noGrp="1"/>
+          </p:cNvSpPr>
+          <p:nvPr/>
+        </p:nvSpPr>
+        <p:spPr>
+          <a:xfrm xmlns:a="http://schemas.openxmlformats.org/drawingml/2006/main">
+            <a:off x="11220450" y="2952750"/>
+            <a:ext cx="6248400" cy="381000"/>
+          </a:xfrm>
+          <a:prstGeom xmlns:a="http://schemas.openxmlformats.org/drawingml/2006/main" prst="rect">
+            <a:avLst/>
+          </a:prstGeom>
+        </p:spPr>
+        <p:txBody>
+          <a:bodyPr xmlns:a="http://schemas.openxmlformats.org/drawingml/2006/main" lIns="0" tIns="0" rIns="0" bIns="0"/>
+          <a:lstStyle xmlns:a="http://schemas.openxmlformats.org/drawingml/2006/main"/>
+          <a:p xmlns:a="http://schemas.openxmlformats.org/drawingml/2006/main">
+            <a:pPr>
+              <a:defRPr sz="1875">
+                <a:solidFill>
+                  <a:srgbClr val="5F6368"/>
+                </a:solidFill>
+              </a:defRPr>
+            </a:pPr>
+            <a:r>
+              <a:rPr sz="1875">
+                <a:solidFill>
+                  <a:srgbClr val="5F6368"/>
                 </a:solidFill>
               </a:rPr>
               <a:t>Levy-generated vector in 10D</a:t>
@@ -3017,42 +3050,75 @@
       </p:sp>
       <p:sp>
         <p:nvSpPr>
-          <p:cNvPr id="11" name="r2c1">
-            <a:extLst xmlns:a="http://schemas.openxmlformats.org/drawingml/2006/main">
-              <a:ext uri="{FF2B5EF4-FFF2-40B4-BE49-F238E27FC236}">
-                <a16:creationId xmlns:a16="http://schemas.microsoft.com/office/drawing/2014/main" id="{DF66488D-FAF0-4C6A-8780-6FE4F240C3B9}"/>
-              </a:ext>
-            </a:extLst>
-          </p:cNvPr>
-          <p:cNvSpPr>
-            <a:spLocks xmlns:a="http://schemas.openxmlformats.org/drawingml/2006/main" noGrp="1"/>
-          </p:cNvSpPr>
-          <p:nvPr/>
-        </p:nvSpPr>
-        <p:spPr>
-          <a:xfrm xmlns:a="http://schemas.openxmlformats.org/drawingml/2006/main">
-            <a:off x="819150" y="5867400"/>
-            <a:ext cx="3790950" cy="1600200"/>
-          </a:xfrm>
-          <a:prstGeom xmlns:a="http://schemas.openxmlformats.org/drawingml/2006/main" prst="rect">
-            <a:avLst/>
-          </a:prstGeom>
-        </p:spPr>
-        <p:txBody>
-          <a:bodyPr xmlns:a="http://schemas.openxmlformats.org/drawingml/2006/main" lIns="0" tIns="0" rIns="0" bIns="0"/>
-          <a:lstStyle xmlns:a="http://schemas.openxmlformats.org/drawingml/2006/main"/>
-          <a:p xmlns:a="http://schemas.openxmlformats.org/drawingml/2006/main">
-            <a:pPr>
-              <a:defRPr sz="2175">
-                <a:solidFill>
-                  <a:srgbClr val="1F2933"/>
-                </a:solidFill>
-              </a:defRPr>
-            </a:pPr>
-            <a:r>
-              <a:rPr sz="2175">
-                <a:solidFill>
-                  <a:srgbClr val="1F2933"/>
+          <p:cNvPr id="12" name="best-nests-survive-rule">
+            <a:extLst xmlns:a="http://schemas.openxmlformats.org/drawingml/2006/main">
+              <a:ext uri="{FF2B5EF4-FFF2-40B4-BE49-F238E27FC236}">
+                <a16:creationId xmlns:a16="http://schemas.microsoft.com/office/drawing/2014/main" id="{3E38BEC4-FBC3-4524-A21D-8D1F5CF1FEDC}"/>
+              </a:ext>
+            </a:extLst>
+          </p:cNvPr>
+          <p:cNvSpPr>
+            <a:spLocks xmlns:a="http://schemas.openxmlformats.org/drawingml/2006/main" noGrp="1"/>
+          </p:cNvSpPr>
+          <p:nvPr/>
+        </p:nvSpPr>
+        <p:spPr>
+          <a:xfrm xmlns:a="http://schemas.openxmlformats.org/drawingml/2006/main">
+            <a:off x="819150" y="3505200"/>
+            <a:ext cx="16649700" cy="19050"/>
+          </a:xfrm>
+          <a:prstGeom xmlns:a="http://schemas.openxmlformats.org/drawingml/2006/main" prst="rect">
+            <a:avLst/>
+          </a:prstGeom>
+          <a:solidFill xmlns:a="http://schemas.openxmlformats.org/drawingml/2006/main">
+            <a:srgbClr val="D8D1C8"/>
+          </a:solidFill>
+          <a:ln xmlns:a="http://schemas.openxmlformats.org/drawingml/2006/main" w="0">
+            <a:solidFill>
+              <a:srgbClr val="D8D1C8"/>
+            </a:solidFill>
+            <a:prstDash val="solid"/>
+          </a:ln>
+        </p:spPr>
+      </p:sp>
+      <p:sp>
+        <p:nvSpPr>
+          <p:cNvPr id="13" name="paper-rule-cell">
+            <a:extLst xmlns:a="http://schemas.openxmlformats.org/drawingml/2006/main">
+              <a:ext uri="{FF2B5EF4-FFF2-40B4-BE49-F238E27FC236}">
+                <a16:creationId xmlns:a16="http://schemas.microsoft.com/office/drawing/2014/main" id="{00C7A936-ECA3-49AF-A40E-89D21C3D618D}"/>
+              </a:ext>
+            </a:extLst>
+          </p:cNvPr>
+          <p:cNvSpPr>
+            <a:spLocks xmlns:a="http://schemas.openxmlformats.org/drawingml/2006/main" noGrp="1"/>
+          </p:cNvSpPr>
+          <p:nvPr/>
+        </p:nvSpPr>
+        <p:spPr>
+          <a:xfrm xmlns:a="http://schemas.openxmlformats.org/drawingml/2006/main">
+            <a:off x="819150" y="3771900"/>
+            <a:ext cx="3886200" cy="381000"/>
+          </a:xfrm>
+          <a:prstGeom xmlns:a="http://schemas.openxmlformats.org/drawingml/2006/main" prst="rect">
+            <a:avLst/>
+          </a:prstGeom>
+        </p:spPr>
+        <p:txBody>
+          <a:bodyPr xmlns:a="http://schemas.openxmlformats.org/drawingml/2006/main" lIns="0" tIns="0" rIns="0" bIns="0"/>
+          <a:lstStyle xmlns:a="http://schemas.openxmlformats.org/drawingml/2006/main"/>
+          <a:p xmlns:a="http://schemas.openxmlformats.org/drawingml/2006/main">
+            <a:pPr>
+              <a:defRPr sz="2400" b="1">
+                <a:solidFill>
+                  <a:srgbClr val="B5532F"/>
+                </a:solidFill>
+              </a:defRPr>
+            </a:pPr>
+            <a:r>
+              <a:rPr sz="2400" b="1">
+                <a:solidFill>
+                  <a:srgbClr val="B5532F"/>
                 </a:solidFill>
               </a:rPr>
               <a:t>Best nests survive</a:t>
@@ -3062,132 +3128,165 @@
       </p:sp>
       <p:sp>
         <p:nvSpPr>
-          <p:cNvPr id="12" name="r2c2">
-            <a:extLst xmlns:a="http://schemas.openxmlformats.org/drawingml/2006/main">
-              <a:ext uri="{FF2B5EF4-FFF2-40B4-BE49-F238E27FC236}">
-                <a16:creationId xmlns:a16="http://schemas.microsoft.com/office/drawing/2014/main" id="{C9305429-CFBF-4A96-A463-FFF11B5F545A}"/>
-              </a:ext>
-            </a:extLst>
-          </p:cNvPr>
-          <p:cNvSpPr>
-            <a:spLocks xmlns:a="http://schemas.openxmlformats.org/drawingml/2006/main" noGrp="1"/>
-          </p:cNvSpPr>
-          <p:nvPr/>
-        </p:nvSpPr>
-        <p:spPr>
-          <a:xfrm xmlns:a="http://schemas.openxmlformats.org/drawingml/2006/main">
-            <a:off x="4914900" y="5867400"/>
-            <a:ext cx="6115050" cy="1600200"/>
-          </a:xfrm>
-          <a:prstGeom xmlns:a="http://schemas.openxmlformats.org/drawingml/2006/main" prst="rect">
-            <a:avLst/>
-          </a:prstGeom>
-        </p:spPr>
-        <p:txBody>
-          <a:bodyPr xmlns:a="http://schemas.openxmlformats.org/drawingml/2006/main" lIns="0" tIns="0" rIns="0" bIns="0"/>
-          <a:lstStyle xmlns:a="http://schemas.openxmlformats.org/drawingml/2006/main"/>
-          <a:p xmlns:a="http://schemas.openxmlformats.org/drawingml/2006/main">
-            <a:pPr>
-              <a:defRPr sz="2175">
-                <a:solidFill>
-                  <a:srgbClr val="1F2933"/>
-                </a:solidFill>
-              </a:defRPr>
-            </a:pPr>
-            <a:r>
-              <a:rPr sz="2175">
-                <a:solidFill>
-                  <a:srgbClr val="1F2933"/>
-                </a:solidFill>
-              </a:rPr>
-              <a:t>Elitist selection</a:t>
-            </a:r>
-          </a:p>
-        </p:txBody>
-      </p:sp>
-      <p:sp>
-        <p:nvSpPr>
-          <p:cNvPr id="13" name="r2c3">
-            <a:extLst xmlns:a="http://schemas.openxmlformats.org/drawingml/2006/main">
-              <a:ext uri="{FF2B5EF4-FFF2-40B4-BE49-F238E27FC236}">
-                <a16:creationId xmlns:a16="http://schemas.microsoft.com/office/drawing/2014/main" id="{D1E8A080-4ADD-4C53-825A-5F6E933DB7B7}"/>
-              </a:ext>
-            </a:extLst>
-          </p:cNvPr>
-          <p:cNvSpPr>
-            <a:spLocks xmlns:a="http://schemas.openxmlformats.org/drawingml/2006/main" noGrp="1"/>
-          </p:cNvSpPr>
-          <p:nvPr/>
-        </p:nvSpPr>
-        <p:spPr>
-          <a:xfrm xmlns:a="http://schemas.openxmlformats.org/drawingml/2006/main">
-            <a:off x="11353800" y="5867400"/>
-            <a:ext cx="6115050" cy="1600200"/>
-          </a:xfrm>
-          <a:prstGeom xmlns:a="http://schemas.openxmlformats.org/drawingml/2006/main" prst="rect">
-            <a:avLst/>
-          </a:prstGeom>
-        </p:spPr>
-        <p:txBody>
-          <a:bodyPr xmlns:a="http://schemas.openxmlformats.org/drawingml/2006/main" lIns="0" tIns="0" rIns="0" bIns="0"/>
-          <a:lstStyle xmlns:a="http://schemas.openxmlformats.org/drawingml/2006/main"/>
-          <a:p xmlns:a="http://schemas.openxmlformats.org/drawingml/2006/main">
-            <a:pPr>
-              <a:defRPr sz="2175">
-                <a:solidFill>
-                  <a:srgbClr val="1F2933"/>
-                </a:solidFill>
-              </a:defRPr>
-            </a:pPr>
-            <a:r>
-              <a:rPr sz="2175">
-                <a:solidFill>
-                  <a:srgbClr val="1F2933"/>
-                </a:solidFill>
-              </a:rPr>
-              <a:t>Global best is copied back if needed</a:t>
-            </a:r>
-          </a:p>
-        </p:txBody>
-      </p:sp>
-      <p:sp>
-        <p:nvSpPr>
-          <p:cNvPr id="14" name="r3c1">
-            <a:extLst xmlns:a="http://schemas.openxmlformats.org/drawingml/2006/main">
-              <a:ext uri="{FF2B5EF4-FFF2-40B4-BE49-F238E27FC236}">
-                <a16:creationId xmlns:a16="http://schemas.microsoft.com/office/drawing/2014/main" id="{6BC02299-0A12-4AE8-A683-EE5EDB027817}"/>
-              </a:ext>
-            </a:extLst>
-          </p:cNvPr>
-          <p:cNvSpPr>
-            <a:spLocks xmlns:a="http://schemas.openxmlformats.org/drawingml/2006/main" noGrp="1"/>
-          </p:cNvSpPr>
-          <p:nvPr/>
-        </p:nvSpPr>
-        <p:spPr>
-          <a:xfrm xmlns:a="http://schemas.openxmlformats.org/drawingml/2006/main">
-            <a:off x="819150" y="7620000"/>
-            <a:ext cx="3790950" cy="1600200"/>
-          </a:xfrm>
-          <a:prstGeom xmlns:a="http://schemas.openxmlformats.org/drawingml/2006/main" prst="rect">
-            <a:avLst/>
-          </a:prstGeom>
-        </p:spPr>
-        <p:txBody>
-          <a:bodyPr xmlns:a="http://schemas.openxmlformats.org/drawingml/2006/main" lIns="0" tIns="0" rIns="0" bIns="0"/>
-          <a:lstStyle xmlns:a="http://schemas.openxmlformats.org/drawingml/2006/main"/>
-          <a:p xmlns:a="http://schemas.openxmlformats.org/drawingml/2006/main">
-            <a:pPr>
-              <a:defRPr sz="2175">
-                <a:solidFill>
-                  <a:srgbClr val="1F2933"/>
-                </a:solidFill>
-              </a:defRPr>
-            </a:pPr>
-            <a:r>
-              <a:rPr sz="2175">
-                <a:solidFill>
-                  <a:srgbClr val="1F2933"/>
+          <p:cNvPr id="14" name="meaning-cell">
+            <a:extLst xmlns:a="http://schemas.openxmlformats.org/drawingml/2006/main">
+              <a:ext uri="{FF2B5EF4-FFF2-40B4-BE49-F238E27FC236}">
+                <a16:creationId xmlns:a16="http://schemas.microsoft.com/office/drawing/2014/main" id="{41DA4042-E8E4-49C6-BBC7-EB8CD934A563}"/>
+              </a:ext>
+            </a:extLst>
+          </p:cNvPr>
+          <p:cNvSpPr>
+            <a:spLocks xmlns:a="http://schemas.openxmlformats.org/drawingml/2006/main" noGrp="1"/>
+          </p:cNvSpPr>
+          <p:nvPr/>
+        </p:nvSpPr>
+        <p:spPr>
+          <a:xfrm xmlns:a="http://schemas.openxmlformats.org/drawingml/2006/main">
+            <a:off x="5048250" y="3771900"/>
+            <a:ext cx="5829300" cy="381000"/>
+          </a:xfrm>
+          <a:prstGeom xmlns:a="http://schemas.openxmlformats.org/drawingml/2006/main" prst="rect">
+            <a:avLst/>
+          </a:prstGeom>
+        </p:spPr>
+        <p:txBody>
+          <a:bodyPr xmlns:a="http://schemas.openxmlformats.org/drawingml/2006/main" lIns="0" tIns="0" rIns="0" bIns="0"/>
+          <a:lstStyle xmlns:a="http://schemas.openxmlformats.org/drawingml/2006/main"/>
+          <a:p xmlns:a="http://schemas.openxmlformats.org/drawingml/2006/main">
+            <a:pPr>
+              <a:defRPr sz="1875">
+                <a:solidFill>
+                  <a:srgbClr val="1F2933"/>
+                </a:solidFill>
+              </a:defRPr>
+            </a:pPr>
+            <a:r>
+              <a:rPr sz="1875">
+                <a:solidFill>
+                  <a:srgbClr val="1F2933"/>
+                </a:solidFill>
+              </a:rPr>
+              <a:t>elitist selection</a:t>
+            </a:r>
+          </a:p>
+        </p:txBody>
+      </p:sp>
+      <p:sp>
+        <p:nvSpPr>
+          <p:cNvPr id="15" name="implementation-cell">
+            <a:extLst xmlns:a="http://schemas.openxmlformats.org/drawingml/2006/main">
+              <a:ext uri="{FF2B5EF4-FFF2-40B4-BE49-F238E27FC236}">
+                <a16:creationId xmlns:a16="http://schemas.microsoft.com/office/drawing/2014/main" id="{77E93FB4-37E6-49C3-A0E1-CC40D72ED87E}"/>
+              </a:ext>
+            </a:extLst>
+          </p:cNvPr>
+          <p:cNvSpPr>
+            <a:spLocks xmlns:a="http://schemas.openxmlformats.org/drawingml/2006/main" noGrp="1"/>
+          </p:cNvSpPr>
+          <p:nvPr/>
+        </p:nvSpPr>
+        <p:spPr>
+          <a:xfrm xmlns:a="http://schemas.openxmlformats.org/drawingml/2006/main">
+            <a:off x="11220450" y="3771900"/>
+            <a:ext cx="6248400" cy="381000"/>
+          </a:xfrm>
+          <a:prstGeom xmlns:a="http://schemas.openxmlformats.org/drawingml/2006/main" prst="rect">
+            <a:avLst/>
+          </a:prstGeom>
+        </p:spPr>
+        <p:txBody>
+          <a:bodyPr xmlns:a="http://schemas.openxmlformats.org/drawingml/2006/main" lIns="0" tIns="0" rIns="0" bIns="0"/>
+          <a:lstStyle xmlns:a="http://schemas.openxmlformats.org/drawingml/2006/main"/>
+          <a:p xmlns:a="http://schemas.openxmlformats.org/drawingml/2006/main">
+            <a:pPr>
+              <a:defRPr sz="1875">
+                <a:solidFill>
+                  <a:srgbClr val="5F6368"/>
+                </a:solidFill>
+              </a:defRPr>
+            </a:pPr>
+            <a:r>
+              <a:rPr sz="1875">
+                <a:solidFill>
+                  <a:srgbClr val="5F6368"/>
+                </a:solidFill>
+              </a:rPr>
+              <a:t>global best copied back if needed</a:t>
+            </a:r>
+          </a:p>
+        </p:txBody>
+      </p:sp>
+      <p:sp>
+        <p:nvSpPr>
+          <p:cNvPr id="16" name="discovery-pa-rule">
+            <a:extLst xmlns:a="http://schemas.openxmlformats.org/drawingml/2006/main">
+              <a:ext uri="{FF2B5EF4-FFF2-40B4-BE49-F238E27FC236}">
+                <a16:creationId xmlns:a16="http://schemas.microsoft.com/office/drawing/2014/main" id="{DB43F5DE-7469-4CA5-8E77-909A19A08922}"/>
+              </a:ext>
+            </a:extLst>
+          </p:cNvPr>
+          <p:cNvSpPr>
+            <a:spLocks xmlns:a="http://schemas.openxmlformats.org/drawingml/2006/main" noGrp="1"/>
+          </p:cNvSpPr>
+          <p:nvPr/>
+        </p:nvSpPr>
+        <p:spPr>
+          <a:xfrm xmlns:a="http://schemas.openxmlformats.org/drawingml/2006/main">
+            <a:off x="819150" y="4324350"/>
+            <a:ext cx="16649700" cy="19050"/>
+          </a:xfrm>
+          <a:prstGeom xmlns:a="http://schemas.openxmlformats.org/drawingml/2006/main" prst="rect">
+            <a:avLst/>
+          </a:prstGeom>
+          <a:solidFill xmlns:a="http://schemas.openxmlformats.org/drawingml/2006/main">
+            <a:srgbClr val="D8D1C8"/>
+          </a:solidFill>
+          <a:ln xmlns:a="http://schemas.openxmlformats.org/drawingml/2006/main" w="0">
+            <a:solidFill>
+              <a:srgbClr val="D8D1C8"/>
+            </a:solidFill>
+            <a:prstDash val="solid"/>
+          </a:ln>
+        </p:spPr>
+      </p:sp>
+      <p:sp>
+        <p:nvSpPr>
+          <p:cNvPr id="17" name="paper-rule-cell">
+            <a:extLst xmlns:a="http://schemas.openxmlformats.org/drawingml/2006/main">
+              <a:ext uri="{FF2B5EF4-FFF2-40B4-BE49-F238E27FC236}">
+                <a16:creationId xmlns:a16="http://schemas.microsoft.com/office/drawing/2014/main" id="{D331D300-11B1-4287-B40C-8603A9FEF525}"/>
+              </a:ext>
+            </a:extLst>
+          </p:cNvPr>
+          <p:cNvSpPr>
+            <a:spLocks xmlns:a="http://schemas.openxmlformats.org/drawingml/2006/main" noGrp="1"/>
+          </p:cNvSpPr>
+          <p:nvPr/>
+        </p:nvSpPr>
+        <p:spPr>
+          <a:xfrm xmlns:a="http://schemas.openxmlformats.org/drawingml/2006/main">
+            <a:off x="819150" y="4591050"/>
+            <a:ext cx="3886200" cy="381000"/>
+          </a:xfrm>
+          <a:prstGeom xmlns:a="http://schemas.openxmlformats.org/drawingml/2006/main" prst="rect">
+            <a:avLst/>
+          </a:prstGeom>
+        </p:spPr>
+        <p:txBody>
+          <a:bodyPr xmlns:a="http://schemas.openxmlformats.org/drawingml/2006/main" lIns="0" tIns="0" rIns="0" bIns="0"/>
+          <a:lstStyle xmlns:a="http://schemas.openxmlformats.org/drawingml/2006/main"/>
+          <a:p xmlns:a="http://schemas.openxmlformats.org/drawingml/2006/main">
+            <a:pPr>
+              <a:defRPr sz="2400" b="1">
+                <a:solidFill>
+                  <a:srgbClr val="6B5CA5"/>
+                </a:solidFill>
+              </a:defRPr>
+            </a:pPr>
+            <a:r>
+              <a:rPr sz="2400" b="1">
+                <a:solidFill>
+                  <a:srgbClr val="6B5CA5"/>
                 </a:solidFill>
               </a:rPr>
               <a:t>Discovery pa</a:t>
@@ -3197,100 +3296,403 @@
       </p:sp>
       <p:sp>
         <p:nvSpPr>
-          <p:cNvPr id="15" name="r3c2">
-            <a:extLst xmlns:a="http://schemas.openxmlformats.org/drawingml/2006/main">
-              <a:ext uri="{FF2B5EF4-FFF2-40B4-BE49-F238E27FC236}">
-                <a16:creationId xmlns:a16="http://schemas.microsoft.com/office/drawing/2014/main" id="{8DF4E7FD-159E-4006-BE3D-9250161AB53D}"/>
-              </a:ext>
-            </a:extLst>
-          </p:cNvPr>
-          <p:cNvSpPr>
-            <a:spLocks xmlns:a="http://schemas.openxmlformats.org/drawingml/2006/main" noGrp="1"/>
-          </p:cNvSpPr>
-          <p:nvPr/>
-        </p:nvSpPr>
-        <p:spPr>
-          <a:xfrm xmlns:a="http://schemas.openxmlformats.org/drawingml/2006/main">
-            <a:off x="4914900" y="7620000"/>
-            <a:ext cx="6115050" cy="1600200"/>
-          </a:xfrm>
-          <a:prstGeom xmlns:a="http://schemas.openxmlformats.org/drawingml/2006/main" prst="rect">
-            <a:avLst/>
-          </a:prstGeom>
-        </p:spPr>
-        <p:txBody>
-          <a:bodyPr xmlns:a="http://schemas.openxmlformats.org/drawingml/2006/main" lIns="0" tIns="0" rIns="0" bIns="0"/>
-          <a:lstStyle xmlns:a="http://schemas.openxmlformats.org/drawingml/2006/main"/>
-          <a:p xmlns:a="http://schemas.openxmlformats.org/drawingml/2006/main">
-            <a:pPr>
-              <a:defRPr sz="2175">
-                <a:solidFill>
-                  <a:srgbClr val="1F2933"/>
-                </a:solidFill>
-              </a:defRPr>
-            </a:pPr>
-            <a:r>
-              <a:rPr sz="2175">
-                <a:solidFill>
-                  <a:srgbClr val="1F2933"/>
-                </a:solidFill>
-              </a:rPr>
-              <a:t>Abandon weak regions</a:t>
-            </a:r>
-          </a:p>
-        </p:txBody>
-      </p:sp>
-      <p:sp>
-        <p:nvSpPr>
-          <p:cNvPr id="16" name="r3c3">
-            <a:extLst xmlns:a="http://schemas.openxmlformats.org/drawingml/2006/main">
-              <a:ext uri="{FF2B5EF4-FFF2-40B4-BE49-F238E27FC236}">
-                <a16:creationId xmlns:a16="http://schemas.microsoft.com/office/drawing/2014/main" id="{EE1E6998-6F6A-4DD7-96F9-CA6DE5C66CB9}"/>
-              </a:ext>
-            </a:extLst>
-          </p:cNvPr>
-          <p:cNvSpPr>
-            <a:spLocks xmlns:a="http://schemas.openxmlformats.org/drawingml/2006/main" noGrp="1"/>
-          </p:cNvSpPr>
-          <p:nvPr/>
-        </p:nvSpPr>
-        <p:spPr>
-          <a:xfrm xmlns:a="http://schemas.openxmlformats.org/drawingml/2006/main">
-            <a:off x="11353800" y="7620000"/>
-            <a:ext cx="6115050" cy="1600200"/>
-          </a:xfrm>
-          <a:prstGeom xmlns:a="http://schemas.openxmlformats.org/drawingml/2006/main" prst="rect">
-            <a:avLst/>
-          </a:prstGeom>
-        </p:spPr>
-        <p:txBody>
-          <a:bodyPr xmlns:a="http://schemas.openxmlformats.org/drawingml/2006/main" lIns="0" tIns="0" rIns="0" bIns="0"/>
-          <a:lstStyle xmlns:a="http://schemas.openxmlformats.org/drawingml/2006/main"/>
-          <a:p xmlns:a="http://schemas.openxmlformats.org/drawingml/2006/main">
-            <a:pPr>
-              <a:defRPr sz="2175">
-                <a:solidFill>
-                  <a:srgbClr val="1F2933"/>
-                </a:solidFill>
-              </a:defRPr>
-            </a:pPr>
-            <a:r>
-              <a:rPr sz="2175">
-                <a:solidFill>
-                  <a:srgbClr val="1F2933"/>
-                </a:solidFill>
-              </a:rPr>
-              <a:t>Population random walk replacement</a:t>
-            </a:r>
-          </a:p>
-        </p:txBody>
-      </p:sp>
-      <p:sp>
-        <p:nvSpPr>
-          <p:cNvPr id="17" name="source-footer">
-            <a:extLst xmlns:a="http://schemas.openxmlformats.org/drawingml/2006/main">
-              <a:ext uri="{FF2B5EF4-FFF2-40B4-BE49-F238E27FC236}">
-                <a16:creationId xmlns:a16="http://schemas.microsoft.com/office/drawing/2014/main" id="{FDB4F90B-3DC5-43DB-B595-088F7BC48621}"/>
+          <p:cNvPr id="18" name="meaning-cell">
+            <a:extLst xmlns:a="http://schemas.openxmlformats.org/drawingml/2006/main">
+              <a:ext uri="{FF2B5EF4-FFF2-40B4-BE49-F238E27FC236}">
+                <a16:creationId xmlns:a16="http://schemas.microsoft.com/office/drawing/2014/main" id="{C8C5FC8D-EE62-4575-B517-8D396388EBE4}"/>
+              </a:ext>
+            </a:extLst>
+          </p:cNvPr>
+          <p:cNvSpPr>
+            <a:spLocks xmlns:a="http://schemas.openxmlformats.org/drawingml/2006/main" noGrp="1"/>
+          </p:cNvSpPr>
+          <p:nvPr/>
+        </p:nvSpPr>
+        <p:spPr>
+          <a:xfrm xmlns:a="http://schemas.openxmlformats.org/drawingml/2006/main">
+            <a:off x="5048250" y="4591050"/>
+            <a:ext cx="5829300" cy="381000"/>
+          </a:xfrm>
+          <a:prstGeom xmlns:a="http://schemas.openxmlformats.org/drawingml/2006/main" prst="rect">
+            <a:avLst/>
+          </a:prstGeom>
+        </p:spPr>
+        <p:txBody>
+          <a:bodyPr xmlns:a="http://schemas.openxmlformats.org/drawingml/2006/main" lIns="0" tIns="0" rIns="0" bIns="0"/>
+          <a:lstStyle xmlns:a="http://schemas.openxmlformats.org/drawingml/2006/main"/>
+          <a:p xmlns:a="http://schemas.openxmlformats.org/drawingml/2006/main">
+            <a:pPr>
+              <a:defRPr sz="1875">
+                <a:solidFill>
+                  <a:srgbClr val="1F2933"/>
+                </a:solidFill>
+              </a:defRPr>
+            </a:pPr>
+            <a:r>
+              <a:rPr sz="1875">
+                <a:solidFill>
+                  <a:srgbClr val="1F2933"/>
+                </a:solidFill>
+              </a:rPr>
+              <a:t>abandon weak regions</a:t>
+            </a:r>
+          </a:p>
+        </p:txBody>
+      </p:sp>
+      <p:sp>
+        <p:nvSpPr>
+          <p:cNvPr id="19" name="implementation-cell">
+            <a:extLst xmlns:a="http://schemas.openxmlformats.org/drawingml/2006/main">
+              <a:ext uri="{FF2B5EF4-FFF2-40B4-BE49-F238E27FC236}">
+                <a16:creationId xmlns:a16="http://schemas.microsoft.com/office/drawing/2014/main" id="{E2311006-DC83-46FF-A9B2-91AEC3C02623}"/>
+              </a:ext>
+            </a:extLst>
+          </p:cNvPr>
+          <p:cNvSpPr>
+            <a:spLocks xmlns:a="http://schemas.openxmlformats.org/drawingml/2006/main" noGrp="1"/>
+          </p:cNvSpPr>
+          <p:nvPr/>
+        </p:nvSpPr>
+        <p:spPr>
+          <a:xfrm xmlns:a="http://schemas.openxmlformats.org/drawingml/2006/main">
+            <a:off x="11220450" y="4591050"/>
+            <a:ext cx="6248400" cy="381000"/>
+          </a:xfrm>
+          <a:prstGeom xmlns:a="http://schemas.openxmlformats.org/drawingml/2006/main" prst="rect">
+            <a:avLst/>
+          </a:prstGeom>
+        </p:spPr>
+        <p:txBody>
+          <a:bodyPr xmlns:a="http://schemas.openxmlformats.org/drawingml/2006/main" lIns="0" tIns="0" rIns="0" bIns="0"/>
+          <a:lstStyle xmlns:a="http://schemas.openxmlformats.org/drawingml/2006/main"/>
+          <a:p xmlns:a="http://schemas.openxmlformats.org/drawingml/2006/main">
+            <a:pPr>
+              <a:defRPr sz="1875">
+                <a:solidFill>
+                  <a:srgbClr val="5F6368"/>
+                </a:solidFill>
+              </a:defRPr>
+            </a:pPr>
+            <a:r>
+              <a:rPr sz="1875">
+                <a:solidFill>
+                  <a:srgbClr val="5F6368"/>
+                </a:solidFill>
+              </a:rPr>
+              <a:t>population random-walk replacement</a:t>
+            </a:r>
+          </a:p>
+        </p:txBody>
+      </p:sp>
+      <p:sp>
+        <p:nvSpPr>
+          <p:cNvPr id="20" name="mapping-bottom-rule">
+            <a:extLst xmlns:a="http://schemas.openxmlformats.org/drawingml/2006/main">
+              <a:ext uri="{FF2B5EF4-FFF2-40B4-BE49-F238E27FC236}">
+                <a16:creationId xmlns:a16="http://schemas.microsoft.com/office/drawing/2014/main" id="{6FED9BF8-235D-4A50-AFFD-DB5A648AB44A}"/>
+              </a:ext>
+            </a:extLst>
+          </p:cNvPr>
+          <p:cNvSpPr>
+            <a:spLocks xmlns:a="http://schemas.openxmlformats.org/drawingml/2006/main" noGrp="1"/>
+          </p:cNvSpPr>
+          <p:nvPr/>
+        </p:nvSpPr>
+        <p:spPr>
+          <a:xfrm xmlns:a="http://schemas.openxmlformats.org/drawingml/2006/main">
+            <a:off x="819150" y="5143500"/>
+            <a:ext cx="16649700" cy="19050"/>
+          </a:xfrm>
+          <a:prstGeom xmlns:a="http://schemas.openxmlformats.org/drawingml/2006/main" prst="rect">
+            <a:avLst/>
+          </a:prstGeom>
+          <a:solidFill xmlns:a="http://schemas.openxmlformats.org/drawingml/2006/main">
+            <a:srgbClr val="D8D1C8"/>
+          </a:solidFill>
+          <a:ln xmlns:a="http://schemas.openxmlformats.org/drawingml/2006/main" w="0">
+            <a:solidFill>
+              <a:srgbClr val="D8D1C8"/>
+            </a:solidFill>
+            <a:prstDash val="solid"/>
+          </a:ln>
+        </p:spPr>
+      </p:sp>
+      <p:sp>
+        <p:nvSpPr>
+          <p:cNvPr id="21" name="metric-value">
+            <a:extLst xmlns:a="http://schemas.openxmlformats.org/drawingml/2006/main">
+              <a:ext uri="{FF2B5EF4-FFF2-40B4-BE49-F238E27FC236}">
+                <a16:creationId xmlns:a16="http://schemas.microsoft.com/office/drawing/2014/main" id="{D92375D9-17BA-424D-9DED-2F1FDBE4668D}"/>
+              </a:ext>
+            </a:extLst>
+          </p:cNvPr>
+          <p:cNvSpPr>
+            <a:spLocks xmlns:a="http://schemas.openxmlformats.org/drawingml/2006/main" noGrp="1"/>
+          </p:cNvSpPr>
+          <p:nvPr/>
+        </p:nvSpPr>
+        <p:spPr>
+          <a:xfrm xmlns:a="http://schemas.openxmlformats.org/drawingml/2006/main">
+            <a:off x="819150" y="6858000"/>
+            <a:ext cx="5200650" cy="647700"/>
+          </a:xfrm>
+          <a:prstGeom xmlns:a="http://schemas.openxmlformats.org/drawingml/2006/main" prst="rect">
+            <a:avLst/>
+          </a:prstGeom>
+        </p:spPr>
+        <p:txBody>
+          <a:bodyPr xmlns:a="http://schemas.openxmlformats.org/drawingml/2006/main" lIns="0" tIns="0" rIns="0" bIns="0"/>
+          <a:lstStyle xmlns:a="http://schemas.openxmlformats.org/drawingml/2006/main"/>
+          <a:p xmlns:a="http://schemas.openxmlformats.org/drawingml/2006/main">
+            <a:pPr>
+              <a:defRPr sz="4200" b="1">
+                <a:solidFill>
+                  <a:srgbClr val="246A73"/>
+                </a:solidFill>
+              </a:defRPr>
+            </a:pPr>
+            <a:r>
+              <a:rPr sz="4200" b="1">
+                <a:solidFill>
+                  <a:srgbClr val="246A73"/>
+                </a:solidFill>
+              </a:rPr>
+              <a:t>x in R^10</a:t>
+            </a:r>
+          </a:p>
+        </p:txBody>
+      </p:sp>
+      <p:sp>
+        <p:nvSpPr>
+          <p:cNvPr id="22" name="metric-label">
+            <a:extLst xmlns:a="http://schemas.openxmlformats.org/drawingml/2006/main">
+              <a:ext uri="{FF2B5EF4-FFF2-40B4-BE49-F238E27FC236}">
+                <a16:creationId xmlns:a16="http://schemas.microsoft.com/office/drawing/2014/main" id="{C5C8135B-BF15-487A-8B25-DAEF36A48E28}"/>
+              </a:ext>
+            </a:extLst>
+          </p:cNvPr>
+          <p:cNvSpPr>
+            <a:spLocks xmlns:a="http://schemas.openxmlformats.org/drawingml/2006/main" noGrp="1"/>
+          </p:cNvSpPr>
+          <p:nvPr/>
+        </p:nvSpPr>
+        <p:spPr>
+          <a:xfrm xmlns:a="http://schemas.openxmlformats.org/drawingml/2006/main">
+            <a:off x="819150" y="7581900"/>
+            <a:ext cx="5200650" cy="228600"/>
+          </a:xfrm>
+          <a:prstGeom xmlns:a="http://schemas.openxmlformats.org/drawingml/2006/main" prst="rect">
+            <a:avLst/>
+          </a:prstGeom>
+        </p:spPr>
+        <p:txBody>
+          <a:bodyPr xmlns:a="http://schemas.openxmlformats.org/drawingml/2006/main" lIns="0" tIns="0" rIns="0" bIns="0"/>
+          <a:lstStyle xmlns:a="http://schemas.openxmlformats.org/drawingml/2006/main"/>
+          <a:p xmlns:a="http://schemas.openxmlformats.org/drawingml/2006/main">
+            <a:pPr>
+              <a:defRPr sz="1500">
+                <a:solidFill>
+                  <a:srgbClr val="5F6368"/>
+                </a:solidFill>
+              </a:defRPr>
+            </a:pPr>
+            <a:r>
+              <a:rPr sz="1500">
+                <a:solidFill>
+                  <a:srgbClr val="5F6368"/>
+                </a:solidFill>
+              </a:rPr>
+              <a:t>candidate</a:t>
+            </a:r>
+          </a:p>
+        </p:txBody>
+      </p:sp>
+      <p:sp>
+        <p:nvSpPr>
+          <p:cNvPr id="23" name="metric-value">
+            <a:extLst xmlns:a="http://schemas.openxmlformats.org/drawingml/2006/main">
+              <a:ext uri="{FF2B5EF4-FFF2-40B4-BE49-F238E27FC236}">
+                <a16:creationId xmlns:a16="http://schemas.microsoft.com/office/drawing/2014/main" id="{EC875179-9F3D-4BD6-8A96-2D2291E7B5D8}"/>
+              </a:ext>
+            </a:extLst>
+          </p:cNvPr>
+          <p:cNvSpPr>
+            <a:spLocks xmlns:a="http://schemas.openxmlformats.org/drawingml/2006/main" noGrp="1"/>
+          </p:cNvSpPr>
+          <p:nvPr/>
+        </p:nvSpPr>
+        <p:spPr>
+          <a:xfrm xmlns:a="http://schemas.openxmlformats.org/drawingml/2006/main">
+            <a:off x="6553200" y="6858000"/>
+            <a:ext cx="5200650" cy="647700"/>
+          </a:xfrm>
+          <a:prstGeom xmlns:a="http://schemas.openxmlformats.org/drawingml/2006/main" prst="rect">
+            <a:avLst/>
+          </a:prstGeom>
+        </p:spPr>
+        <p:txBody>
+          <a:bodyPr xmlns:a="http://schemas.openxmlformats.org/drawingml/2006/main" lIns="0" tIns="0" rIns="0" bIns="0"/>
+          <a:lstStyle xmlns:a="http://schemas.openxmlformats.org/drawingml/2006/main"/>
+          <a:p xmlns:a="http://schemas.openxmlformats.org/drawingml/2006/main">
+            <a:pPr>
+              <a:defRPr sz="4200" b="1">
+                <a:solidFill>
+                  <a:srgbClr val="B5532F"/>
+                </a:solidFill>
+              </a:defRPr>
+            </a:pPr>
+            <a:r>
+              <a:rPr sz="4200" b="1">
+                <a:solidFill>
+                  <a:srgbClr val="B5532F"/>
+                </a:solidFill>
+              </a:rPr>
+              <a:t>min f(x)</a:t>
+            </a:r>
+          </a:p>
+        </p:txBody>
+      </p:sp>
+      <p:sp>
+        <p:nvSpPr>
+          <p:cNvPr id="24" name="metric-label">
+            <a:extLst xmlns:a="http://schemas.openxmlformats.org/drawingml/2006/main">
+              <a:ext uri="{FF2B5EF4-FFF2-40B4-BE49-F238E27FC236}">
+                <a16:creationId xmlns:a16="http://schemas.microsoft.com/office/drawing/2014/main" id="{9ADB5AF4-CA9D-4996-B339-590D918754F4}"/>
+              </a:ext>
+            </a:extLst>
+          </p:cNvPr>
+          <p:cNvSpPr>
+            <a:spLocks xmlns:a="http://schemas.openxmlformats.org/drawingml/2006/main" noGrp="1"/>
+          </p:cNvSpPr>
+          <p:nvPr/>
+        </p:nvSpPr>
+        <p:spPr>
+          <a:xfrm xmlns:a="http://schemas.openxmlformats.org/drawingml/2006/main">
+            <a:off x="6553200" y="7581900"/>
+            <a:ext cx="5200650" cy="228600"/>
+          </a:xfrm>
+          <a:prstGeom xmlns:a="http://schemas.openxmlformats.org/drawingml/2006/main" prst="rect">
+            <a:avLst/>
+          </a:prstGeom>
+        </p:spPr>
+        <p:txBody>
+          <a:bodyPr xmlns:a="http://schemas.openxmlformats.org/drawingml/2006/main" lIns="0" tIns="0" rIns="0" bIns="0"/>
+          <a:lstStyle xmlns:a="http://schemas.openxmlformats.org/drawingml/2006/main"/>
+          <a:p xmlns:a="http://schemas.openxmlformats.org/drawingml/2006/main">
+            <a:pPr>
+              <a:defRPr sz="1500">
+                <a:solidFill>
+                  <a:srgbClr val="5F6368"/>
+                </a:solidFill>
+              </a:defRPr>
+            </a:pPr>
+            <a:r>
+              <a:rPr sz="1500">
+                <a:solidFill>
+                  <a:srgbClr val="5F6368"/>
+                </a:solidFill>
+              </a:rPr>
+              <a:t>fitness</a:t>
+            </a:r>
+          </a:p>
+        </p:txBody>
+      </p:sp>
+      <p:sp>
+        <p:nvSpPr>
+          <p:cNvPr id="25" name="metric-value">
+            <a:extLst xmlns:a="http://schemas.openxmlformats.org/drawingml/2006/main">
+              <a:ext uri="{FF2B5EF4-FFF2-40B4-BE49-F238E27FC236}">
+                <a16:creationId xmlns:a16="http://schemas.microsoft.com/office/drawing/2014/main" id="{B8629392-25F8-4203-A7D1-8B7FC058FD0F}"/>
+              </a:ext>
+            </a:extLst>
+          </p:cNvPr>
+          <p:cNvSpPr>
+            <a:spLocks xmlns:a="http://schemas.openxmlformats.org/drawingml/2006/main" noGrp="1"/>
+          </p:cNvSpPr>
+          <p:nvPr/>
+        </p:nvSpPr>
+        <p:spPr>
+          <a:xfrm xmlns:a="http://schemas.openxmlformats.org/drawingml/2006/main">
+            <a:off x="12268200" y="6858000"/>
+            <a:ext cx="5200650" cy="647700"/>
+          </a:xfrm>
+          <a:prstGeom xmlns:a="http://schemas.openxmlformats.org/drawingml/2006/main" prst="rect">
+            <a:avLst/>
+          </a:prstGeom>
+        </p:spPr>
+        <p:txBody>
+          <a:bodyPr xmlns:a="http://schemas.openxmlformats.org/drawingml/2006/main" lIns="0" tIns="0" rIns="0" bIns="0"/>
+          <a:lstStyle xmlns:a="http://schemas.openxmlformats.org/drawingml/2006/main"/>
+          <a:p xmlns:a="http://schemas.openxmlformats.org/drawingml/2006/main">
+            <a:pPr>
+              <a:defRPr sz="4200" b="1">
+                <a:solidFill>
+                  <a:srgbClr val="6B5CA5"/>
+                </a:solidFill>
+              </a:defRPr>
+            </a:pPr>
+            <a:r>
+              <a:rPr sz="4200" b="1">
+                <a:solidFill>
+                  <a:srgbClr val="6B5CA5"/>
+                </a:solidFill>
+              </a:rPr>
+              <a:t>elitist</a:t>
+            </a:r>
+          </a:p>
+        </p:txBody>
+      </p:sp>
+      <p:sp>
+        <p:nvSpPr>
+          <p:cNvPr id="26" name="metric-label">
+            <a:extLst xmlns:a="http://schemas.openxmlformats.org/drawingml/2006/main">
+              <a:ext uri="{FF2B5EF4-FFF2-40B4-BE49-F238E27FC236}">
+                <a16:creationId xmlns:a16="http://schemas.microsoft.com/office/drawing/2014/main" id="{1A1CA76C-AE95-4609-8EA6-F9925A43A507}"/>
+              </a:ext>
+            </a:extLst>
+          </p:cNvPr>
+          <p:cNvSpPr>
+            <a:spLocks xmlns:a="http://schemas.openxmlformats.org/drawingml/2006/main" noGrp="1"/>
+          </p:cNvSpPr>
+          <p:nvPr/>
+        </p:nvSpPr>
+        <p:spPr>
+          <a:xfrm xmlns:a="http://schemas.openxmlformats.org/drawingml/2006/main">
+            <a:off x="12268200" y="7581900"/>
+            <a:ext cx="5200650" cy="228600"/>
+          </a:xfrm>
+          <a:prstGeom xmlns:a="http://schemas.openxmlformats.org/drawingml/2006/main" prst="rect">
+            <a:avLst/>
+          </a:prstGeom>
+        </p:spPr>
+        <p:txBody>
+          <a:bodyPr xmlns:a="http://schemas.openxmlformats.org/drawingml/2006/main" lIns="0" tIns="0" rIns="0" bIns="0"/>
+          <a:lstStyle xmlns:a="http://schemas.openxmlformats.org/drawingml/2006/main"/>
+          <a:p xmlns:a="http://schemas.openxmlformats.org/drawingml/2006/main">
+            <a:pPr>
+              <a:defRPr sz="1500">
+                <a:solidFill>
+                  <a:srgbClr val="5F6368"/>
+                </a:solidFill>
+              </a:defRPr>
+            </a:pPr>
+            <a:r>
+              <a:rPr sz="1500">
+                <a:solidFill>
+                  <a:srgbClr val="5F6368"/>
+                </a:solidFill>
+              </a:rPr>
+              <a:t>selection</a:t>
+            </a:r>
+          </a:p>
+        </p:txBody>
+      </p:sp>
+      <p:sp>
+        <p:nvSpPr>
+          <p:cNvPr id="27" name="source-footer">
+            <a:extLst xmlns:a="http://schemas.openxmlformats.org/drawingml/2006/main">
+              <a:ext uri="{FF2B5EF4-FFF2-40B4-BE49-F238E27FC236}">
+                <a16:creationId xmlns:a16="http://schemas.microsoft.com/office/drawing/2014/main" id="{2BDCCFA9-2DB9-467C-A453-EA58BC8B8DE7}"/>
               </a:ext>
             </a:extLst>
           </p:cNvPr>
@@ -3333,7 +3735,7 @@
     </p:spTree>
     <p:extLst>
       <p:ext uri="{BB962C8B-B14F-4D97-AF65-F5344CB8AC3E}">
-        <p14:creationId xmlns:p14="http://schemas.microsoft.com/office/powerpoint/2010/main" val="484761446"/>
+        <p14:creationId xmlns:p14="http://schemas.microsoft.com/office/powerpoint/2010/main" val="2139015822"/>
       </p:ext>
     </p:extLst>
   </p:cSld>
@@ -3357,7 +3759,7 @@
           <p:cNvPr id="1" name="slide-background">
             <a:extLst xmlns:a="http://schemas.openxmlformats.org/drawingml/2006/main">
               <a:ext uri="{FF2B5EF4-FFF2-40B4-BE49-F238E27FC236}">
-                <a16:creationId xmlns:a16="http://schemas.microsoft.com/office/drawing/2014/main" id="{A4355787-5B94-49DE-A6E8-CAF34E3EC6DB}"/>
+                <a16:creationId xmlns:a16="http://schemas.microsoft.com/office/drawing/2014/main" id="{D5632F35-8DBB-427F-927F-CF02927BEC2A}"/>
               </a:ext>
             </a:extLst>
           </p:cNvPr>
@@ -3384,7 +3786,7 @@
           <p:cNvPr id="2" name="kicker">
             <a:extLst xmlns:a="http://schemas.openxmlformats.org/drawingml/2006/main">
               <a:ext uri="{FF2B5EF4-FFF2-40B4-BE49-F238E27FC236}">
-                <a16:creationId xmlns:a16="http://schemas.microsoft.com/office/drawing/2014/main" id="{6A0D0124-605F-4445-93D4-AD3DAFE01822}"/>
+                <a16:creationId xmlns:a16="http://schemas.microsoft.com/office/drawing/2014/main" id="{A6A34A8C-528F-4590-BE6C-DB0A59B1E703}"/>
               </a:ext>
             </a:extLst>
           </p:cNvPr>
@@ -3429,7 +3831,7 @@
           <p:cNvPr id="3" name="slide-title">
             <a:extLst xmlns:a="http://schemas.openxmlformats.org/drawingml/2006/main">
               <a:ext uri="{FF2B5EF4-FFF2-40B4-BE49-F238E27FC236}">
-                <a16:creationId xmlns:a16="http://schemas.microsoft.com/office/drawing/2014/main" id="{A615D6CA-CCB0-4826-BFD1-B6C307D56432}"/>
+                <a16:creationId xmlns:a16="http://schemas.microsoft.com/office/drawing/2014/main" id="{CF6C4D59-C525-42CA-8511-C728A7C99B77}"/>
               </a:ext>
             </a:extLst>
           </p:cNvPr>
@@ -3474,7 +3876,7 @@
           <p:cNvPr id="4" name="slide-subtitle">
             <a:extLst xmlns:a="http://schemas.openxmlformats.org/drawingml/2006/main">
               <a:ext uri="{FF2B5EF4-FFF2-40B4-BE49-F238E27FC236}">
-                <a16:creationId xmlns:a16="http://schemas.microsoft.com/office/drawing/2014/main" id="{09745485-98F3-4361-9683-ED7117067D52}"/>
+                <a16:creationId xmlns:a16="http://schemas.microsoft.com/office/drawing/2014/main" id="{48D2ABCA-4E04-47BF-80FC-1B95066EBCF6}"/>
               </a:ext>
             </a:extLst>
           </p:cNvPr>
@@ -3519,7 +3921,7 @@
           <p:cNvPr id="5" name="bullet-mark">
             <a:extLst xmlns:a="http://schemas.openxmlformats.org/drawingml/2006/main">
               <a:ext uri="{FF2B5EF4-FFF2-40B4-BE49-F238E27FC236}">
-                <a16:creationId xmlns:a16="http://schemas.microsoft.com/office/drawing/2014/main" id="{71BA37B3-2644-43A2-BA96-B12E54E4286B}"/>
+                <a16:creationId xmlns:a16="http://schemas.microsoft.com/office/drawing/2014/main" id="{E1C98B69-2B07-4A88-9F47-39A49909A1F8}"/>
               </a:ext>
             </a:extLst>
           </p:cNvPr>
@@ -3546,7 +3948,7 @@
           <p:cNvPr id="6" name="bullet-text">
             <a:extLst xmlns:a="http://schemas.openxmlformats.org/drawingml/2006/main">
               <a:ext uri="{FF2B5EF4-FFF2-40B4-BE49-F238E27FC236}">
-                <a16:creationId xmlns:a16="http://schemas.microsoft.com/office/drawing/2014/main" id="{C0EFFEAE-93C5-4BC8-BC33-F9EA5E7BC660}"/>
+                <a16:creationId xmlns:a16="http://schemas.microsoft.com/office/drawing/2014/main" id="{BE5D92B4-4527-4420-BFD9-1E4157AD0D25}"/>
               </a:ext>
             </a:extLst>
           </p:cNvPr>
@@ -3591,7 +3993,7 @@
           <p:cNvPr id="7" name="bullet-mark">
             <a:extLst xmlns:a="http://schemas.openxmlformats.org/drawingml/2006/main">
               <a:ext uri="{FF2B5EF4-FFF2-40B4-BE49-F238E27FC236}">
-                <a16:creationId xmlns:a16="http://schemas.microsoft.com/office/drawing/2014/main" id="{3CF34F11-5CE5-4533-BF11-5CDD5FB86C7B}"/>
+                <a16:creationId xmlns:a16="http://schemas.microsoft.com/office/drawing/2014/main" id="{D023F167-DE0C-4E26-BD8E-6E13D56E3656}"/>
               </a:ext>
             </a:extLst>
           </p:cNvPr>
@@ -3618,7 +4020,7 @@
           <p:cNvPr id="8" name="bullet-text">
             <a:extLst xmlns:a="http://schemas.openxmlformats.org/drawingml/2006/main">
               <a:ext uri="{FF2B5EF4-FFF2-40B4-BE49-F238E27FC236}">
-                <a16:creationId xmlns:a16="http://schemas.microsoft.com/office/drawing/2014/main" id="{C63A41C7-38A3-4BB7-B95B-A18D25D4DA70}"/>
+                <a16:creationId xmlns:a16="http://schemas.microsoft.com/office/drawing/2014/main" id="{D359E875-4E90-4374-865B-3EBF8D448854}"/>
               </a:ext>
             </a:extLst>
           </p:cNvPr>
@@ -3663,7 +4065,7 @@
           <p:cNvPr id="9" name="bullet-mark">
             <a:extLst xmlns:a="http://schemas.openxmlformats.org/drawingml/2006/main">
               <a:ext uri="{FF2B5EF4-FFF2-40B4-BE49-F238E27FC236}">
-                <a16:creationId xmlns:a16="http://schemas.microsoft.com/office/drawing/2014/main" id="{652F6E58-5BEB-4D51-9FDD-E9D57C251E0F}"/>
+                <a16:creationId xmlns:a16="http://schemas.microsoft.com/office/drawing/2014/main" id="{1A94213E-B392-4A28-9C47-6F100F795569}"/>
               </a:ext>
             </a:extLst>
           </p:cNvPr>
@@ -3690,7 +4092,7 @@
           <p:cNvPr id="10" name="bullet-text">
             <a:extLst xmlns:a="http://schemas.openxmlformats.org/drawingml/2006/main">
               <a:ext uri="{FF2B5EF4-FFF2-40B4-BE49-F238E27FC236}">
-                <a16:creationId xmlns:a16="http://schemas.microsoft.com/office/drawing/2014/main" id="{4A4D624A-F2EA-450D-86D2-92916856A529}"/>
+                <a16:creationId xmlns:a16="http://schemas.microsoft.com/office/drawing/2014/main" id="{9F89F4F3-1173-48C0-B8C5-DCDFD90096E2}"/>
               </a:ext>
             </a:extLst>
           </p:cNvPr>
@@ -3735,7 +4137,7 @@
           <p:cNvPr id="11" name="bullet-mark">
             <a:extLst xmlns:a="http://schemas.openxmlformats.org/drawingml/2006/main">
               <a:ext uri="{FF2B5EF4-FFF2-40B4-BE49-F238E27FC236}">
-                <a16:creationId xmlns:a16="http://schemas.microsoft.com/office/drawing/2014/main" id="{356A0381-3858-4501-83A7-5E00CE0133AF}"/>
+                <a16:creationId xmlns:a16="http://schemas.microsoft.com/office/drawing/2014/main" id="{AAC35F14-3AB5-4C66-90BF-CF249DDE5C17}"/>
               </a:ext>
             </a:extLst>
           </p:cNvPr>
@@ -3762,7 +4164,7 @@
           <p:cNvPr id="12" name="bullet-text">
             <a:extLst xmlns:a="http://schemas.openxmlformats.org/drawingml/2006/main">
               <a:ext uri="{FF2B5EF4-FFF2-40B4-BE49-F238E27FC236}">
-                <a16:creationId xmlns:a16="http://schemas.microsoft.com/office/drawing/2014/main" id="{41B21692-46C3-44ED-B894-BF0BB78803DF}"/>
+                <a16:creationId xmlns:a16="http://schemas.microsoft.com/office/drawing/2014/main" id="{AB9CA1E4-2C3D-4C55-8A6A-A65A73A49282}"/>
               </a:ext>
             </a:extLst>
           </p:cNvPr>
@@ -3807,7 +4209,7 @@
           <p:cNvPr id="13" name="bullet-mark">
             <a:extLst xmlns:a="http://schemas.openxmlformats.org/drawingml/2006/main">
               <a:ext uri="{FF2B5EF4-FFF2-40B4-BE49-F238E27FC236}">
-                <a16:creationId xmlns:a16="http://schemas.microsoft.com/office/drawing/2014/main" id="{1F239073-5322-4C1C-8816-B28583631550}"/>
+                <a16:creationId xmlns:a16="http://schemas.microsoft.com/office/drawing/2014/main" id="{01BB3806-E94A-4D0D-B0C6-C83955637732}"/>
               </a:ext>
             </a:extLst>
           </p:cNvPr>
@@ -3834,7 +4236,7 @@
           <p:cNvPr id="14" name="bullet-text">
             <a:extLst xmlns:a="http://schemas.openxmlformats.org/drawingml/2006/main">
               <a:ext uri="{FF2B5EF4-FFF2-40B4-BE49-F238E27FC236}">
-                <a16:creationId xmlns:a16="http://schemas.microsoft.com/office/drawing/2014/main" id="{D403B38A-26D6-434A-A1C0-D64372D804CB}"/>
+                <a16:creationId xmlns:a16="http://schemas.microsoft.com/office/drawing/2014/main" id="{79EF8845-A551-4A7C-8C0F-ACF05A33AC9B}"/>
               </a:ext>
             </a:extLst>
           </p:cNvPr>
@@ -3879,7 +4281,7 @@
           <p:cNvPr id="15" name="code-artifact">
             <a:extLst xmlns:a="http://schemas.openxmlformats.org/drawingml/2006/main">
               <a:ext uri="{FF2B5EF4-FFF2-40B4-BE49-F238E27FC236}">
-                <a16:creationId xmlns:a16="http://schemas.microsoft.com/office/drawing/2014/main" id="{7995A9C2-3321-4204-8E09-104CB9255A25}"/>
+                <a16:creationId xmlns:a16="http://schemas.microsoft.com/office/drawing/2014/main" id="{E547DF0C-BBFB-4A20-BEBA-42436AD810E5}"/>
               </a:ext>
             </a:extLst>
           </p:cNvPr>
@@ -3908,7 +4310,7 @@
           <p:cNvPr id="16" name="pseudo-code">
             <a:extLst xmlns:a="http://schemas.openxmlformats.org/drawingml/2006/main">
               <a:ext uri="{FF2B5EF4-FFF2-40B4-BE49-F238E27FC236}">
-                <a16:creationId xmlns:a16="http://schemas.microsoft.com/office/drawing/2014/main" id="{F98DB3A2-D91F-4CCC-AFB7-B5BCCE05648E}"/>
+                <a16:creationId xmlns:a16="http://schemas.microsoft.com/office/drawing/2014/main" id="{B7D44BAD-D869-450F-B14E-E5175081C7A5}"/>
               </a:ext>
             </a:extLst>
           </p:cNvPr>
@@ -4048,7 +4450,7 @@
           <p:cNvPr id="17" name="source-footer">
             <a:extLst xmlns:a="http://schemas.openxmlformats.org/drawingml/2006/main">
               <a:ext uri="{FF2B5EF4-FFF2-40B4-BE49-F238E27FC236}">
-                <a16:creationId xmlns:a16="http://schemas.microsoft.com/office/drawing/2014/main" id="{7A23AF89-5646-44D4-814B-D53C4E80B8F0}"/>
+                <a16:creationId xmlns:a16="http://schemas.microsoft.com/office/drawing/2014/main" id="{A797009B-4D62-4534-BD3E-AB40290083C1}"/>
               </a:ext>
             </a:extLst>
           </p:cNvPr>
@@ -4091,7 +4493,7 @@
     </p:spTree>
     <p:extLst>
       <p:ext uri="{BB962C8B-B14F-4D97-AF65-F5344CB8AC3E}">
-        <p14:creationId xmlns:p14="http://schemas.microsoft.com/office/powerpoint/2010/main" val="222576753"/>
+        <p14:creationId xmlns:p14="http://schemas.microsoft.com/office/powerpoint/2010/main" val="719836740"/>
       </p:ext>
     </p:extLst>
   </p:cSld>
@@ -4115,7 +4517,7 @@
           <p:cNvPr id="1" name="slide-background">
             <a:extLst xmlns:a="http://schemas.openxmlformats.org/drawingml/2006/main">
               <a:ext uri="{FF2B5EF4-FFF2-40B4-BE49-F238E27FC236}">
-                <a16:creationId xmlns:a16="http://schemas.microsoft.com/office/drawing/2014/main" id="{43374B75-DCB6-4BE7-BED0-63B5AFFF590F}"/>
+                <a16:creationId xmlns:a16="http://schemas.microsoft.com/office/drawing/2014/main" id="{A20E31F2-9F4C-4871-9227-0CB4BBB79B95}"/>
               </a:ext>
             </a:extLst>
           </p:cNvPr>
@@ -4142,7 +4544,7 @@
           <p:cNvPr id="2" name="kicker">
             <a:extLst xmlns:a="http://schemas.openxmlformats.org/drawingml/2006/main">
               <a:ext uri="{FF2B5EF4-FFF2-40B4-BE49-F238E27FC236}">
-                <a16:creationId xmlns:a16="http://schemas.microsoft.com/office/drawing/2014/main" id="{8663596B-63D6-417C-A58B-1DC6745A04A5}"/>
+                <a16:creationId xmlns:a16="http://schemas.microsoft.com/office/drawing/2014/main" id="{B6FF43AA-B95F-4F04-8F6A-D1EE645611D2}"/>
               </a:ext>
             </a:extLst>
           </p:cNvPr>
@@ -4187,7 +4589,7 @@
           <p:cNvPr id="3" name="slide-title">
             <a:extLst xmlns:a="http://schemas.openxmlformats.org/drawingml/2006/main">
               <a:ext uri="{FF2B5EF4-FFF2-40B4-BE49-F238E27FC236}">
-                <a16:creationId xmlns:a16="http://schemas.microsoft.com/office/drawing/2014/main" id="{4E4BA053-6165-4AF2-956D-892841E8BA2C}"/>
+                <a16:creationId xmlns:a16="http://schemas.microsoft.com/office/drawing/2014/main" id="{A4101307-19C0-435C-ADF0-2D282B0E5DF3}"/>
               </a:ext>
             </a:extLst>
           </p:cNvPr>
@@ -4232,7 +4634,7 @@
           <p:cNvPr id="4" name="slide-subtitle">
             <a:extLst xmlns:a="http://schemas.openxmlformats.org/drawingml/2006/main">
               <a:ext uri="{FF2B5EF4-FFF2-40B4-BE49-F238E27FC236}">
-                <a16:creationId xmlns:a16="http://schemas.microsoft.com/office/drawing/2014/main" id="{A5ECE5FF-EADE-4A5F-A66F-C943D8F3DAFA}"/>
+                <a16:creationId xmlns:a16="http://schemas.microsoft.com/office/drawing/2014/main" id="{3DDBE4A4-EF8A-44B7-BC60-FAD40975B8A2}"/>
               </a:ext>
             </a:extLst>
           </p:cNvPr>
@@ -4274,40 +4676,40 @@
       </p:sp>
       <p:sp>
         <p:nvSpPr>
-          <p:cNvPr id="5" name="metric-value">
-            <a:extLst xmlns:a="http://schemas.openxmlformats.org/drawingml/2006/main">
-              <a:ext uri="{FF2B5EF4-FFF2-40B4-BE49-F238E27FC236}">
-                <a16:creationId xmlns:a16="http://schemas.microsoft.com/office/drawing/2014/main" id="{B93DB6F9-C37F-4113-94A5-94A71ED42045}"/>
-              </a:ext>
-            </a:extLst>
-          </p:cNvPr>
-          <p:cNvSpPr>
-            <a:spLocks xmlns:a="http://schemas.openxmlformats.org/drawingml/2006/main" noGrp="1"/>
-          </p:cNvSpPr>
-          <p:nvPr/>
-        </p:nvSpPr>
-        <p:spPr>
-          <a:xfrm xmlns:a="http://schemas.openxmlformats.org/drawingml/2006/main">
-            <a:off x="819150" y="4972050"/>
-            <a:ext cx="5162550" cy="647700"/>
-          </a:xfrm>
-          <a:prstGeom xmlns:a="http://schemas.openxmlformats.org/drawingml/2006/main" prst="rect">
-            <a:avLst/>
-          </a:prstGeom>
-        </p:spPr>
-        <p:txBody>
-          <a:bodyPr xmlns:a="http://schemas.openxmlformats.org/drawingml/2006/main" lIns="0" tIns="0" rIns="0" bIns="0"/>
-          <a:lstStyle xmlns:a="http://schemas.openxmlformats.org/drawingml/2006/main"/>
-          <a:p xmlns:a="http://schemas.openxmlformats.org/drawingml/2006/main">
-            <a:pPr>
-              <a:defRPr sz="4200" b="1">
+          <p:cNvPr id="5" name="mini-metric-value">
+            <a:extLst xmlns:a="http://schemas.openxmlformats.org/drawingml/2006/main">
+              <a:ext uri="{FF2B5EF4-FFF2-40B4-BE49-F238E27FC236}">
+                <a16:creationId xmlns:a16="http://schemas.microsoft.com/office/drawing/2014/main" id="{61F16511-CD86-4E1A-948F-61645278A89F}"/>
+              </a:ext>
+            </a:extLst>
+          </p:cNvPr>
+          <p:cNvSpPr>
+            <a:spLocks xmlns:a="http://schemas.openxmlformats.org/drawingml/2006/main" noGrp="1"/>
+          </p:cNvSpPr>
+          <p:nvPr/>
+        </p:nvSpPr>
+        <p:spPr>
+          <a:xfrm xmlns:a="http://schemas.openxmlformats.org/drawingml/2006/main">
+            <a:off x="819150" y="4457700"/>
+            <a:ext cx="8553450" cy="552450"/>
+          </a:xfrm>
+          <a:prstGeom xmlns:a="http://schemas.openxmlformats.org/drawingml/2006/main" prst="rect">
+            <a:avLst/>
+          </a:prstGeom>
+        </p:spPr>
+        <p:txBody>
+          <a:bodyPr xmlns:a="http://schemas.openxmlformats.org/drawingml/2006/main" lIns="0" tIns="0" rIns="0" bIns="0"/>
+          <a:lstStyle xmlns:a="http://schemas.openxmlformats.org/drawingml/2006/main"/>
+          <a:p xmlns:a="http://schemas.openxmlformats.org/drawingml/2006/main">
+            <a:pPr>
+              <a:defRPr sz="3600" b="1">
                 <a:solidFill>
                   <a:srgbClr val="246A73"/>
                 </a:solidFill>
               </a:defRPr>
             </a:pPr>
             <a:r>
-              <a:rPr sz="4200" b="1">
+              <a:rPr sz="3600" b="1">
                 <a:solidFill>
                   <a:srgbClr val="246A73"/>
                 </a:solidFill>
@@ -4319,40 +4721,40 @@
       </p:sp>
       <p:sp>
         <p:nvSpPr>
-          <p:cNvPr id="6" name="metric-label">
-            <a:extLst xmlns:a="http://schemas.openxmlformats.org/drawingml/2006/main">
-              <a:ext uri="{FF2B5EF4-FFF2-40B4-BE49-F238E27FC236}">
-                <a16:creationId xmlns:a16="http://schemas.microsoft.com/office/drawing/2014/main" id="{B06D09FD-A60B-43B6-B322-85C1E9F1D283}"/>
-              </a:ext>
-            </a:extLst>
-          </p:cNvPr>
-          <p:cNvSpPr>
-            <a:spLocks xmlns:a="http://schemas.openxmlformats.org/drawingml/2006/main" noGrp="1"/>
-          </p:cNvSpPr>
-          <p:nvPr/>
-        </p:nvSpPr>
-        <p:spPr>
-          <a:xfrm xmlns:a="http://schemas.openxmlformats.org/drawingml/2006/main">
-            <a:off x="819150" y="5695950"/>
-            <a:ext cx="5162550" cy="228600"/>
-          </a:xfrm>
-          <a:prstGeom xmlns:a="http://schemas.openxmlformats.org/drawingml/2006/main" prst="rect">
-            <a:avLst/>
-          </a:prstGeom>
-        </p:spPr>
-        <p:txBody>
-          <a:bodyPr xmlns:a="http://schemas.openxmlformats.org/drawingml/2006/main" lIns="0" tIns="0" rIns="0" bIns="0"/>
-          <a:lstStyle xmlns:a="http://schemas.openxmlformats.org/drawingml/2006/main"/>
-          <a:p xmlns:a="http://schemas.openxmlformats.org/drawingml/2006/main">
-            <a:pPr>
-              <a:defRPr sz="1500">
+          <p:cNvPr id="6" name="mini-metric-label">
+            <a:extLst xmlns:a="http://schemas.openxmlformats.org/drawingml/2006/main">
+              <a:ext uri="{FF2B5EF4-FFF2-40B4-BE49-F238E27FC236}">
+                <a16:creationId xmlns:a16="http://schemas.microsoft.com/office/drawing/2014/main" id="{F125DD7A-5C56-45E6-B616-4EDDD617FF22}"/>
+              </a:ext>
+            </a:extLst>
+          </p:cNvPr>
+          <p:cNvSpPr>
+            <a:spLocks xmlns:a="http://schemas.openxmlformats.org/drawingml/2006/main" noGrp="1"/>
+          </p:cNvSpPr>
+          <p:nvPr/>
+        </p:nvSpPr>
+        <p:spPr>
+          <a:xfrm xmlns:a="http://schemas.openxmlformats.org/drawingml/2006/main">
+            <a:off x="819150" y="5067300"/>
+            <a:ext cx="8553450" cy="209550"/>
+          </a:xfrm>
+          <a:prstGeom xmlns:a="http://schemas.openxmlformats.org/drawingml/2006/main" prst="rect">
+            <a:avLst/>
+          </a:prstGeom>
+        </p:spPr>
+        <p:txBody>
+          <a:bodyPr xmlns:a="http://schemas.openxmlformats.org/drawingml/2006/main" lIns="0" tIns="0" rIns="0" bIns="0"/>
+          <a:lstStyle xmlns:a="http://schemas.openxmlformats.org/drawingml/2006/main"/>
+          <a:p xmlns:a="http://schemas.openxmlformats.org/drawingml/2006/main">
+            <a:pPr>
+              <a:defRPr sz="1350">
                 <a:solidFill>
                   <a:srgbClr val="5F6368"/>
                 </a:solidFill>
               </a:defRPr>
             </a:pPr>
             <a:r>
-              <a:rPr sz="1500">
+              <a:rPr sz="1350">
                 <a:solidFill>
                   <a:srgbClr val="5F6368"/>
                 </a:solidFill>
@@ -4364,40 +4766,40 @@
       </p:sp>
       <p:sp>
         <p:nvSpPr>
-          <p:cNvPr id="7" name="metric-value">
-            <a:extLst xmlns:a="http://schemas.openxmlformats.org/drawingml/2006/main">
-              <a:ext uri="{FF2B5EF4-FFF2-40B4-BE49-F238E27FC236}">
-                <a16:creationId xmlns:a16="http://schemas.microsoft.com/office/drawing/2014/main" id="{222C3B26-B822-4C88-8BE1-B43DAF41107F}"/>
-              </a:ext>
-            </a:extLst>
-          </p:cNvPr>
-          <p:cNvSpPr>
-            <a:spLocks xmlns:a="http://schemas.openxmlformats.org/drawingml/2006/main" noGrp="1"/>
-          </p:cNvSpPr>
-          <p:nvPr/>
-        </p:nvSpPr>
-        <p:spPr>
-          <a:xfrm xmlns:a="http://schemas.openxmlformats.org/drawingml/2006/main">
-            <a:off x="6553200" y="4972050"/>
-            <a:ext cx="5162550" cy="647700"/>
-          </a:xfrm>
-          <a:prstGeom xmlns:a="http://schemas.openxmlformats.org/drawingml/2006/main" prst="rect">
-            <a:avLst/>
-          </a:prstGeom>
-        </p:spPr>
-        <p:txBody>
-          <a:bodyPr xmlns:a="http://schemas.openxmlformats.org/drawingml/2006/main" lIns="0" tIns="0" rIns="0" bIns="0"/>
-          <a:lstStyle xmlns:a="http://schemas.openxmlformats.org/drawingml/2006/main"/>
-          <a:p xmlns:a="http://schemas.openxmlformats.org/drawingml/2006/main">
-            <a:pPr>
-              <a:defRPr sz="4200" b="1">
+          <p:cNvPr id="7" name="mini-metric-value">
+            <a:extLst xmlns:a="http://schemas.openxmlformats.org/drawingml/2006/main">
+              <a:ext uri="{FF2B5EF4-FFF2-40B4-BE49-F238E27FC236}">
+                <a16:creationId xmlns:a16="http://schemas.microsoft.com/office/drawing/2014/main" id="{28354D4C-180F-4633-8E7B-A4895114B2B6}"/>
+              </a:ext>
+            </a:extLst>
+          </p:cNvPr>
+          <p:cNvSpPr>
+            <a:spLocks xmlns:a="http://schemas.openxmlformats.org/drawingml/2006/main" noGrp="1"/>
+          </p:cNvSpPr>
+          <p:nvPr/>
+        </p:nvSpPr>
+        <p:spPr>
+          <a:xfrm xmlns:a="http://schemas.openxmlformats.org/drawingml/2006/main">
+            <a:off x="819150" y="5543550"/>
+            <a:ext cx="8553450" cy="552450"/>
+          </a:xfrm>
+          <a:prstGeom xmlns:a="http://schemas.openxmlformats.org/drawingml/2006/main" prst="rect">
+            <a:avLst/>
+          </a:prstGeom>
+        </p:spPr>
+        <p:txBody>
+          <a:bodyPr xmlns:a="http://schemas.openxmlformats.org/drawingml/2006/main" lIns="0" tIns="0" rIns="0" bIns="0"/>
+          <a:lstStyle xmlns:a="http://schemas.openxmlformats.org/drawingml/2006/main"/>
+          <a:p xmlns:a="http://schemas.openxmlformats.org/drawingml/2006/main">
+            <a:pPr>
+              <a:defRPr sz="3600" b="1">
                 <a:solidFill>
                   <a:srgbClr val="B5532F"/>
                 </a:solidFill>
               </a:defRPr>
             </a:pPr>
             <a:r>
-              <a:rPr sz="4200" b="1">
+              <a:rPr sz="3600" b="1">
                 <a:solidFill>
                   <a:srgbClr val="B5532F"/>
                 </a:solidFill>
@@ -4409,40 +4811,40 @@
       </p:sp>
       <p:sp>
         <p:nvSpPr>
-          <p:cNvPr id="8" name="metric-label">
-            <a:extLst xmlns:a="http://schemas.openxmlformats.org/drawingml/2006/main">
-              <a:ext uri="{FF2B5EF4-FFF2-40B4-BE49-F238E27FC236}">
-                <a16:creationId xmlns:a16="http://schemas.microsoft.com/office/drawing/2014/main" id="{C329B5FA-AF1A-4E26-92CC-49B490D57EF7}"/>
-              </a:ext>
-            </a:extLst>
-          </p:cNvPr>
-          <p:cNvSpPr>
-            <a:spLocks xmlns:a="http://schemas.openxmlformats.org/drawingml/2006/main" noGrp="1"/>
-          </p:cNvSpPr>
-          <p:nvPr/>
-        </p:nvSpPr>
-        <p:spPr>
-          <a:xfrm xmlns:a="http://schemas.openxmlformats.org/drawingml/2006/main">
-            <a:off x="6553200" y="5695950"/>
-            <a:ext cx="5162550" cy="228600"/>
-          </a:xfrm>
-          <a:prstGeom xmlns:a="http://schemas.openxmlformats.org/drawingml/2006/main" prst="rect">
-            <a:avLst/>
-          </a:prstGeom>
-        </p:spPr>
-        <p:txBody>
-          <a:bodyPr xmlns:a="http://schemas.openxmlformats.org/drawingml/2006/main" lIns="0" tIns="0" rIns="0" bIns="0"/>
-          <a:lstStyle xmlns:a="http://schemas.openxmlformats.org/drawingml/2006/main"/>
-          <a:p xmlns:a="http://schemas.openxmlformats.org/drawingml/2006/main">
-            <a:pPr>
-              <a:defRPr sz="1500">
+          <p:cNvPr id="8" name="mini-metric-label">
+            <a:extLst xmlns:a="http://schemas.openxmlformats.org/drawingml/2006/main">
+              <a:ext uri="{FF2B5EF4-FFF2-40B4-BE49-F238E27FC236}">
+                <a16:creationId xmlns:a16="http://schemas.microsoft.com/office/drawing/2014/main" id="{048AE2AE-D047-4F73-BFD8-D1833F9490E3}"/>
+              </a:ext>
+            </a:extLst>
+          </p:cNvPr>
+          <p:cNvSpPr>
+            <a:spLocks xmlns:a="http://schemas.openxmlformats.org/drawingml/2006/main" noGrp="1"/>
+          </p:cNvSpPr>
+          <p:nvPr/>
+        </p:nvSpPr>
+        <p:spPr>
+          <a:xfrm xmlns:a="http://schemas.openxmlformats.org/drawingml/2006/main">
+            <a:off x="819150" y="6134100"/>
+            <a:ext cx="8553450" cy="209550"/>
+          </a:xfrm>
+          <a:prstGeom xmlns:a="http://schemas.openxmlformats.org/drawingml/2006/main" prst="rect">
+            <a:avLst/>
+          </a:prstGeom>
+        </p:spPr>
+        <p:txBody>
+          <a:bodyPr xmlns:a="http://schemas.openxmlformats.org/drawingml/2006/main" lIns="0" tIns="0" rIns="0" bIns="0"/>
+          <a:lstStyle xmlns:a="http://schemas.openxmlformats.org/drawingml/2006/main"/>
+          <a:p xmlns:a="http://schemas.openxmlformats.org/drawingml/2006/main">
+            <a:pPr>
+              <a:defRPr sz="1350">
                 <a:solidFill>
                   <a:srgbClr val="5F6368"/>
                 </a:solidFill>
               </a:defRPr>
             </a:pPr>
             <a:r>
-              <a:rPr sz="1500">
+              <a:rPr sz="1350">
                 <a:solidFill>
                   <a:srgbClr val="5F6368"/>
                 </a:solidFill>
@@ -4454,40 +4856,40 @@
       </p:sp>
       <p:sp>
         <p:nvSpPr>
-          <p:cNvPr id="9" name="metric-value">
-            <a:extLst xmlns:a="http://schemas.openxmlformats.org/drawingml/2006/main">
-              <a:ext uri="{FF2B5EF4-FFF2-40B4-BE49-F238E27FC236}">
-                <a16:creationId xmlns:a16="http://schemas.microsoft.com/office/drawing/2014/main" id="{030421D0-15F7-4492-8673-49F789B1FA68}"/>
-              </a:ext>
-            </a:extLst>
-          </p:cNvPr>
-          <p:cNvSpPr>
-            <a:spLocks xmlns:a="http://schemas.openxmlformats.org/drawingml/2006/main" noGrp="1"/>
-          </p:cNvSpPr>
-          <p:nvPr/>
-        </p:nvSpPr>
-        <p:spPr>
-          <a:xfrm xmlns:a="http://schemas.openxmlformats.org/drawingml/2006/main">
-            <a:off x="12306300" y="4972050"/>
-            <a:ext cx="5162550" cy="647700"/>
-          </a:xfrm>
-          <a:prstGeom xmlns:a="http://schemas.openxmlformats.org/drawingml/2006/main" prst="rect">
-            <a:avLst/>
-          </a:prstGeom>
-        </p:spPr>
-        <p:txBody>
-          <a:bodyPr xmlns:a="http://schemas.openxmlformats.org/drawingml/2006/main" lIns="0" tIns="0" rIns="0" bIns="0"/>
-          <a:lstStyle xmlns:a="http://schemas.openxmlformats.org/drawingml/2006/main"/>
-          <a:p xmlns:a="http://schemas.openxmlformats.org/drawingml/2006/main">
-            <a:pPr>
-              <a:defRPr sz="4200" b="1">
+          <p:cNvPr id="9" name="mini-metric-value">
+            <a:extLst xmlns:a="http://schemas.openxmlformats.org/drawingml/2006/main">
+              <a:ext uri="{FF2B5EF4-FFF2-40B4-BE49-F238E27FC236}">
+                <a16:creationId xmlns:a16="http://schemas.microsoft.com/office/drawing/2014/main" id="{1D8552AC-B5DA-4FA0-B7B3-1A49927BC4B2}"/>
+              </a:ext>
+            </a:extLst>
+          </p:cNvPr>
+          <p:cNvSpPr>
+            <a:spLocks xmlns:a="http://schemas.openxmlformats.org/drawingml/2006/main" noGrp="1"/>
+          </p:cNvSpPr>
+          <p:nvPr/>
+        </p:nvSpPr>
+        <p:spPr>
+          <a:xfrm xmlns:a="http://schemas.openxmlformats.org/drawingml/2006/main">
+            <a:off x="819150" y="6610350"/>
+            <a:ext cx="8553450" cy="552450"/>
+          </a:xfrm>
+          <a:prstGeom xmlns:a="http://schemas.openxmlformats.org/drawingml/2006/main" prst="rect">
+            <a:avLst/>
+          </a:prstGeom>
+        </p:spPr>
+        <p:txBody>
+          <a:bodyPr xmlns:a="http://schemas.openxmlformats.org/drawingml/2006/main" lIns="0" tIns="0" rIns="0" bIns="0"/>
+          <a:lstStyle xmlns:a="http://schemas.openxmlformats.org/drawingml/2006/main"/>
+          <a:p xmlns:a="http://schemas.openxmlformats.org/drawingml/2006/main">
+            <a:pPr>
+              <a:defRPr sz="3600" b="1">
                 <a:solidFill>
                   <a:srgbClr val="6B5CA5"/>
                 </a:solidFill>
               </a:defRPr>
             </a:pPr>
             <a:r>
-              <a:rPr sz="4200" b="1">
+              <a:rPr sz="3600" b="1">
                 <a:solidFill>
                   <a:srgbClr val="6B5CA5"/>
                 </a:solidFill>
@@ -4499,40 +4901,40 @@
       </p:sp>
       <p:sp>
         <p:nvSpPr>
-          <p:cNvPr id="10" name="metric-label">
-            <a:extLst xmlns:a="http://schemas.openxmlformats.org/drawingml/2006/main">
-              <a:ext uri="{FF2B5EF4-FFF2-40B4-BE49-F238E27FC236}">
-                <a16:creationId xmlns:a16="http://schemas.microsoft.com/office/drawing/2014/main" id="{9C3E65F7-815A-4F42-AB3F-F0260D32E4C2}"/>
-              </a:ext>
-            </a:extLst>
-          </p:cNvPr>
-          <p:cNvSpPr>
-            <a:spLocks xmlns:a="http://schemas.openxmlformats.org/drawingml/2006/main" noGrp="1"/>
-          </p:cNvSpPr>
-          <p:nvPr/>
-        </p:nvSpPr>
-        <p:spPr>
-          <a:xfrm xmlns:a="http://schemas.openxmlformats.org/drawingml/2006/main">
-            <a:off x="12306300" y="5695950"/>
-            <a:ext cx="5162550" cy="228600"/>
-          </a:xfrm>
-          <a:prstGeom xmlns:a="http://schemas.openxmlformats.org/drawingml/2006/main" prst="rect">
-            <a:avLst/>
-          </a:prstGeom>
-        </p:spPr>
-        <p:txBody>
-          <a:bodyPr xmlns:a="http://schemas.openxmlformats.org/drawingml/2006/main" lIns="0" tIns="0" rIns="0" bIns="0"/>
-          <a:lstStyle xmlns:a="http://schemas.openxmlformats.org/drawingml/2006/main"/>
-          <a:p xmlns:a="http://schemas.openxmlformats.org/drawingml/2006/main">
-            <a:pPr>
-              <a:defRPr sz="1500">
+          <p:cNvPr id="10" name="mini-metric-label">
+            <a:extLst xmlns:a="http://schemas.openxmlformats.org/drawingml/2006/main">
+              <a:ext uri="{FF2B5EF4-FFF2-40B4-BE49-F238E27FC236}">
+                <a16:creationId xmlns:a16="http://schemas.microsoft.com/office/drawing/2014/main" id="{6B0C04D9-AB0F-47A9-9EA8-F404DCCC540B}"/>
+              </a:ext>
+            </a:extLst>
+          </p:cNvPr>
+          <p:cNvSpPr>
+            <a:spLocks xmlns:a="http://schemas.openxmlformats.org/drawingml/2006/main" noGrp="1"/>
+          </p:cNvSpPr>
+          <p:nvPr/>
+        </p:nvSpPr>
+        <p:spPr>
+          <a:xfrm xmlns:a="http://schemas.openxmlformats.org/drawingml/2006/main">
+            <a:off x="819150" y="7219950"/>
+            <a:ext cx="8553450" cy="209550"/>
+          </a:xfrm>
+          <a:prstGeom xmlns:a="http://schemas.openxmlformats.org/drawingml/2006/main" prst="rect">
+            <a:avLst/>
+          </a:prstGeom>
+        </p:spPr>
+        <p:txBody>
+          <a:bodyPr xmlns:a="http://schemas.openxmlformats.org/drawingml/2006/main" lIns="0" tIns="0" rIns="0" bIns="0"/>
+          <a:lstStyle xmlns:a="http://schemas.openxmlformats.org/drawingml/2006/main"/>
+          <a:p xmlns:a="http://schemas.openxmlformats.org/drawingml/2006/main">
+            <a:pPr>
+              <a:defRPr sz="1350">
                 <a:solidFill>
                   <a:srgbClr val="5F6368"/>
                 </a:solidFill>
               </a:defRPr>
             </a:pPr>
             <a:r>
-              <a:rPr sz="1500">
+              <a:rPr sz="1350">
                 <a:solidFill>
                   <a:srgbClr val="5F6368"/>
                 </a:solidFill>
@@ -4544,55 +4946,219 @@
       </p:sp>
       <p:sp>
         <p:nvSpPr>
-          <p:cNvPr id="11" name="levy-caption">
-            <a:extLst xmlns:a="http://schemas.openxmlformats.org/drawingml/2006/main">
-              <a:ext uri="{FF2B5EF4-FFF2-40B4-BE49-F238E27FC236}">
-                <a16:creationId xmlns:a16="http://schemas.microsoft.com/office/drawing/2014/main" id="{58A36D8E-3812-409A-9978-6B5EEFAF8FAF}"/>
-              </a:ext>
-            </a:extLst>
-          </p:cNvPr>
-          <p:cNvSpPr>
-            <a:spLocks xmlns:a="http://schemas.openxmlformats.org/drawingml/2006/main" noGrp="1"/>
-          </p:cNvSpPr>
-          <p:nvPr/>
-        </p:nvSpPr>
-        <p:spPr>
-          <a:xfrm xmlns:a="http://schemas.openxmlformats.org/drawingml/2006/main">
-            <a:off x="819150" y="8496300"/>
-            <a:ext cx="11639550" cy="666750"/>
-          </a:xfrm>
-          <a:prstGeom xmlns:a="http://schemas.openxmlformats.org/drawingml/2006/main" prst="rect">
-            <a:avLst/>
-          </a:prstGeom>
-        </p:spPr>
-        <p:txBody>
-          <a:bodyPr xmlns:a="http://schemas.openxmlformats.org/drawingml/2006/main" lIns="0" tIns="0" rIns="0" bIns="0"/>
-          <a:lstStyle xmlns:a="http://schemas.openxmlformats.org/drawingml/2006/main"/>
-          <a:p xmlns:a="http://schemas.openxmlformats.org/drawingml/2006/main">
-            <a:pPr>
-              <a:defRPr sz="2175">
+          <p:cNvPr id="11" name="levy-formula-artifact">
+            <a:extLst xmlns:a="http://schemas.openxmlformats.org/drawingml/2006/main">
+              <a:ext uri="{FF2B5EF4-FFF2-40B4-BE49-F238E27FC236}">
+                <a16:creationId xmlns:a16="http://schemas.microsoft.com/office/drawing/2014/main" id="{8465163B-008F-481A-A23D-A00729EAF7AC}"/>
+              </a:ext>
+            </a:extLst>
+          </p:cNvPr>
+          <p:cNvSpPr>
+            <a:spLocks xmlns:a="http://schemas.openxmlformats.org/drawingml/2006/main" noGrp="1"/>
+          </p:cNvSpPr>
+          <p:nvPr/>
+        </p:nvSpPr>
+        <p:spPr>
+          <a:xfrm xmlns:a="http://schemas.openxmlformats.org/drawingml/2006/main">
+            <a:off x="10039350" y="4876800"/>
+            <a:ext cx="7429500" cy="2133600"/>
+          </a:xfrm>
+          <a:prstGeom xmlns:a="http://schemas.openxmlformats.org/drawingml/2006/main" prst="roundRect">
+            <a:avLst>
+              <a:gd name="adj" fmla="val 3571"/>
+            </a:avLst>
+          </a:prstGeom>
+          <a:solidFill xmlns:a="http://schemas.openxmlformats.org/drawingml/2006/main">
+            <a:srgbClr val="F4EFE7"/>
+          </a:solidFill>
+        </p:spPr>
+      </p:sp>
+      <p:sp>
+        <p:nvSpPr>
+          <p:cNvPr id="12" name="formula-kicker">
+            <a:extLst xmlns:a="http://schemas.openxmlformats.org/drawingml/2006/main">
+              <a:ext uri="{FF2B5EF4-FFF2-40B4-BE49-F238E27FC236}">
+                <a16:creationId xmlns:a16="http://schemas.microsoft.com/office/drawing/2014/main" id="{B4D97D11-0F0E-4F08-B4C3-95C191572DA0}"/>
+              </a:ext>
+            </a:extLst>
+          </p:cNvPr>
+          <p:cNvSpPr>
+            <a:spLocks xmlns:a="http://schemas.openxmlformats.org/drawingml/2006/main" noGrp="1"/>
+          </p:cNvSpPr>
+          <p:nvPr/>
+        </p:nvSpPr>
+        <p:spPr>
+          <a:xfrm xmlns:a="http://schemas.openxmlformats.org/drawingml/2006/main">
+            <a:off x="10363200" y="5162550"/>
+            <a:ext cx="6781800" cy="228600"/>
+          </a:xfrm>
+          <a:prstGeom xmlns:a="http://schemas.openxmlformats.org/drawingml/2006/main" prst="rect">
+            <a:avLst/>
+          </a:prstGeom>
+        </p:spPr>
+        <p:txBody>
+          <a:bodyPr xmlns:a="http://schemas.openxmlformats.org/drawingml/2006/main" lIns="0" tIns="0" rIns="0" bIns="0"/>
+          <a:lstStyle xmlns:a="http://schemas.openxmlformats.org/drawingml/2006/main"/>
+          <a:p xmlns:a="http://schemas.openxmlformats.org/drawingml/2006/main">
+            <a:pPr>
+              <a:defRPr sz="1500" b="1">
+                <a:solidFill>
+                  <a:srgbClr val="246A73"/>
+                </a:solidFill>
+              </a:defRPr>
+            </a:pPr>
+            <a:r>
+              <a:rPr sz="1500" b="1">
+                <a:solidFill>
+                  <a:srgbClr val="246A73"/>
+                </a:solidFill>
+              </a:rPr>
+              <a:t>Implementation detail</a:t>
+            </a:r>
+          </a:p>
+        </p:txBody>
+      </p:sp>
+      <p:sp>
+        <p:nvSpPr>
+          <p:cNvPr id="13" name="formula-main">
+            <a:extLst xmlns:a="http://schemas.openxmlformats.org/drawingml/2006/main">
+              <a:ext uri="{FF2B5EF4-FFF2-40B4-BE49-F238E27FC236}">
+                <a16:creationId xmlns:a16="http://schemas.microsoft.com/office/drawing/2014/main" id="{EE5528C6-7E3E-4C02-9F62-131E33801B86}"/>
+              </a:ext>
+            </a:extLst>
+          </p:cNvPr>
+          <p:cNvSpPr>
+            <a:spLocks xmlns:a="http://schemas.openxmlformats.org/drawingml/2006/main" noGrp="1"/>
+          </p:cNvSpPr>
+          <p:nvPr/>
+        </p:nvSpPr>
+        <p:spPr>
+          <a:xfrm xmlns:a="http://schemas.openxmlformats.org/drawingml/2006/main">
+            <a:off x="10363200" y="5562600"/>
+            <a:ext cx="6781800" cy="285750"/>
+          </a:xfrm>
+          <a:prstGeom xmlns:a="http://schemas.openxmlformats.org/drawingml/2006/main" prst="rect">
+            <a:avLst/>
+          </a:prstGeom>
+        </p:spPr>
+        <p:txBody>
+          <a:bodyPr xmlns:a="http://schemas.openxmlformats.org/drawingml/2006/main" lIns="0" tIns="0" rIns="0" bIns="0"/>
+          <a:lstStyle xmlns:a="http://schemas.openxmlformats.org/drawingml/2006/main"/>
+          <a:p xmlns:a="http://schemas.openxmlformats.org/drawingml/2006/main">
+            <a:pPr>
+              <a:defRPr sz="1875">
+                <a:solidFill>
+                  <a:srgbClr val="1F2933"/>
+                </a:solidFill>
+              </a:defRPr>
+            </a:pPr>
+            <a:r>
+              <a:rPr sz="1875">
+                <a:solidFill>
+                  <a:srgbClr val="1F2933"/>
+                </a:solidFill>
+              </a:rPr>
+              <a:t>step = alpha * Levy(beta) * (x_i - best)</a:t>
+            </a:r>
+          </a:p>
+        </p:txBody>
+      </p:sp>
+      <p:sp>
+        <p:nvSpPr>
+          <p:cNvPr id="14" name="formula-detail">
+            <a:extLst xmlns:a="http://schemas.openxmlformats.org/drawingml/2006/main">
+              <a:ext uri="{FF2B5EF4-FFF2-40B4-BE49-F238E27FC236}">
+                <a16:creationId xmlns:a16="http://schemas.microsoft.com/office/drawing/2014/main" id="{B6DE823C-ED38-4C1B-BAF7-F8CEF3DBF26F}"/>
+              </a:ext>
+            </a:extLst>
+          </p:cNvPr>
+          <p:cNvSpPr>
+            <a:spLocks xmlns:a="http://schemas.openxmlformats.org/drawingml/2006/main" noGrp="1"/>
+          </p:cNvSpPr>
+          <p:nvPr/>
+        </p:nvSpPr>
+        <p:spPr>
+          <a:xfrm xmlns:a="http://schemas.openxmlformats.org/drawingml/2006/main">
+            <a:off x="10363200" y="6019800"/>
+            <a:ext cx="6781800" cy="285750"/>
+          </a:xfrm>
+          <a:prstGeom xmlns:a="http://schemas.openxmlformats.org/drawingml/2006/main" prst="rect">
+            <a:avLst/>
+          </a:prstGeom>
+        </p:spPr>
+        <p:txBody>
+          <a:bodyPr xmlns:a="http://schemas.openxmlformats.org/drawingml/2006/main" lIns="0" tIns="0" rIns="0" bIns="0"/>
+          <a:lstStyle xmlns:a="http://schemas.openxmlformats.org/drawingml/2006/main"/>
+          <a:p xmlns:a="http://schemas.openxmlformats.org/drawingml/2006/main">
+            <a:pPr>
+              <a:defRPr sz="1800">
+                <a:solidFill>
+                  <a:srgbClr val="1F2933"/>
+                </a:solidFill>
+              </a:defRPr>
+            </a:pPr>
+            <a:r>
+              <a:rPr sz="1800">
+                <a:solidFill>
+                  <a:srgbClr val="1F2933"/>
+                </a:solidFill>
+              </a:rPr>
+              <a:t>Mantegna sampler: Levy(beta) = u / |v|^(1 / beta), beta = 1.5</a:t>
+            </a:r>
+          </a:p>
+        </p:txBody>
+      </p:sp>
+      <p:sp>
+        <p:nvSpPr>
+          <p:cNvPr id="15" name="formula-note">
+            <a:extLst xmlns:a="http://schemas.openxmlformats.org/drawingml/2006/main">
+              <a:ext uri="{FF2B5EF4-FFF2-40B4-BE49-F238E27FC236}">
+                <a16:creationId xmlns:a16="http://schemas.microsoft.com/office/drawing/2014/main" id="{D5F48DEB-8126-4837-8432-AE32B1876878}"/>
+              </a:ext>
+            </a:extLst>
+          </p:cNvPr>
+          <p:cNvSpPr>
+            <a:spLocks xmlns:a="http://schemas.openxmlformats.org/drawingml/2006/main" noGrp="1"/>
+          </p:cNvSpPr>
+          <p:nvPr/>
+        </p:nvSpPr>
+        <p:spPr>
+          <a:xfrm xmlns:a="http://schemas.openxmlformats.org/drawingml/2006/main">
+            <a:off x="10363200" y="6457950"/>
+            <a:ext cx="6781800" cy="266700"/>
+          </a:xfrm>
+          <a:prstGeom xmlns:a="http://schemas.openxmlformats.org/drawingml/2006/main" prst="rect">
+            <a:avLst/>
+          </a:prstGeom>
+        </p:spPr>
+        <p:txBody>
+          <a:bodyPr xmlns:a="http://schemas.openxmlformats.org/drawingml/2006/main" lIns="0" tIns="0" rIns="0" bIns="0"/>
+          <a:lstStyle xmlns:a="http://schemas.openxmlformats.org/drawingml/2006/main"/>
+          <a:p xmlns:a="http://schemas.openxmlformats.org/drawingml/2006/main">
+            <a:pPr>
+              <a:defRPr sz="1650">
                 <a:solidFill>
                   <a:srgbClr val="5F6368"/>
                 </a:solidFill>
               </a:defRPr>
             </a:pPr>
             <a:r>
-              <a:rPr sz="2175">
+              <a:rPr sz="1650">
                 <a:solidFill>
                   <a:srgbClr val="5F6368"/>
                 </a:solidFill>
               </a:rPr>
-              <a:t>In the implementation, Mantegna sampling generates the heavy-tailed steps; values outside the domain are clipped back to valid bounds.</a:t>
-            </a:r>
-          </a:p>
-        </p:txBody>
-      </p:sp>
-      <p:sp>
-        <p:nvSpPr>
-          <p:cNvPr id="12" name="source-footer">
-            <a:extLst xmlns:a="http://schemas.openxmlformats.org/drawingml/2006/main">
-              <a:ext uri="{FF2B5EF4-FFF2-40B4-BE49-F238E27FC236}">
-                <a16:creationId xmlns:a16="http://schemas.microsoft.com/office/drawing/2014/main" id="{7FC44A6E-E5F4-4B91-8597-0D5E219FD504}"/>
+              <a:t>After the move, each coordinate is clipped to the benchmark domain.</a:t>
+            </a:r>
+          </a:p>
+        </p:txBody>
+      </p:sp>
+      <p:sp>
+        <p:nvSpPr>
+          <p:cNvPr id="16" name="source-footer">
+            <a:extLst xmlns:a="http://schemas.openxmlformats.org/drawingml/2006/main">
+              <a:ext uri="{FF2B5EF4-FFF2-40B4-BE49-F238E27FC236}">
+                <a16:creationId xmlns:a16="http://schemas.microsoft.com/office/drawing/2014/main" id="{2795B398-0BFE-443F-A3D2-8EF6E2CF9C03}"/>
               </a:ext>
             </a:extLst>
           </p:cNvPr>
@@ -4635,7 +5201,7 @@
     </p:spTree>
     <p:extLst>
       <p:ext uri="{BB962C8B-B14F-4D97-AF65-F5344CB8AC3E}">
-        <p14:creationId xmlns:p14="http://schemas.microsoft.com/office/powerpoint/2010/main" val="1449979278"/>
+        <p14:creationId xmlns:p14="http://schemas.microsoft.com/office/powerpoint/2010/main" val="1528758812"/>
       </p:ext>
     </p:extLst>
   </p:cSld>
@@ -4659,7 +5225,7 @@
           <p:cNvPr id="1" name="slide-background">
             <a:extLst xmlns:a="http://schemas.openxmlformats.org/drawingml/2006/main">
               <a:ext uri="{FF2B5EF4-FFF2-40B4-BE49-F238E27FC236}">
-                <a16:creationId xmlns:a16="http://schemas.microsoft.com/office/drawing/2014/main" id="{A4666CC7-0702-4920-A235-9660B413DF98}"/>
+                <a16:creationId xmlns:a16="http://schemas.microsoft.com/office/drawing/2014/main" id="{7F2228BB-6483-486A-ACA1-9F3180755CAF}"/>
               </a:ext>
             </a:extLst>
           </p:cNvPr>
@@ -4686,7 +5252,7 @@
           <p:cNvPr id="2" name="kicker">
             <a:extLst xmlns:a="http://schemas.openxmlformats.org/drawingml/2006/main">
               <a:ext uri="{FF2B5EF4-FFF2-40B4-BE49-F238E27FC236}">
-                <a16:creationId xmlns:a16="http://schemas.microsoft.com/office/drawing/2014/main" id="{B838AC4C-2705-4B5D-85E4-F04434D7A005}"/>
+                <a16:creationId xmlns:a16="http://schemas.microsoft.com/office/drawing/2014/main" id="{6526DF31-4485-4B82-B255-65D39A53C62C}"/>
               </a:ext>
             </a:extLst>
           </p:cNvPr>
@@ -4731,7 +5297,7 @@
           <p:cNvPr id="3" name="slide-title">
             <a:extLst xmlns:a="http://schemas.openxmlformats.org/drawingml/2006/main">
               <a:ext uri="{FF2B5EF4-FFF2-40B4-BE49-F238E27FC236}">
-                <a16:creationId xmlns:a16="http://schemas.microsoft.com/office/drawing/2014/main" id="{4A4FFD7D-7179-4A09-B149-771ED2DE19D1}"/>
+                <a16:creationId xmlns:a16="http://schemas.microsoft.com/office/drawing/2014/main" id="{F27DEFEC-5404-4058-99AC-7A2D5AFFE925}"/>
               </a:ext>
             </a:extLst>
           </p:cNvPr>
@@ -4776,7 +5342,7 @@
           <p:cNvPr id="4" name="slide-subtitle">
             <a:extLst xmlns:a="http://schemas.openxmlformats.org/drawingml/2006/main">
               <a:ext uri="{FF2B5EF4-FFF2-40B4-BE49-F238E27FC236}">
-                <a16:creationId xmlns:a16="http://schemas.microsoft.com/office/drawing/2014/main" id="{2030F514-A85F-411B-9925-9BDFBEAA42E0}"/>
+                <a16:creationId xmlns:a16="http://schemas.microsoft.com/office/drawing/2014/main" id="{FFAD4BEE-FDEE-432C-871C-BD612C325A56}"/>
               </a:ext>
             </a:extLst>
           </p:cNvPr>
@@ -4788,7 +5354,7 @@
         <p:spPr>
           <a:xfrm xmlns:a="http://schemas.openxmlformats.org/drawingml/2006/main">
             <a:off x="819150" y="1771650"/>
-            <a:ext cx="11677650" cy="628650"/>
+            <a:ext cx="9829800" cy="628650"/>
           </a:xfrm>
           <a:prstGeom xmlns:a="http://schemas.openxmlformats.org/drawingml/2006/main" prst="rect">
             <a:avLst/>
@@ -4811,7 +5377,7 @@
                   <a:srgbClr val="5F6368"/>
                 </a:solidFill>
               </a:rPr>
-              <a:t>I used continuous test functions because the original paper validates CS on test functions, and the semester labs already used Sphere and Michalewicz.</a:t>
+              <a:t>Continuous functions match the original CS paper, connect to the semester labs, and make the exploration-exploitation trade-off visible.</a:t>
             </a:r>
           </a:p>
         </p:txBody>
@@ -4821,7 +5387,7 @@
           <p:cNvPr id="5" name="b-h1">
             <a:extLst xmlns:a="http://schemas.openxmlformats.org/drawingml/2006/main">
               <a:ext uri="{FF2B5EF4-FFF2-40B4-BE49-F238E27FC236}">
-                <a16:creationId xmlns:a16="http://schemas.microsoft.com/office/drawing/2014/main" id="{C44CF01B-5203-4CFB-A0B3-3BFE6393D61C}"/>
+                <a16:creationId xmlns:a16="http://schemas.microsoft.com/office/drawing/2014/main" id="{8FB53562-5226-47F5-AB45-83F4AD813E2F}"/>
               </a:ext>
             </a:extLst>
           </p:cNvPr>
@@ -4833,25 +5399,25 @@
         <p:spPr>
           <a:xfrm xmlns:a="http://schemas.openxmlformats.org/drawingml/2006/main">
             <a:off x="819150" y="2667000"/>
-            <a:ext cx="3657600" cy="1219200"/>
-          </a:xfrm>
-          <a:prstGeom xmlns:a="http://schemas.openxmlformats.org/drawingml/2006/main" prst="rect">
-            <a:avLst/>
-          </a:prstGeom>
-        </p:spPr>
-        <p:txBody>
-          <a:bodyPr xmlns:a="http://schemas.openxmlformats.org/drawingml/2006/main" lIns="0" tIns="0" rIns="0" bIns="0"/>
-          <a:lstStyle xmlns:a="http://schemas.openxmlformats.org/drawingml/2006/main"/>
-          <a:p xmlns:a="http://schemas.openxmlformats.org/drawingml/2006/main">
-            <a:pPr>
-              <a:defRPr sz="2175" b="1">
+            <a:ext cx="3467100" cy="266700"/>
+          </a:xfrm>
+          <a:prstGeom xmlns:a="http://schemas.openxmlformats.org/drawingml/2006/main" prst="rect">
+            <a:avLst/>
+          </a:prstGeom>
+        </p:spPr>
+        <p:txBody>
+          <a:bodyPr xmlns:a="http://schemas.openxmlformats.org/drawingml/2006/main" lIns="0" tIns="0" rIns="0" bIns="0"/>
+          <a:lstStyle xmlns:a="http://schemas.openxmlformats.org/drawingml/2006/main"/>
+          <a:p xmlns:a="http://schemas.openxmlformats.org/drawingml/2006/main">
+            <a:pPr>
+              <a:defRPr sz="1650" b="1">
                 <a:solidFill>
                   <a:srgbClr val="246A73"/>
                 </a:solidFill>
               </a:defRPr>
             </a:pPr>
             <a:r>
-              <a:rPr sz="2175" b="1">
+              <a:rPr sz="1650" b="1">
                 <a:solidFill>
                   <a:srgbClr val="246A73"/>
                 </a:solidFill>
@@ -4866,37 +5432,37 @@
           <p:cNvPr id="6" name="b-h2">
             <a:extLst xmlns:a="http://schemas.openxmlformats.org/drawingml/2006/main">
               <a:ext uri="{FF2B5EF4-FFF2-40B4-BE49-F238E27FC236}">
-                <a16:creationId xmlns:a16="http://schemas.microsoft.com/office/drawing/2014/main" id="{E873A5C4-FAD5-4457-BE5A-02AEF5A13B0C}"/>
-              </a:ext>
-            </a:extLst>
-          </p:cNvPr>
-          <p:cNvSpPr>
-            <a:spLocks xmlns:a="http://schemas.openxmlformats.org/drawingml/2006/main" noGrp="1"/>
-          </p:cNvSpPr>
-          <p:nvPr/>
-        </p:nvSpPr>
-        <p:spPr>
-          <a:xfrm xmlns:a="http://schemas.openxmlformats.org/drawingml/2006/main">
-            <a:off x="4781550" y="2667000"/>
-            <a:ext cx="5276850" cy="1219200"/>
-          </a:xfrm>
-          <a:prstGeom xmlns:a="http://schemas.openxmlformats.org/drawingml/2006/main" prst="rect">
-            <a:avLst/>
-          </a:prstGeom>
-        </p:spPr>
-        <p:txBody>
-          <a:bodyPr xmlns:a="http://schemas.openxmlformats.org/drawingml/2006/main" lIns="0" tIns="0" rIns="0" bIns="0"/>
-          <a:lstStyle xmlns:a="http://schemas.openxmlformats.org/drawingml/2006/main"/>
-          <a:p xmlns:a="http://schemas.openxmlformats.org/drawingml/2006/main">
-            <a:pPr>
-              <a:defRPr sz="2175" b="1">
+                <a16:creationId xmlns:a16="http://schemas.microsoft.com/office/drawing/2014/main" id="{16D82B61-9219-48BF-B828-305983C999F9}"/>
+              </a:ext>
+            </a:extLst>
+          </p:cNvPr>
+          <p:cNvSpPr>
+            <a:spLocks xmlns:a="http://schemas.openxmlformats.org/drawingml/2006/main" noGrp="1"/>
+          </p:cNvSpPr>
+          <p:nvPr/>
+        </p:nvSpPr>
+        <p:spPr>
+          <a:xfrm xmlns:a="http://schemas.openxmlformats.org/drawingml/2006/main">
+            <a:off x="4629150" y="2667000"/>
+            <a:ext cx="6496050" cy="266700"/>
+          </a:xfrm>
+          <a:prstGeom xmlns:a="http://schemas.openxmlformats.org/drawingml/2006/main" prst="rect">
+            <a:avLst/>
+          </a:prstGeom>
+        </p:spPr>
+        <p:txBody>
+          <a:bodyPr xmlns:a="http://schemas.openxmlformats.org/drawingml/2006/main" lIns="0" tIns="0" rIns="0" bIns="0"/>
+          <a:lstStyle xmlns:a="http://schemas.openxmlformats.org/drawingml/2006/main"/>
+          <a:p xmlns:a="http://schemas.openxmlformats.org/drawingml/2006/main">
+            <a:pPr>
+              <a:defRPr sz="1650" b="1">
                 <a:solidFill>
                   <a:srgbClr val="246A73"/>
                 </a:solidFill>
               </a:defRPr>
             </a:pPr>
             <a:r>
-              <a:rPr sz="2175" b="1">
+              <a:rPr sz="1650" b="1">
                 <a:solidFill>
                   <a:srgbClr val="246A73"/>
                 </a:solidFill>
@@ -4911,37 +5477,37 @@
           <p:cNvPr id="7" name="b-h3">
             <a:extLst xmlns:a="http://schemas.openxmlformats.org/drawingml/2006/main">
               <a:ext uri="{FF2B5EF4-FFF2-40B4-BE49-F238E27FC236}">
-                <a16:creationId xmlns:a16="http://schemas.microsoft.com/office/drawing/2014/main" id="{D75E1CF9-A142-40D9-9E5D-FB092740AE45}"/>
-              </a:ext>
-            </a:extLst>
-          </p:cNvPr>
-          <p:cNvSpPr>
-            <a:spLocks xmlns:a="http://schemas.openxmlformats.org/drawingml/2006/main" noGrp="1"/>
-          </p:cNvSpPr>
-          <p:nvPr/>
-        </p:nvSpPr>
-        <p:spPr>
-          <a:xfrm xmlns:a="http://schemas.openxmlformats.org/drawingml/2006/main">
-            <a:off x="10363200" y="2667000"/>
-            <a:ext cx="7105650" cy="1219200"/>
-          </a:xfrm>
-          <a:prstGeom xmlns:a="http://schemas.openxmlformats.org/drawingml/2006/main" prst="rect">
-            <a:avLst/>
-          </a:prstGeom>
-        </p:spPr>
-        <p:txBody>
-          <a:bodyPr xmlns:a="http://schemas.openxmlformats.org/drawingml/2006/main" lIns="0" tIns="0" rIns="0" bIns="0"/>
-          <a:lstStyle xmlns:a="http://schemas.openxmlformats.org/drawingml/2006/main"/>
-          <a:p xmlns:a="http://schemas.openxmlformats.org/drawingml/2006/main">
-            <a:pPr>
-              <a:defRPr sz="2175" b="1">
+                <a16:creationId xmlns:a16="http://schemas.microsoft.com/office/drawing/2014/main" id="{B115A5BD-CA03-4E73-9501-ED68969E8F69}"/>
+              </a:ext>
+            </a:extLst>
+          </p:cNvPr>
+          <p:cNvSpPr>
+            <a:spLocks xmlns:a="http://schemas.openxmlformats.org/drawingml/2006/main" noGrp="1"/>
+          </p:cNvSpPr>
+          <p:nvPr/>
+        </p:nvSpPr>
+        <p:spPr>
+          <a:xfrm xmlns:a="http://schemas.openxmlformats.org/drawingml/2006/main">
+            <a:off x="11449050" y="2667000"/>
+            <a:ext cx="6019800" cy="266700"/>
+          </a:xfrm>
+          <a:prstGeom xmlns:a="http://schemas.openxmlformats.org/drawingml/2006/main" prst="rect">
+            <a:avLst/>
+          </a:prstGeom>
+        </p:spPr>
+        <p:txBody>
+          <a:bodyPr xmlns:a="http://schemas.openxmlformats.org/drawingml/2006/main" lIns="0" tIns="0" rIns="0" bIns="0"/>
+          <a:lstStyle xmlns:a="http://schemas.openxmlformats.org/drawingml/2006/main"/>
+          <a:p xmlns:a="http://schemas.openxmlformats.org/drawingml/2006/main">
+            <a:pPr>
+              <a:defRPr sz="1650" b="1">
                 <a:solidFill>
                   <a:srgbClr val="246A73"/>
                 </a:solidFill>
               </a:defRPr>
             </a:pPr>
             <a:r>
-              <a:rPr sz="2175" b="1">
+              <a:rPr sz="1650" b="1">
                 <a:solidFill>
                   <a:srgbClr val="246A73"/>
                 </a:solidFill>
@@ -4953,42 +5519,75 @@
       </p:sp>
       <p:sp>
         <p:nvSpPr>
-          <p:cNvPr id="8" name="b1">
-            <a:extLst xmlns:a="http://schemas.openxmlformats.org/drawingml/2006/main">
-              <a:ext uri="{FF2B5EF4-FFF2-40B4-BE49-F238E27FC236}">
-                <a16:creationId xmlns:a16="http://schemas.microsoft.com/office/drawing/2014/main" id="{07B3D4F5-8414-4190-A2FA-B5013FE733C1}"/>
-              </a:ext>
-            </a:extLst>
-          </p:cNvPr>
-          <p:cNvSpPr>
-            <a:spLocks xmlns:a="http://schemas.openxmlformats.org/drawingml/2006/main" noGrp="1"/>
-          </p:cNvSpPr>
-          <p:nvPr/>
-        </p:nvSpPr>
-        <p:spPr>
-          <a:xfrm xmlns:a="http://schemas.openxmlformats.org/drawingml/2006/main">
-            <a:off x="819150" y="4038600"/>
-            <a:ext cx="3657600" cy="1219200"/>
-          </a:xfrm>
-          <a:prstGeom xmlns:a="http://schemas.openxmlformats.org/drawingml/2006/main" prst="rect">
-            <a:avLst/>
-          </a:prstGeom>
-        </p:spPr>
-        <p:txBody>
-          <a:bodyPr xmlns:a="http://schemas.openxmlformats.org/drawingml/2006/main" lIns="0" tIns="0" rIns="0" bIns="0"/>
-          <a:lstStyle xmlns:a="http://schemas.openxmlformats.org/drawingml/2006/main"/>
-          <a:p xmlns:a="http://schemas.openxmlformats.org/drawingml/2006/main">
-            <a:pPr>
-              <a:defRPr sz="2175">
-                <a:solidFill>
-                  <a:srgbClr val="1F2933"/>
-                </a:solidFill>
-              </a:defRPr>
-            </a:pPr>
-            <a:r>
-              <a:rPr sz="2175">
-                <a:solidFill>
-                  <a:srgbClr val="1F2933"/>
+          <p:cNvPr id="8" name="sphere-rule">
+            <a:extLst xmlns:a="http://schemas.openxmlformats.org/drawingml/2006/main">
+              <a:ext uri="{FF2B5EF4-FFF2-40B4-BE49-F238E27FC236}">
+                <a16:creationId xmlns:a16="http://schemas.microsoft.com/office/drawing/2014/main" id="{51ADB175-ABD0-4216-907A-062404658245}"/>
+              </a:ext>
+            </a:extLst>
+          </p:cNvPr>
+          <p:cNvSpPr>
+            <a:spLocks xmlns:a="http://schemas.openxmlformats.org/drawingml/2006/main" noGrp="1"/>
+          </p:cNvSpPr>
+          <p:nvPr/>
+        </p:nvSpPr>
+        <p:spPr>
+          <a:xfrm xmlns:a="http://schemas.openxmlformats.org/drawingml/2006/main">
+            <a:off x="819150" y="2971800"/>
+            <a:ext cx="16649700" cy="19050"/>
+          </a:xfrm>
+          <a:prstGeom xmlns:a="http://schemas.openxmlformats.org/drawingml/2006/main" prst="rect">
+            <a:avLst/>
+          </a:prstGeom>
+          <a:solidFill xmlns:a="http://schemas.openxmlformats.org/drawingml/2006/main">
+            <a:srgbClr val="D8D1C8"/>
+          </a:solidFill>
+          <a:ln xmlns:a="http://schemas.openxmlformats.org/drawingml/2006/main" w="0">
+            <a:solidFill>
+              <a:srgbClr val="D8D1C8"/>
+            </a:solidFill>
+            <a:prstDash val="solid"/>
+          </a:ln>
+        </p:spPr>
+      </p:sp>
+      <p:sp>
+        <p:nvSpPr>
+          <p:cNvPr id="9" name="sphere-name">
+            <a:extLst xmlns:a="http://schemas.openxmlformats.org/drawingml/2006/main">
+              <a:ext uri="{FF2B5EF4-FFF2-40B4-BE49-F238E27FC236}">
+                <a16:creationId xmlns:a16="http://schemas.microsoft.com/office/drawing/2014/main" id="{75EA61F3-D8AA-41AD-B5E7-F1665A9DE521}"/>
+              </a:ext>
+            </a:extLst>
+          </p:cNvPr>
+          <p:cNvSpPr>
+            <a:spLocks xmlns:a="http://schemas.openxmlformats.org/drawingml/2006/main" noGrp="1"/>
+          </p:cNvSpPr>
+          <p:nvPr/>
+        </p:nvSpPr>
+        <p:spPr>
+          <a:xfrm xmlns:a="http://schemas.openxmlformats.org/drawingml/2006/main">
+            <a:off x="819150" y="3219450"/>
+            <a:ext cx="3467100" cy="438150"/>
+          </a:xfrm>
+          <a:prstGeom xmlns:a="http://schemas.openxmlformats.org/drawingml/2006/main" prst="rect">
+            <a:avLst/>
+          </a:prstGeom>
+        </p:spPr>
+        <p:txBody>
+          <a:bodyPr xmlns:a="http://schemas.openxmlformats.org/drawingml/2006/main" lIns="0" tIns="0" rIns="0" bIns="0"/>
+          <a:lstStyle xmlns:a="http://schemas.openxmlformats.org/drawingml/2006/main"/>
+          <a:p xmlns:a="http://schemas.openxmlformats.org/drawingml/2006/main">
+            <a:pPr>
+              <a:defRPr sz="2850" b="1">
+                <a:solidFill>
+                  <a:srgbClr val="246A73"/>
+                </a:solidFill>
+              </a:defRPr>
+            </a:pPr>
+            <a:r>
+              <a:rPr sz="2850" b="1">
+                <a:solidFill>
+                  <a:srgbClr val="246A73"/>
                 </a:solidFill>
               </a:rPr>
               <a:t>Sphere</a:t>
@@ -4998,40 +5597,40 @@
       </p:sp>
       <p:sp>
         <p:nvSpPr>
-          <p:cNvPr id="9" name="b2">
-            <a:extLst xmlns:a="http://schemas.openxmlformats.org/drawingml/2006/main">
-              <a:ext uri="{FF2B5EF4-FFF2-40B4-BE49-F238E27FC236}">
-                <a16:creationId xmlns:a16="http://schemas.microsoft.com/office/drawing/2014/main" id="{930DA8BB-B4DC-49BA-80A8-1F656F2F5960}"/>
-              </a:ext>
-            </a:extLst>
-          </p:cNvPr>
-          <p:cNvSpPr>
-            <a:spLocks xmlns:a="http://schemas.openxmlformats.org/drawingml/2006/main" noGrp="1"/>
-          </p:cNvSpPr>
-          <p:nvPr/>
-        </p:nvSpPr>
-        <p:spPr>
-          <a:xfrm xmlns:a="http://schemas.openxmlformats.org/drawingml/2006/main">
-            <a:off x="4781550" y="4038600"/>
-            <a:ext cx="5276850" cy="1219200"/>
-          </a:xfrm>
-          <a:prstGeom xmlns:a="http://schemas.openxmlformats.org/drawingml/2006/main" prst="rect">
-            <a:avLst/>
-          </a:prstGeom>
-        </p:spPr>
-        <p:txBody>
-          <a:bodyPr xmlns:a="http://schemas.openxmlformats.org/drawingml/2006/main" lIns="0" tIns="0" rIns="0" bIns="0"/>
-          <a:lstStyle xmlns:a="http://schemas.openxmlformats.org/drawingml/2006/main"/>
-          <a:p xmlns:a="http://schemas.openxmlformats.org/drawingml/2006/main">
-            <a:pPr>
-              <a:defRPr sz="2175">
-                <a:solidFill>
-                  <a:srgbClr val="1F2933"/>
-                </a:solidFill>
-              </a:defRPr>
-            </a:pPr>
-            <a:r>
-              <a:rPr sz="2175">
+          <p:cNvPr id="10" name="sphere-why">
+            <a:extLst xmlns:a="http://schemas.openxmlformats.org/drawingml/2006/main">
+              <a:ext uri="{FF2B5EF4-FFF2-40B4-BE49-F238E27FC236}">
+                <a16:creationId xmlns:a16="http://schemas.microsoft.com/office/drawing/2014/main" id="{D9E906A1-B95A-4FE3-ABAB-FDFE2725D173}"/>
+              </a:ext>
+            </a:extLst>
+          </p:cNvPr>
+          <p:cNvSpPr>
+            <a:spLocks xmlns:a="http://schemas.openxmlformats.org/drawingml/2006/main" noGrp="1"/>
+          </p:cNvSpPr>
+          <p:nvPr/>
+        </p:nvSpPr>
+        <p:spPr>
+          <a:xfrm xmlns:a="http://schemas.openxmlformats.org/drawingml/2006/main">
+            <a:off x="4629150" y="3219450"/>
+            <a:ext cx="6496050" cy="438150"/>
+          </a:xfrm>
+          <a:prstGeom xmlns:a="http://schemas.openxmlformats.org/drawingml/2006/main" prst="rect">
+            <a:avLst/>
+          </a:prstGeom>
+        </p:spPr>
+        <p:txBody>
+          <a:bodyPr xmlns:a="http://schemas.openxmlformats.org/drawingml/2006/main" lIns="0" tIns="0" rIns="0" bIns="0"/>
+          <a:lstStyle xmlns:a="http://schemas.openxmlformats.org/drawingml/2006/main"/>
+          <a:p xmlns:a="http://schemas.openxmlformats.org/drawingml/2006/main">
+            <a:pPr>
+              <a:defRPr sz="1875">
+                <a:solidFill>
+                  <a:srgbClr val="1F2933"/>
+                </a:solidFill>
+              </a:defRPr>
+            </a:pPr>
+            <a:r>
+              <a:rPr sz="1875">
                 <a:solidFill>
                   <a:srgbClr val="1F2933"/>
                 </a:solidFill>
@@ -5043,87 +5642,120 @@
       </p:sp>
       <p:sp>
         <p:nvSpPr>
-          <p:cNvPr id="10" name="b3">
-            <a:extLst xmlns:a="http://schemas.openxmlformats.org/drawingml/2006/main">
-              <a:ext uri="{FF2B5EF4-FFF2-40B4-BE49-F238E27FC236}">
-                <a16:creationId xmlns:a16="http://schemas.microsoft.com/office/drawing/2014/main" id="{2CE375B7-D004-48E9-9CE7-19CDD5E5C69C}"/>
-              </a:ext>
-            </a:extLst>
-          </p:cNvPr>
-          <p:cNvSpPr>
-            <a:spLocks xmlns:a="http://schemas.openxmlformats.org/drawingml/2006/main" noGrp="1"/>
-          </p:cNvSpPr>
-          <p:nvPr/>
-        </p:nvSpPr>
-        <p:spPr>
-          <a:xfrm xmlns:a="http://schemas.openxmlformats.org/drawingml/2006/main">
-            <a:off x="10363200" y="4038600"/>
-            <a:ext cx="7105650" cy="1219200"/>
-          </a:xfrm>
-          <a:prstGeom xmlns:a="http://schemas.openxmlformats.org/drawingml/2006/main" prst="rect">
-            <a:avLst/>
-          </a:prstGeom>
-        </p:spPr>
-        <p:txBody>
-          <a:bodyPr xmlns:a="http://schemas.openxmlformats.org/drawingml/2006/main" lIns="0" tIns="0" rIns="0" bIns="0"/>
-          <a:lstStyle xmlns:a="http://schemas.openxmlformats.org/drawingml/2006/main"/>
-          <a:p xmlns:a="http://schemas.openxmlformats.org/drawingml/2006/main">
-            <a:pPr>
-              <a:defRPr sz="2175">
-                <a:solidFill>
-                  <a:srgbClr val="1F2933"/>
-                </a:solidFill>
-              </a:defRPr>
-            </a:pPr>
-            <a:r>
-              <a:rPr sz="2175">
-                <a:solidFill>
-                  <a:srgbClr val="1F2933"/>
-                </a:solidFill>
-              </a:rPr>
-              <a:t>should converge close to zero</a:t>
-            </a:r>
-          </a:p>
-        </p:txBody>
-      </p:sp>
-      <p:sp>
-        <p:nvSpPr>
-          <p:cNvPr id="11" name="b4">
-            <a:extLst xmlns:a="http://schemas.openxmlformats.org/drawingml/2006/main">
-              <a:ext uri="{FF2B5EF4-FFF2-40B4-BE49-F238E27FC236}">
-                <a16:creationId xmlns:a16="http://schemas.microsoft.com/office/drawing/2014/main" id="{AD036D7A-EAB8-4207-935C-D9E941EB11C2}"/>
-              </a:ext>
-            </a:extLst>
-          </p:cNvPr>
-          <p:cNvSpPr>
-            <a:spLocks xmlns:a="http://schemas.openxmlformats.org/drawingml/2006/main" noGrp="1"/>
-          </p:cNvSpPr>
-          <p:nvPr/>
-        </p:nvSpPr>
-        <p:spPr>
-          <a:xfrm xmlns:a="http://schemas.openxmlformats.org/drawingml/2006/main">
-            <a:off x="819150" y="5429250"/>
-            <a:ext cx="3657600" cy="1219200"/>
-          </a:xfrm>
-          <a:prstGeom xmlns:a="http://schemas.openxmlformats.org/drawingml/2006/main" prst="rect">
-            <a:avLst/>
-          </a:prstGeom>
-        </p:spPr>
-        <p:txBody>
-          <a:bodyPr xmlns:a="http://schemas.openxmlformats.org/drawingml/2006/main" lIns="0" tIns="0" rIns="0" bIns="0"/>
-          <a:lstStyle xmlns:a="http://schemas.openxmlformats.org/drawingml/2006/main"/>
-          <a:p xmlns:a="http://schemas.openxmlformats.org/drawingml/2006/main">
-            <a:pPr>
-              <a:defRPr sz="2175">
-                <a:solidFill>
-                  <a:srgbClr val="1F2933"/>
-                </a:solidFill>
-              </a:defRPr>
-            </a:pPr>
-            <a:r>
-              <a:rPr sz="2175">
-                <a:solidFill>
-                  <a:srgbClr val="1F2933"/>
+          <p:cNvPr id="11" name="sphere-expected">
+            <a:extLst xmlns:a="http://schemas.openxmlformats.org/drawingml/2006/main">
+              <a:ext uri="{FF2B5EF4-FFF2-40B4-BE49-F238E27FC236}">
+                <a16:creationId xmlns:a16="http://schemas.microsoft.com/office/drawing/2014/main" id="{DF773800-9CFB-4431-B1F3-D18F832AF099}"/>
+              </a:ext>
+            </a:extLst>
+          </p:cNvPr>
+          <p:cNvSpPr>
+            <a:spLocks xmlns:a="http://schemas.openxmlformats.org/drawingml/2006/main" noGrp="1"/>
+          </p:cNvSpPr>
+          <p:nvPr/>
+        </p:nvSpPr>
+        <p:spPr>
+          <a:xfrm xmlns:a="http://schemas.openxmlformats.org/drawingml/2006/main">
+            <a:off x="11449050" y="3219450"/>
+            <a:ext cx="6019800" cy="438150"/>
+          </a:xfrm>
+          <a:prstGeom xmlns:a="http://schemas.openxmlformats.org/drawingml/2006/main" prst="rect">
+            <a:avLst/>
+          </a:prstGeom>
+        </p:spPr>
+        <p:txBody>
+          <a:bodyPr xmlns:a="http://schemas.openxmlformats.org/drawingml/2006/main" lIns="0" tIns="0" rIns="0" bIns="0"/>
+          <a:lstStyle xmlns:a="http://schemas.openxmlformats.org/drawingml/2006/main"/>
+          <a:p xmlns:a="http://schemas.openxmlformats.org/drawingml/2006/main">
+            <a:pPr>
+              <a:defRPr sz="1875">
+                <a:solidFill>
+                  <a:srgbClr val="5F6368"/>
+                </a:solidFill>
+              </a:defRPr>
+            </a:pPr>
+            <a:r>
+              <a:rPr sz="1875">
+                <a:solidFill>
+                  <a:srgbClr val="5F6368"/>
+                </a:solidFill>
+              </a:rPr>
+              <a:t>converge close to zero</a:t>
+            </a:r>
+          </a:p>
+        </p:txBody>
+      </p:sp>
+      <p:sp>
+        <p:nvSpPr>
+          <p:cNvPr id="12" name="rastrigin-rule">
+            <a:extLst xmlns:a="http://schemas.openxmlformats.org/drawingml/2006/main">
+              <a:ext uri="{FF2B5EF4-FFF2-40B4-BE49-F238E27FC236}">
+                <a16:creationId xmlns:a16="http://schemas.microsoft.com/office/drawing/2014/main" id="{1F628287-A909-42E6-815E-0828612515E9}"/>
+              </a:ext>
+            </a:extLst>
+          </p:cNvPr>
+          <p:cNvSpPr>
+            <a:spLocks xmlns:a="http://schemas.openxmlformats.org/drawingml/2006/main" noGrp="1"/>
+          </p:cNvSpPr>
+          <p:nvPr/>
+        </p:nvSpPr>
+        <p:spPr>
+          <a:xfrm xmlns:a="http://schemas.openxmlformats.org/drawingml/2006/main">
+            <a:off x="819150" y="3829050"/>
+            <a:ext cx="16649700" cy="19050"/>
+          </a:xfrm>
+          <a:prstGeom xmlns:a="http://schemas.openxmlformats.org/drawingml/2006/main" prst="rect">
+            <a:avLst/>
+          </a:prstGeom>
+          <a:solidFill xmlns:a="http://schemas.openxmlformats.org/drawingml/2006/main">
+            <a:srgbClr val="D8D1C8"/>
+          </a:solidFill>
+          <a:ln xmlns:a="http://schemas.openxmlformats.org/drawingml/2006/main" w="0">
+            <a:solidFill>
+              <a:srgbClr val="D8D1C8"/>
+            </a:solidFill>
+            <a:prstDash val="solid"/>
+          </a:ln>
+        </p:spPr>
+      </p:sp>
+      <p:sp>
+        <p:nvSpPr>
+          <p:cNvPr id="13" name="rastrigin-name">
+            <a:extLst xmlns:a="http://schemas.openxmlformats.org/drawingml/2006/main">
+              <a:ext uri="{FF2B5EF4-FFF2-40B4-BE49-F238E27FC236}">
+                <a16:creationId xmlns:a16="http://schemas.microsoft.com/office/drawing/2014/main" id="{5B8AB062-54DB-48AA-BBE8-B76A2BCFEC10}"/>
+              </a:ext>
+            </a:extLst>
+          </p:cNvPr>
+          <p:cNvSpPr>
+            <a:spLocks xmlns:a="http://schemas.openxmlformats.org/drawingml/2006/main" noGrp="1"/>
+          </p:cNvSpPr>
+          <p:nvPr/>
+        </p:nvSpPr>
+        <p:spPr>
+          <a:xfrm xmlns:a="http://schemas.openxmlformats.org/drawingml/2006/main">
+            <a:off x="819150" y="4076700"/>
+            <a:ext cx="3467100" cy="438150"/>
+          </a:xfrm>
+          <a:prstGeom xmlns:a="http://schemas.openxmlformats.org/drawingml/2006/main" prst="rect">
+            <a:avLst/>
+          </a:prstGeom>
+        </p:spPr>
+        <p:txBody>
+          <a:bodyPr xmlns:a="http://schemas.openxmlformats.org/drawingml/2006/main" lIns="0" tIns="0" rIns="0" bIns="0"/>
+          <a:lstStyle xmlns:a="http://schemas.openxmlformats.org/drawingml/2006/main"/>
+          <a:p xmlns:a="http://schemas.openxmlformats.org/drawingml/2006/main">
+            <a:pPr>
+              <a:defRPr sz="2850" b="1">
+                <a:solidFill>
+                  <a:srgbClr val="B5532F"/>
+                </a:solidFill>
+              </a:defRPr>
+            </a:pPr>
+            <a:r>
+              <a:rPr sz="2850" b="1">
+                <a:solidFill>
+                  <a:srgbClr val="B5532F"/>
                 </a:solidFill>
               </a:rPr>
               <a:t>Rastrigin</a:t>
@@ -5133,87 +5765,87 @@
       </p:sp>
       <p:sp>
         <p:nvSpPr>
-          <p:cNvPr id="12" name="b5">
-            <a:extLst xmlns:a="http://schemas.openxmlformats.org/drawingml/2006/main">
-              <a:ext uri="{FF2B5EF4-FFF2-40B4-BE49-F238E27FC236}">
-                <a16:creationId xmlns:a16="http://schemas.microsoft.com/office/drawing/2014/main" id="{A381958D-586C-4199-8513-9C8CA237E0B8}"/>
-              </a:ext>
-            </a:extLst>
-          </p:cNvPr>
-          <p:cNvSpPr>
-            <a:spLocks xmlns:a="http://schemas.openxmlformats.org/drawingml/2006/main" noGrp="1"/>
-          </p:cNvSpPr>
-          <p:nvPr/>
-        </p:nvSpPr>
-        <p:spPr>
-          <a:xfrm xmlns:a="http://schemas.openxmlformats.org/drawingml/2006/main">
-            <a:off x="4781550" y="5429250"/>
-            <a:ext cx="5276850" cy="1219200"/>
-          </a:xfrm>
-          <a:prstGeom xmlns:a="http://schemas.openxmlformats.org/drawingml/2006/main" prst="rect">
-            <a:avLst/>
-          </a:prstGeom>
-        </p:spPr>
-        <p:txBody>
-          <a:bodyPr xmlns:a="http://schemas.openxmlformats.org/drawingml/2006/main" lIns="0" tIns="0" rIns="0" bIns="0"/>
-          <a:lstStyle xmlns:a="http://schemas.openxmlformats.org/drawingml/2006/main"/>
-          <a:p xmlns:a="http://schemas.openxmlformats.org/drawingml/2006/main">
-            <a:pPr>
-              <a:defRPr sz="2175">
-                <a:solidFill>
-                  <a:srgbClr val="1F2933"/>
-                </a:solidFill>
-              </a:defRPr>
-            </a:pPr>
-            <a:r>
-              <a:rPr sz="2175">
-                <a:solidFill>
-                  <a:srgbClr val="1F2933"/>
-                </a:solidFill>
-              </a:rPr>
-              <a:t>many regular local minima</a:t>
-            </a:r>
-          </a:p>
-        </p:txBody>
-      </p:sp>
-      <p:sp>
-        <p:nvSpPr>
-          <p:cNvPr id="13" name="b6">
-            <a:extLst xmlns:a="http://schemas.openxmlformats.org/drawingml/2006/main">
-              <a:ext uri="{FF2B5EF4-FFF2-40B4-BE49-F238E27FC236}">
-                <a16:creationId xmlns:a16="http://schemas.microsoft.com/office/drawing/2014/main" id="{650DE2CD-E109-4321-8BFA-CAADC9049F08}"/>
-              </a:ext>
-            </a:extLst>
-          </p:cNvPr>
-          <p:cNvSpPr>
-            <a:spLocks xmlns:a="http://schemas.openxmlformats.org/drawingml/2006/main" noGrp="1"/>
-          </p:cNvSpPr>
-          <p:nvPr/>
-        </p:nvSpPr>
-        <p:spPr>
-          <a:xfrm xmlns:a="http://schemas.openxmlformats.org/drawingml/2006/main">
-            <a:off x="10363200" y="5429250"/>
-            <a:ext cx="7105650" cy="1219200"/>
-          </a:xfrm>
-          <a:prstGeom xmlns:a="http://schemas.openxmlformats.org/drawingml/2006/main" prst="rect">
-            <a:avLst/>
-          </a:prstGeom>
-        </p:spPr>
-        <p:txBody>
-          <a:bodyPr xmlns:a="http://schemas.openxmlformats.org/drawingml/2006/main" lIns="0" tIns="0" rIns="0" bIns="0"/>
-          <a:lstStyle xmlns:a="http://schemas.openxmlformats.org/drawingml/2006/main"/>
-          <a:p xmlns:a="http://schemas.openxmlformats.org/drawingml/2006/main">
-            <a:pPr>
-              <a:defRPr sz="2175">
-                <a:solidFill>
-                  <a:srgbClr val="1F2933"/>
-                </a:solidFill>
-              </a:defRPr>
-            </a:pPr>
-            <a:r>
-              <a:rPr sz="2175">
-                <a:solidFill>
-                  <a:srgbClr val="1F2933"/>
+          <p:cNvPr id="14" name="rastrigin-why">
+            <a:extLst xmlns:a="http://schemas.openxmlformats.org/drawingml/2006/main">
+              <a:ext uri="{FF2B5EF4-FFF2-40B4-BE49-F238E27FC236}">
+                <a16:creationId xmlns:a16="http://schemas.microsoft.com/office/drawing/2014/main" id="{032C62DD-F772-4BF8-9836-D80910076C83}"/>
+              </a:ext>
+            </a:extLst>
+          </p:cNvPr>
+          <p:cNvSpPr>
+            <a:spLocks xmlns:a="http://schemas.openxmlformats.org/drawingml/2006/main" noGrp="1"/>
+          </p:cNvSpPr>
+          <p:nvPr/>
+        </p:nvSpPr>
+        <p:spPr>
+          <a:xfrm xmlns:a="http://schemas.openxmlformats.org/drawingml/2006/main">
+            <a:off x="4629150" y="4076700"/>
+            <a:ext cx="6496050" cy="438150"/>
+          </a:xfrm>
+          <a:prstGeom xmlns:a="http://schemas.openxmlformats.org/drawingml/2006/main" prst="rect">
+            <a:avLst/>
+          </a:prstGeom>
+        </p:spPr>
+        <p:txBody>
+          <a:bodyPr xmlns:a="http://schemas.openxmlformats.org/drawingml/2006/main" lIns="0" tIns="0" rIns="0" bIns="0"/>
+          <a:lstStyle xmlns:a="http://schemas.openxmlformats.org/drawingml/2006/main"/>
+          <a:p xmlns:a="http://schemas.openxmlformats.org/drawingml/2006/main">
+            <a:pPr>
+              <a:defRPr sz="1875">
+                <a:solidFill>
+                  <a:srgbClr val="1F2933"/>
+                </a:solidFill>
+              </a:defRPr>
+            </a:pPr>
+            <a:r>
+              <a:rPr sz="1875">
+                <a:solidFill>
+                  <a:srgbClr val="1F2933"/>
+                </a:solidFill>
+              </a:rPr>
+              <a:t>regular local minima across the domain</a:t>
+            </a:r>
+          </a:p>
+        </p:txBody>
+      </p:sp>
+      <p:sp>
+        <p:nvSpPr>
+          <p:cNvPr id="15" name="rastrigin-expected">
+            <a:extLst xmlns:a="http://schemas.openxmlformats.org/drawingml/2006/main">
+              <a:ext uri="{FF2B5EF4-FFF2-40B4-BE49-F238E27FC236}">
+                <a16:creationId xmlns:a16="http://schemas.microsoft.com/office/drawing/2014/main" id="{E09113D4-47D6-456B-A453-5319B571ADD5}"/>
+              </a:ext>
+            </a:extLst>
+          </p:cNvPr>
+          <p:cNvSpPr>
+            <a:spLocks xmlns:a="http://schemas.openxmlformats.org/drawingml/2006/main" noGrp="1"/>
+          </p:cNvSpPr>
+          <p:nvPr/>
+        </p:nvSpPr>
+        <p:spPr>
+          <a:xfrm xmlns:a="http://schemas.openxmlformats.org/drawingml/2006/main">
+            <a:off x="11449050" y="4076700"/>
+            <a:ext cx="6019800" cy="438150"/>
+          </a:xfrm>
+          <a:prstGeom xmlns:a="http://schemas.openxmlformats.org/drawingml/2006/main" prst="rect">
+            <a:avLst/>
+          </a:prstGeom>
+        </p:spPr>
+        <p:txBody>
+          <a:bodyPr xmlns:a="http://schemas.openxmlformats.org/drawingml/2006/main" lIns="0" tIns="0" rIns="0" bIns="0"/>
+          <a:lstStyle xmlns:a="http://schemas.openxmlformats.org/drawingml/2006/main"/>
+          <a:p xmlns:a="http://schemas.openxmlformats.org/drawingml/2006/main">
+            <a:pPr>
+              <a:defRPr sz="1875">
+                <a:solidFill>
+                  <a:srgbClr val="5F6368"/>
+                </a:solidFill>
+              </a:defRPr>
+            </a:pPr>
+            <a:r>
+              <a:rPr sz="1875">
+                <a:solidFill>
+                  <a:srgbClr val="5F6368"/>
                 </a:solidFill>
               </a:rPr>
               <a:t>large jumps should help</a:t>
@@ -5223,42 +5855,75 @@
       </p:sp>
       <p:sp>
         <p:nvSpPr>
-          <p:cNvPr id="14" name="b7">
-            <a:extLst xmlns:a="http://schemas.openxmlformats.org/drawingml/2006/main">
-              <a:ext uri="{FF2B5EF4-FFF2-40B4-BE49-F238E27FC236}">
-                <a16:creationId xmlns:a16="http://schemas.microsoft.com/office/drawing/2014/main" id="{FBF75565-D189-4A94-98FE-1303DE5AE83F}"/>
-              </a:ext>
-            </a:extLst>
-          </p:cNvPr>
-          <p:cNvSpPr>
-            <a:spLocks xmlns:a="http://schemas.openxmlformats.org/drawingml/2006/main" noGrp="1"/>
-          </p:cNvSpPr>
-          <p:nvPr/>
-        </p:nvSpPr>
-        <p:spPr>
-          <a:xfrm xmlns:a="http://schemas.openxmlformats.org/drawingml/2006/main">
-            <a:off x="819150" y="6819900"/>
-            <a:ext cx="3657600" cy="1219200"/>
-          </a:xfrm>
-          <a:prstGeom xmlns:a="http://schemas.openxmlformats.org/drawingml/2006/main" prst="rect">
-            <a:avLst/>
-          </a:prstGeom>
-        </p:spPr>
-        <p:txBody>
-          <a:bodyPr xmlns:a="http://schemas.openxmlformats.org/drawingml/2006/main" lIns="0" tIns="0" rIns="0" bIns="0"/>
-          <a:lstStyle xmlns:a="http://schemas.openxmlformats.org/drawingml/2006/main"/>
-          <a:p xmlns:a="http://schemas.openxmlformats.org/drawingml/2006/main">
-            <a:pPr>
-              <a:defRPr sz="2175">
-                <a:solidFill>
-                  <a:srgbClr val="1F2933"/>
-                </a:solidFill>
-              </a:defRPr>
-            </a:pPr>
-            <a:r>
-              <a:rPr sz="2175">
-                <a:solidFill>
-                  <a:srgbClr val="1F2933"/>
+          <p:cNvPr id="16" name="michalewicz-rule">
+            <a:extLst xmlns:a="http://schemas.openxmlformats.org/drawingml/2006/main">
+              <a:ext uri="{FF2B5EF4-FFF2-40B4-BE49-F238E27FC236}">
+                <a16:creationId xmlns:a16="http://schemas.microsoft.com/office/drawing/2014/main" id="{6F2B2712-B0CE-44AA-806F-E6E3FBE3B81C}"/>
+              </a:ext>
+            </a:extLst>
+          </p:cNvPr>
+          <p:cNvSpPr>
+            <a:spLocks xmlns:a="http://schemas.openxmlformats.org/drawingml/2006/main" noGrp="1"/>
+          </p:cNvSpPr>
+          <p:nvPr/>
+        </p:nvSpPr>
+        <p:spPr>
+          <a:xfrm xmlns:a="http://schemas.openxmlformats.org/drawingml/2006/main">
+            <a:off x="819150" y="4686300"/>
+            <a:ext cx="16649700" cy="19050"/>
+          </a:xfrm>
+          <a:prstGeom xmlns:a="http://schemas.openxmlformats.org/drawingml/2006/main" prst="rect">
+            <a:avLst/>
+          </a:prstGeom>
+          <a:solidFill xmlns:a="http://schemas.openxmlformats.org/drawingml/2006/main">
+            <a:srgbClr val="D8D1C8"/>
+          </a:solidFill>
+          <a:ln xmlns:a="http://schemas.openxmlformats.org/drawingml/2006/main" w="0">
+            <a:solidFill>
+              <a:srgbClr val="D8D1C8"/>
+            </a:solidFill>
+            <a:prstDash val="solid"/>
+          </a:ln>
+        </p:spPr>
+      </p:sp>
+      <p:sp>
+        <p:nvSpPr>
+          <p:cNvPr id="17" name="michalewicz-name">
+            <a:extLst xmlns:a="http://schemas.openxmlformats.org/drawingml/2006/main">
+              <a:ext uri="{FF2B5EF4-FFF2-40B4-BE49-F238E27FC236}">
+                <a16:creationId xmlns:a16="http://schemas.microsoft.com/office/drawing/2014/main" id="{8A93632C-5DA7-4A2A-B7C3-DB7092FA6F45}"/>
+              </a:ext>
+            </a:extLst>
+          </p:cNvPr>
+          <p:cNvSpPr>
+            <a:spLocks xmlns:a="http://schemas.openxmlformats.org/drawingml/2006/main" noGrp="1"/>
+          </p:cNvSpPr>
+          <p:nvPr/>
+        </p:nvSpPr>
+        <p:spPr>
+          <a:xfrm xmlns:a="http://schemas.openxmlformats.org/drawingml/2006/main">
+            <a:off x="819150" y="4933950"/>
+            <a:ext cx="3467100" cy="438150"/>
+          </a:xfrm>
+          <a:prstGeom xmlns:a="http://schemas.openxmlformats.org/drawingml/2006/main" prst="rect">
+            <a:avLst/>
+          </a:prstGeom>
+        </p:spPr>
+        <p:txBody>
+          <a:bodyPr xmlns:a="http://schemas.openxmlformats.org/drawingml/2006/main" lIns="0" tIns="0" rIns="0" bIns="0"/>
+          <a:lstStyle xmlns:a="http://schemas.openxmlformats.org/drawingml/2006/main"/>
+          <a:p xmlns:a="http://schemas.openxmlformats.org/drawingml/2006/main">
+            <a:pPr>
+              <a:defRPr sz="2850" b="1">
+                <a:solidFill>
+                  <a:srgbClr val="6B5CA5"/>
+                </a:solidFill>
+              </a:defRPr>
+            </a:pPr>
+            <a:r>
+              <a:rPr sz="2850" b="1">
+                <a:solidFill>
+                  <a:srgbClr val="6B5CA5"/>
                 </a:solidFill>
               </a:rPr>
               <a:t>Michalewicz</a:t>
@@ -5268,40 +5933,40 @@
       </p:sp>
       <p:sp>
         <p:nvSpPr>
-          <p:cNvPr id="15" name="b8">
-            <a:extLst xmlns:a="http://schemas.openxmlformats.org/drawingml/2006/main">
-              <a:ext uri="{FF2B5EF4-FFF2-40B4-BE49-F238E27FC236}">
-                <a16:creationId xmlns:a16="http://schemas.microsoft.com/office/drawing/2014/main" id="{B314C5A0-60B4-4D5F-A388-B7A8993C907A}"/>
-              </a:ext>
-            </a:extLst>
-          </p:cNvPr>
-          <p:cNvSpPr>
-            <a:spLocks xmlns:a="http://schemas.openxmlformats.org/drawingml/2006/main" noGrp="1"/>
-          </p:cNvSpPr>
-          <p:nvPr/>
-        </p:nvSpPr>
-        <p:spPr>
-          <a:xfrm xmlns:a="http://schemas.openxmlformats.org/drawingml/2006/main">
-            <a:off x="4781550" y="6819900"/>
-            <a:ext cx="5276850" cy="1219200"/>
-          </a:xfrm>
-          <a:prstGeom xmlns:a="http://schemas.openxmlformats.org/drawingml/2006/main" prst="rect">
-            <a:avLst/>
-          </a:prstGeom>
-        </p:spPr>
-        <p:txBody>
-          <a:bodyPr xmlns:a="http://schemas.openxmlformats.org/drawingml/2006/main" lIns="0" tIns="0" rIns="0" bIns="0"/>
-          <a:lstStyle xmlns:a="http://schemas.openxmlformats.org/drawingml/2006/main"/>
-          <a:p xmlns:a="http://schemas.openxmlformats.org/drawingml/2006/main">
-            <a:pPr>
-              <a:defRPr sz="2175">
-                <a:solidFill>
-                  <a:srgbClr val="1F2933"/>
-                </a:solidFill>
-              </a:defRPr>
-            </a:pPr>
-            <a:r>
-              <a:rPr sz="2175">
+          <p:cNvPr id="18" name="michalewicz-why">
+            <a:extLst xmlns:a="http://schemas.openxmlformats.org/drawingml/2006/main">
+              <a:ext uri="{FF2B5EF4-FFF2-40B4-BE49-F238E27FC236}">
+                <a16:creationId xmlns:a16="http://schemas.microsoft.com/office/drawing/2014/main" id="{FAF74381-D835-4D70-A31B-B953631B229A}"/>
+              </a:ext>
+            </a:extLst>
+          </p:cNvPr>
+          <p:cNvSpPr>
+            <a:spLocks xmlns:a="http://schemas.openxmlformats.org/drawingml/2006/main" noGrp="1"/>
+          </p:cNvSpPr>
+          <p:nvPr/>
+        </p:nvSpPr>
+        <p:spPr>
+          <a:xfrm xmlns:a="http://schemas.openxmlformats.org/drawingml/2006/main">
+            <a:off x="4629150" y="4933950"/>
+            <a:ext cx="6496050" cy="438150"/>
+          </a:xfrm>
+          <a:prstGeom xmlns:a="http://schemas.openxmlformats.org/drawingml/2006/main" prst="rect">
+            <a:avLst/>
+          </a:prstGeom>
+        </p:spPr>
+        <p:txBody>
+          <a:bodyPr xmlns:a="http://schemas.openxmlformats.org/drawingml/2006/main" lIns="0" tIns="0" rIns="0" bIns="0"/>
+          <a:lstStyle xmlns:a="http://schemas.openxmlformats.org/drawingml/2006/main"/>
+          <a:p xmlns:a="http://schemas.openxmlformats.org/drawingml/2006/main">
+            <a:pPr>
+              <a:defRPr sz="1875">
+                <a:solidFill>
+                  <a:srgbClr val="1F2933"/>
+                </a:solidFill>
+              </a:defRPr>
+            </a:pPr>
+            <a:r>
+              <a:rPr sz="1875">
                 <a:solidFill>
                   <a:srgbClr val="1F2933"/>
                 </a:solidFill>
@@ -5313,42 +5978,42 @@
       </p:sp>
       <p:sp>
         <p:nvSpPr>
-          <p:cNvPr id="16" name="b9">
-            <a:extLst xmlns:a="http://schemas.openxmlformats.org/drawingml/2006/main">
-              <a:ext uri="{FF2B5EF4-FFF2-40B4-BE49-F238E27FC236}">
-                <a16:creationId xmlns:a16="http://schemas.microsoft.com/office/drawing/2014/main" id="{3091ACAC-DD5B-4FA4-AB41-FA004B84AA8C}"/>
-              </a:ext>
-            </a:extLst>
-          </p:cNvPr>
-          <p:cNvSpPr>
-            <a:spLocks xmlns:a="http://schemas.openxmlformats.org/drawingml/2006/main" noGrp="1"/>
-          </p:cNvSpPr>
-          <p:nvPr/>
-        </p:nvSpPr>
-        <p:spPr>
-          <a:xfrm xmlns:a="http://schemas.openxmlformats.org/drawingml/2006/main">
-            <a:off x="10363200" y="6819900"/>
-            <a:ext cx="7105650" cy="1219200"/>
-          </a:xfrm>
-          <a:prstGeom xmlns:a="http://schemas.openxmlformats.org/drawingml/2006/main" prst="rect">
-            <a:avLst/>
-          </a:prstGeom>
-        </p:spPr>
-        <p:txBody>
-          <a:bodyPr xmlns:a="http://schemas.openxmlformats.org/drawingml/2006/main" lIns="0" tIns="0" rIns="0" bIns="0"/>
-          <a:lstStyle xmlns:a="http://schemas.openxmlformats.org/drawingml/2006/main"/>
-          <a:p xmlns:a="http://schemas.openxmlformats.org/drawingml/2006/main">
-            <a:pPr>
-              <a:defRPr sz="2175">
-                <a:solidFill>
-                  <a:srgbClr val="1F2933"/>
-                </a:solidFill>
-              </a:defRPr>
-            </a:pPr>
-            <a:r>
-              <a:rPr sz="2175">
-                <a:solidFill>
-                  <a:srgbClr val="1F2933"/>
+          <p:cNvPr id="19" name="michalewicz-expected">
+            <a:extLst xmlns:a="http://schemas.openxmlformats.org/drawingml/2006/main">
+              <a:ext uri="{FF2B5EF4-FFF2-40B4-BE49-F238E27FC236}">
+                <a16:creationId xmlns:a16="http://schemas.microsoft.com/office/drawing/2014/main" id="{1B01DAAF-8391-4989-96C7-F5FCB4DF8E96}"/>
+              </a:ext>
+            </a:extLst>
+          </p:cNvPr>
+          <p:cNvSpPr>
+            <a:spLocks xmlns:a="http://schemas.openxmlformats.org/drawingml/2006/main" noGrp="1"/>
+          </p:cNvSpPr>
+          <p:nvPr/>
+        </p:nvSpPr>
+        <p:spPr>
+          <a:xfrm xmlns:a="http://schemas.openxmlformats.org/drawingml/2006/main">
+            <a:off x="11449050" y="4933950"/>
+            <a:ext cx="6019800" cy="438150"/>
+          </a:xfrm>
+          <a:prstGeom xmlns:a="http://schemas.openxmlformats.org/drawingml/2006/main" prst="rect">
+            <a:avLst/>
+          </a:prstGeom>
+        </p:spPr>
+        <p:txBody>
+          <a:bodyPr xmlns:a="http://schemas.openxmlformats.org/drawingml/2006/main" lIns="0" tIns="0" rIns="0" bIns="0"/>
+          <a:lstStyle xmlns:a="http://schemas.openxmlformats.org/drawingml/2006/main"/>
+          <a:p xmlns:a="http://schemas.openxmlformats.org/drawingml/2006/main">
+            <a:pPr>
+              <a:defRPr sz="1875">
+                <a:solidFill>
+                  <a:srgbClr val="5F6368"/>
+                </a:solidFill>
+              </a:defRPr>
+            </a:pPr>
+            <a:r>
+              <a:rPr sz="1875">
+                <a:solidFill>
+                  <a:srgbClr val="5F6368"/>
                 </a:solidFill>
               </a:rPr>
               <a:t>good solutions, not guaranteed optimum</a:t>
@@ -5358,22 +6023,55 @@
       </p:sp>
       <p:sp>
         <p:nvSpPr>
-          <p:cNvPr id="17" name="metric-value">
-            <a:extLst xmlns:a="http://schemas.openxmlformats.org/drawingml/2006/main">
-              <a:ext uri="{FF2B5EF4-FFF2-40B4-BE49-F238E27FC236}">
-                <a16:creationId xmlns:a16="http://schemas.microsoft.com/office/drawing/2014/main" id="{60DB740D-722F-49DF-B564-C6CF01545AAE}"/>
-              </a:ext>
-            </a:extLst>
-          </p:cNvPr>
-          <p:cNvSpPr>
-            <a:spLocks xmlns:a="http://schemas.openxmlformats.org/drawingml/2006/main" noGrp="1"/>
-          </p:cNvSpPr>
-          <p:nvPr/>
-        </p:nvSpPr>
-        <p:spPr>
-          <a:xfrm xmlns:a="http://schemas.openxmlformats.org/drawingml/2006/main">
-            <a:off x="819150" y="8286750"/>
-            <a:ext cx="5257800" cy="647700"/>
+          <p:cNvPr id="20" name="benchmark-bottom-rule">
+            <a:extLst xmlns:a="http://schemas.openxmlformats.org/drawingml/2006/main">
+              <a:ext uri="{FF2B5EF4-FFF2-40B4-BE49-F238E27FC236}">
+                <a16:creationId xmlns:a16="http://schemas.microsoft.com/office/drawing/2014/main" id="{F6DF94D3-0A39-450E-BF30-219F3F4ABE74}"/>
+              </a:ext>
+            </a:extLst>
+          </p:cNvPr>
+          <p:cNvSpPr>
+            <a:spLocks xmlns:a="http://schemas.openxmlformats.org/drawingml/2006/main" noGrp="1"/>
+          </p:cNvSpPr>
+          <p:nvPr/>
+        </p:nvSpPr>
+        <p:spPr>
+          <a:xfrm xmlns:a="http://schemas.openxmlformats.org/drawingml/2006/main">
+            <a:off x="819150" y="5524500"/>
+            <a:ext cx="16649700" cy="19050"/>
+          </a:xfrm>
+          <a:prstGeom xmlns:a="http://schemas.openxmlformats.org/drawingml/2006/main" prst="rect">
+            <a:avLst/>
+          </a:prstGeom>
+          <a:solidFill xmlns:a="http://schemas.openxmlformats.org/drawingml/2006/main">
+            <a:srgbClr val="D8D1C8"/>
+          </a:solidFill>
+          <a:ln xmlns:a="http://schemas.openxmlformats.org/drawingml/2006/main" w="0">
+            <a:solidFill>
+              <a:srgbClr val="D8D1C8"/>
+            </a:solidFill>
+            <a:prstDash val="solid"/>
+          </a:ln>
+        </p:spPr>
+      </p:sp>
+      <p:sp>
+        <p:nvSpPr>
+          <p:cNvPr id="21" name="metric-value">
+            <a:extLst xmlns:a="http://schemas.openxmlformats.org/drawingml/2006/main">
+              <a:ext uri="{FF2B5EF4-FFF2-40B4-BE49-F238E27FC236}">
+                <a16:creationId xmlns:a16="http://schemas.microsoft.com/office/drawing/2014/main" id="{DD5D3378-8B7F-46ED-9229-1F40CA43E378}"/>
+              </a:ext>
+            </a:extLst>
+          </p:cNvPr>
+          <p:cNvSpPr>
+            <a:spLocks xmlns:a="http://schemas.openxmlformats.org/drawingml/2006/main" noGrp="1"/>
+          </p:cNvSpPr>
+          <p:nvPr/>
+        </p:nvSpPr>
+        <p:spPr>
+          <a:xfrm xmlns:a="http://schemas.openxmlformats.org/drawingml/2006/main">
+            <a:off x="819150" y="5810250"/>
+            <a:ext cx="3829050" cy="647700"/>
           </a:xfrm>
           <a:prstGeom xmlns:a="http://schemas.openxmlformats.org/drawingml/2006/main" prst="rect">
             <a:avLst/>
@@ -5396,29 +6094,29 @@
                   <a:srgbClr val="246A73"/>
                 </a:solidFill>
               </a:rPr>
-              <a:t>10</a:t>
-            </a:r>
-          </a:p>
-        </p:txBody>
-      </p:sp>
-      <p:sp>
-        <p:nvSpPr>
-          <p:cNvPr id="18" name="metric-label">
-            <a:extLst xmlns:a="http://schemas.openxmlformats.org/drawingml/2006/main">
-              <a:ext uri="{FF2B5EF4-FFF2-40B4-BE49-F238E27FC236}">
-                <a16:creationId xmlns:a16="http://schemas.microsoft.com/office/drawing/2014/main" id="{E1F79792-B4CD-44FA-8401-E206F6C00331}"/>
-              </a:ext>
-            </a:extLst>
-          </p:cNvPr>
-          <p:cNvSpPr>
-            <a:spLocks xmlns:a="http://schemas.openxmlformats.org/drawingml/2006/main" noGrp="1"/>
-          </p:cNvSpPr>
-          <p:nvPr/>
-        </p:nvSpPr>
-        <p:spPr>
-          <a:xfrm xmlns:a="http://schemas.openxmlformats.org/drawingml/2006/main">
-            <a:off x="819150" y="9010650"/>
-            <a:ext cx="5257800" cy="228600"/>
+              <a:t>30</a:t>
+            </a:r>
+          </a:p>
+        </p:txBody>
+      </p:sp>
+      <p:sp>
+        <p:nvSpPr>
+          <p:cNvPr id="22" name="metric-label">
+            <a:extLst xmlns:a="http://schemas.openxmlformats.org/drawingml/2006/main">
+              <a:ext uri="{FF2B5EF4-FFF2-40B4-BE49-F238E27FC236}">
+                <a16:creationId xmlns:a16="http://schemas.microsoft.com/office/drawing/2014/main" id="{F9655888-98C5-410F-803D-2E18711AF937}"/>
+              </a:ext>
+            </a:extLst>
+          </p:cNvPr>
+          <p:cNvSpPr>
+            <a:spLocks xmlns:a="http://schemas.openxmlformats.org/drawingml/2006/main" noGrp="1"/>
+          </p:cNvSpPr>
+          <p:nvPr/>
+        </p:nvSpPr>
+        <p:spPr>
+          <a:xfrm xmlns:a="http://schemas.openxmlformats.org/drawingml/2006/main">
+            <a:off x="819150" y="6534150"/>
+            <a:ext cx="3829050" cy="228600"/>
           </a:xfrm>
           <a:prstGeom xmlns:a="http://schemas.openxmlformats.org/drawingml/2006/main" prst="rect">
             <a:avLst/>
@@ -5448,22 +6146,22 @@
       </p:sp>
       <p:sp>
         <p:nvSpPr>
-          <p:cNvPr id="19" name="metric-value">
-            <a:extLst xmlns:a="http://schemas.openxmlformats.org/drawingml/2006/main">
-              <a:ext uri="{FF2B5EF4-FFF2-40B4-BE49-F238E27FC236}">
-                <a16:creationId xmlns:a16="http://schemas.microsoft.com/office/drawing/2014/main" id="{80196DAC-5366-4380-942A-C6B4B897B5FF}"/>
-              </a:ext>
-            </a:extLst>
-          </p:cNvPr>
-          <p:cNvSpPr>
-            <a:spLocks xmlns:a="http://schemas.openxmlformats.org/drawingml/2006/main" noGrp="1"/>
-          </p:cNvSpPr>
-          <p:nvPr/>
-        </p:nvSpPr>
-        <p:spPr>
-          <a:xfrm xmlns:a="http://schemas.openxmlformats.org/drawingml/2006/main">
-            <a:off x="6515100" y="8286750"/>
-            <a:ext cx="5257800" cy="647700"/>
+          <p:cNvPr id="23" name="metric-value">
+            <a:extLst xmlns:a="http://schemas.openxmlformats.org/drawingml/2006/main">
+              <a:ext uri="{FF2B5EF4-FFF2-40B4-BE49-F238E27FC236}">
+                <a16:creationId xmlns:a16="http://schemas.microsoft.com/office/drawing/2014/main" id="{045B97FD-592C-498B-900F-5CDE1FB781CD}"/>
+              </a:ext>
+            </a:extLst>
+          </p:cNvPr>
+          <p:cNvSpPr>
+            <a:spLocks xmlns:a="http://schemas.openxmlformats.org/drawingml/2006/main" noGrp="1"/>
+          </p:cNvSpPr>
+          <p:nvPr/>
+        </p:nvSpPr>
+        <p:spPr>
+          <a:xfrm xmlns:a="http://schemas.openxmlformats.org/drawingml/2006/main">
+            <a:off x="5086350" y="5810250"/>
+            <a:ext cx="3829050" cy="647700"/>
           </a:xfrm>
           <a:prstGeom xmlns:a="http://schemas.openxmlformats.org/drawingml/2006/main" prst="rect">
             <a:avLst/>
@@ -5493,22 +6191,22 @@
       </p:sp>
       <p:sp>
         <p:nvSpPr>
-          <p:cNvPr id="20" name="metric-label">
-            <a:extLst xmlns:a="http://schemas.openxmlformats.org/drawingml/2006/main">
-              <a:ext uri="{FF2B5EF4-FFF2-40B4-BE49-F238E27FC236}">
-                <a16:creationId xmlns:a16="http://schemas.microsoft.com/office/drawing/2014/main" id="{78A704EC-5592-47A9-AACB-751CCBB3D98C}"/>
-              </a:ext>
-            </a:extLst>
-          </p:cNvPr>
-          <p:cNvSpPr>
-            <a:spLocks xmlns:a="http://schemas.openxmlformats.org/drawingml/2006/main" noGrp="1"/>
-          </p:cNvSpPr>
-          <p:nvPr/>
-        </p:nvSpPr>
-        <p:spPr>
-          <a:xfrm xmlns:a="http://schemas.openxmlformats.org/drawingml/2006/main">
-            <a:off x="6515100" y="9010650"/>
-            <a:ext cx="5257800" cy="228600"/>
+          <p:cNvPr id="24" name="metric-label">
+            <a:extLst xmlns:a="http://schemas.openxmlformats.org/drawingml/2006/main">
+              <a:ext uri="{FF2B5EF4-FFF2-40B4-BE49-F238E27FC236}">
+                <a16:creationId xmlns:a16="http://schemas.microsoft.com/office/drawing/2014/main" id="{71211C06-6A4D-4C3B-A08D-EEE2FC63FD07}"/>
+              </a:ext>
+            </a:extLst>
+          </p:cNvPr>
+          <p:cNvSpPr>
+            <a:spLocks xmlns:a="http://schemas.openxmlformats.org/drawingml/2006/main" noGrp="1"/>
+          </p:cNvSpPr>
+          <p:nvPr/>
+        </p:nvSpPr>
+        <p:spPr>
+          <a:xfrm xmlns:a="http://schemas.openxmlformats.org/drawingml/2006/main">
+            <a:off x="5086350" y="6534150"/>
+            <a:ext cx="3829050" cy="228600"/>
           </a:xfrm>
           <a:prstGeom xmlns:a="http://schemas.openxmlformats.org/drawingml/2006/main" prst="rect">
             <a:avLst/>
@@ -5538,22 +6236,22 @@
       </p:sp>
       <p:sp>
         <p:nvSpPr>
-          <p:cNvPr id="21" name="metric-value">
-            <a:extLst xmlns:a="http://schemas.openxmlformats.org/drawingml/2006/main">
-              <a:ext uri="{FF2B5EF4-FFF2-40B4-BE49-F238E27FC236}">
-                <a16:creationId xmlns:a16="http://schemas.microsoft.com/office/drawing/2014/main" id="{B4A4F015-34B5-4753-A6CF-F3582D9B49CE}"/>
-              </a:ext>
-            </a:extLst>
-          </p:cNvPr>
-          <p:cNvSpPr>
-            <a:spLocks xmlns:a="http://schemas.openxmlformats.org/drawingml/2006/main" noGrp="1"/>
-          </p:cNvSpPr>
-          <p:nvPr/>
-        </p:nvSpPr>
-        <p:spPr>
-          <a:xfrm xmlns:a="http://schemas.openxmlformats.org/drawingml/2006/main">
-            <a:off x="12211050" y="8286750"/>
-            <a:ext cx="5257800" cy="647700"/>
+          <p:cNvPr id="25" name="metric-value">
+            <a:extLst xmlns:a="http://schemas.openxmlformats.org/drawingml/2006/main">
+              <a:ext uri="{FF2B5EF4-FFF2-40B4-BE49-F238E27FC236}">
+                <a16:creationId xmlns:a16="http://schemas.microsoft.com/office/drawing/2014/main" id="{F2453F1D-DE99-4FC8-811E-92B07E336908}"/>
+              </a:ext>
+            </a:extLst>
+          </p:cNvPr>
+          <p:cNvSpPr>
+            <a:spLocks xmlns:a="http://schemas.openxmlformats.org/drawingml/2006/main" noGrp="1"/>
+          </p:cNvSpPr>
+          <p:nvPr/>
+        </p:nvSpPr>
+        <p:spPr>
+          <a:xfrm xmlns:a="http://schemas.openxmlformats.org/drawingml/2006/main">
+            <a:off x="9372600" y="5810250"/>
+            <a:ext cx="3829050" cy="647700"/>
           </a:xfrm>
           <a:prstGeom xmlns:a="http://schemas.openxmlformats.org/drawingml/2006/main" prst="rect">
             <a:avLst/>
@@ -5566,6 +6264,96 @@
             <a:pPr>
               <a:defRPr sz="4200" b="1">
                 <a:solidFill>
+                  <a:srgbClr val="D19A3A"/>
+                </a:solidFill>
+              </a:defRPr>
+            </a:pPr>
+            <a:r>
+              <a:rPr sz="4200" b="1">
+                <a:solidFill>
+                  <a:srgbClr val="D19A3A"/>
+                </a:solidFill>
+              </a:rPr>
+              <a:t>~10k evals</a:t>
+            </a:r>
+          </a:p>
+        </p:txBody>
+      </p:sp>
+      <p:sp>
+        <p:nvSpPr>
+          <p:cNvPr id="26" name="metric-label">
+            <a:extLst xmlns:a="http://schemas.openxmlformats.org/drawingml/2006/main">
+              <a:ext uri="{FF2B5EF4-FFF2-40B4-BE49-F238E27FC236}">
+                <a16:creationId xmlns:a16="http://schemas.microsoft.com/office/drawing/2014/main" id="{A98E161E-E78C-4DA8-88A0-554DF4818A2F}"/>
+              </a:ext>
+            </a:extLst>
+          </p:cNvPr>
+          <p:cNvSpPr>
+            <a:spLocks xmlns:a="http://schemas.openxmlformats.org/drawingml/2006/main" noGrp="1"/>
+          </p:cNvSpPr>
+          <p:nvPr/>
+        </p:nvSpPr>
+        <p:spPr>
+          <a:xfrm xmlns:a="http://schemas.openxmlformats.org/drawingml/2006/main">
+            <a:off x="9372600" y="6534150"/>
+            <a:ext cx="3829050" cy="228600"/>
+          </a:xfrm>
+          <a:prstGeom xmlns:a="http://schemas.openxmlformats.org/drawingml/2006/main" prst="rect">
+            <a:avLst/>
+          </a:prstGeom>
+        </p:spPr>
+        <p:txBody>
+          <a:bodyPr xmlns:a="http://schemas.openxmlformats.org/drawingml/2006/main" lIns="0" tIns="0" rIns="0" bIns="0"/>
+          <a:lstStyle xmlns:a="http://schemas.openxmlformats.org/drawingml/2006/main"/>
+          <a:p xmlns:a="http://schemas.openxmlformats.org/drawingml/2006/main">
+            <a:pPr>
+              <a:defRPr sz="1500">
+                <a:solidFill>
+                  <a:srgbClr val="5F6368"/>
+                </a:solidFill>
+              </a:defRPr>
+            </a:pPr>
+            <a:r>
+              <a:rPr sz="1500">
+                <a:solidFill>
+                  <a:srgbClr val="5F6368"/>
+                </a:solidFill>
+              </a:rPr>
+              <a:t>per-run budget</a:t>
+            </a:r>
+          </a:p>
+        </p:txBody>
+      </p:sp>
+      <p:sp>
+        <p:nvSpPr>
+          <p:cNvPr id="27" name="metric-value">
+            <a:extLst xmlns:a="http://schemas.openxmlformats.org/drawingml/2006/main">
+              <a:ext uri="{FF2B5EF4-FFF2-40B4-BE49-F238E27FC236}">
+                <a16:creationId xmlns:a16="http://schemas.microsoft.com/office/drawing/2014/main" id="{20B701D6-BCCD-4EAF-B46A-CCFD5F8BEE5B}"/>
+              </a:ext>
+            </a:extLst>
+          </p:cNvPr>
+          <p:cNvSpPr>
+            <a:spLocks xmlns:a="http://schemas.openxmlformats.org/drawingml/2006/main" noGrp="1"/>
+          </p:cNvSpPr>
+          <p:nvPr/>
+        </p:nvSpPr>
+        <p:spPr>
+          <a:xfrm xmlns:a="http://schemas.openxmlformats.org/drawingml/2006/main">
+            <a:off x="13639800" y="5810250"/>
+            <a:ext cx="3829050" cy="647700"/>
+          </a:xfrm>
+          <a:prstGeom xmlns:a="http://schemas.openxmlformats.org/drawingml/2006/main" prst="rect">
+            <a:avLst/>
+          </a:prstGeom>
+        </p:spPr>
+        <p:txBody>
+          <a:bodyPr xmlns:a="http://schemas.openxmlformats.org/drawingml/2006/main" lIns="0" tIns="0" rIns="0" bIns="0"/>
+          <a:lstStyle xmlns:a="http://schemas.openxmlformats.org/drawingml/2006/main"/>
+          <a:p xmlns:a="http://schemas.openxmlformats.org/drawingml/2006/main">
+            <a:pPr>
+              <a:defRPr sz="4200" b="1">
+                <a:solidFill>
                   <a:srgbClr val="6B5CA5"/>
                 </a:solidFill>
               </a:defRPr>
@@ -5583,22 +6371,22 @@
       </p:sp>
       <p:sp>
         <p:nvSpPr>
-          <p:cNvPr id="22" name="metric-label">
-            <a:extLst xmlns:a="http://schemas.openxmlformats.org/drawingml/2006/main">
-              <a:ext uri="{FF2B5EF4-FFF2-40B4-BE49-F238E27FC236}">
-                <a16:creationId xmlns:a16="http://schemas.microsoft.com/office/drawing/2014/main" id="{F3EB2EC9-5A1E-4632-8070-B8D393C5F0FD}"/>
-              </a:ext>
-            </a:extLst>
-          </p:cNvPr>
-          <p:cNvSpPr>
-            <a:spLocks xmlns:a="http://schemas.openxmlformats.org/drawingml/2006/main" noGrp="1"/>
-          </p:cNvSpPr>
-          <p:nvPr/>
-        </p:nvSpPr>
-        <p:spPr>
-          <a:xfrm xmlns:a="http://schemas.openxmlformats.org/drawingml/2006/main">
-            <a:off x="12211050" y="9010650"/>
-            <a:ext cx="5257800" cy="228600"/>
+          <p:cNvPr id="28" name="metric-label">
+            <a:extLst xmlns:a="http://schemas.openxmlformats.org/drawingml/2006/main">
+              <a:ext uri="{FF2B5EF4-FFF2-40B4-BE49-F238E27FC236}">
+                <a16:creationId xmlns:a16="http://schemas.microsoft.com/office/drawing/2014/main" id="{B678CB74-EA25-4FE9-865C-1DA051475C50}"/>
+              </a:ext>
+            </a:extLst>
+          </p:cNvPr>
+          <p:cNvSpPr>
+            <a:spLocks xmlns:a="http://schemas.openxmlformats.org/drawingml/2006/main" noGrp="1"/>
+          </p:cNvSpPr>
+          <p:nvPr/>
+        </p:nvSpPr>
+        <p:spPr>
+          <a:xfrm xmlns:a="http://schemas.openxmlformats.org/drawingml/2006/main">
+            <a:off x="13639800" y="6534150"/>
+            <a:ext cx="3829050" cy="228600"/>
           </a:xfrm>
           <a:prstGeom xmlns:a="http://schemas.openxmlformats.org/drawingml/2006/main" prst="rect">
             <a:avLst/>
@@ -5628,21 +6416,21 @@
       </p:sp>
       <p:sp>
         <p:nvSpPr>
-          <p:cNvPr id="23" name="source-footer">
-            <a:extLst xmlns:a="http://schemas.openxmlformats.org/drawingml/2006/main">
-              <a:ext uri="{FF2B5EF4-FFF2-40B4-BE49-F238E27FC236}">
-                <a16:creationId xmlns:a16="http://schemas.microsoft.com/office/drawing/2014/main" id="{0E6086FA-C3C4-4D0A-8816-43754FDB3CF7}"/>
-              </a:ext>
-            </a:extLst>
-          </p:cNvPr>
-          <p:cNvSpPr>
-            <a:spLocks xmlns:a="http://schemas.openxmlformats.org/drawingml/2006/main" noGrp="1"/>
-          </p:cNvSpPr>
-          <p:nvPr/>
-        </p:nvSpPr>
-        <p:spPr>
-          <a:xfrm xmlns:a="http://schemas.openxmlformats.org/drawingml/2006/main">
-            <a:off x="819150" y="9505950"/>
+          <p:cNvPr id="29" name="source-footer">
+            <a:extLst xmlns:a="http://schemas.openxmlformats.org/drawingml/2006/main">
+              <a:ext uri="{FF2B5EF4-FFF2-40B4-BE49-F238E27FC236}">
+                <a16:creationId xmlns:a16="http://schemas.microsoft.com/office/drawing/2014/main" id="{F06F528E-6D39-4633-8BB8-15E7B74540BF}"/>
+              </a:ext>
+            </a:extLst>
+          </p:cNvPr>
+          <p:cNvSpPr>
+            <a:spLocks xmlns:a="http://schemas.openxmlformats.org/drawingml/2006/main" noGrp="1"/>
+          </p:cNvSpPr>
+          <p:nvPr/>
+        </p:nvSpPr>
+        <p:spPr>
+          <a:xfrm xmlns:a="http://schemas.openxmlformats.org/drawingml/2006/main">
+            <a:off x="819150" y="7029450"/>
             <a:ext cx="16649700" cy="171450"/>
           </a:xfrm>
           <a:prstGeom xmlns:a="http://schemas.openxmlformats.org/drawingml/2006/main" prst="rect">
@@ -5674,7 +6462,7 @@
     </p:spTree>
     <p:extLst>
       <p:ext uri="{BB962C8B-B14F-4D97-AF65-F5344CB8AC3E}">
-        <p14:creationId xmlns:p14="http://schemas.microsoft.com/office/powerpoint/2010/main" val="1234986532"/>
+        <p14:creationId xmlns:p14="http://schemas.microsoft.com/office/powerpoint/2010/main" val="889039497"/>
       </p:ext>
     </p:extLst>
   </p:cSld>
@@ -5698,7 +6486,7 @@
           <p:cNvPr id="1" name="slide-background">
             <a:extLst xmlns:a="http://schemas.openxmlformats.org/drawingml/2006/main">
               <a:ext uri="{FF2B5EF4-FFF2-40B4-BE49-F238E27FC236}">
-                <a16:creationId xmlns:a16="http://schemas.microsoft.com/office/drawing/2014/main" id="{86BF9F4F-B753-4ACC-B9C6-F18B8B3A0B90}"/>
+                <a16:creationId xmlns:a16="http://schemas.microsoft.com/office/drawing/2014/main" id="{502F40FF-F0FA-40BB-A3D9-F895AF02A185}"/>
               </a:ext>
             </a:extLst>
           </p:cNvPr>
@@ -5725,7 +6513,7 @@
           <p:cNvPr id="2" name="kicker">
             <a:extLst xmlns:a="http://schemas.openxmlformats.org/drawingml/2006/main">
               <a:ext uri="{FF2B5EF4-FFF2-40B4-BE49-F238E27FC236}">
-                <a16:creationId xmlns:a16="http://schemas.microsoft.com/office/drawing/2014/main" id="{B3185F47-899A-4559-9981-552B57F9F7D5}"/>
+                <a16:creationId xmlns:a16="http://schemas.microsoft.com/office/drawing/2014/main" id="{10C1BD38-C1BA-4C5F-AECB-715F88CE2A03}"/>
               </a:ext>
             </a:extLst>
           </p:cNvPr>
@@ -5770,7 +6558,7 @@
           <p:cNvPr id="3" name="slide-title">
             <a:extLst xmlns:a="http://schemas.openxmlformats.org/drawingml/2006/main">
               <a:ext uri="{FF2B5EF4-FFF2-40B4-BE49-F238E27FC236}">
-                <a16:creationId xmlns:a16="http://schemas.microsoft.com/office/drawing/2014/main" id="{D9954F7D-4233-44D1-850F-E772B5216293}"/>
+                <a16:creationId xmlns:a16="http://schemas.microsoft.com/office/drawing/2014/main" id="{56297C74-B73D-4160-BC34-3459237C51DC}"/>
               </a:ext>
             </a:extLst>
           </p:cNvPr>
@@ -5815,7 +6603,7 @@
           <p:cNvPr id="4" name="slide-subtitle">
             <a:extLst xmlns:a="http://schemas.openxmlformats.org/drawingml/2006/main">
               <a:ext uri="{FF2B5EF4-FFF2-40B4-BE49-F238E27FC236}">
-                <a16:creationId xmlns:a16="http://schemas.microsoft.com/office/drawing/2014/main" id="{863C9D36-28F7-4ED2-B5B8-8495FB6BB4CA}"/>
+                <a16:creationId xmlns:a16="http://schemas.microsoft.com/office/drawing/2014/main" id="{E4AF76E7-4DAC-4F1E-B70B-25A32D216262}"/>
               </a:ext>
             </a:extLst>
           </p:cNvPr>
@@ -5827,7 +6615,7 @@
         <p:spPr>
           <a:xfrm xmlns:a="http://schemas.openxmlformats.org/drawingml/2006/main">
             <a:off x="819150" y="1771650"/>
-            <a:ext cx="11391900" cy="628650"/>
+            <a:ext cx="10668000" cy="323850"/>
           </a:xfrm>
           <a:prstGeom xmlns:a="http://schemas.openxmlformats.org/drawingml/2006/main" prst="rect">
             <a:avLst/>
@@ -5850,7 +6638,7 @@
                   <a:srgbClr val="5F6368"/>
                 </a:solidFill>
               </a:rPr>
-              <a:t>The table reports the best CS setting by average performance, compared with Random Search using the same evaluation budget.</a:t>
+              <a:t>Best CS setting by average performance over 30 runs; lower objective value and smaller gap are better.</a:t>
             </a:r>
           </a:p>
         </p:txBody>
@@ -5860,7 +6648,232 @@
           <p:cNvPr id="5" name="table-cell-0">
             <a:extLst xmlns:a="http://schemas.openxmlformats.org/drawingml/2006/main">
               <a:ext uri="{FF2B5EF4-FFF2-40B4-BE49-F238E27FC236}">
-                <a16:creationId xmlns:a16="http://schemas.microsoft.com/office/drawing/2014/main" id="{16CBFD2B-DC42-4E7F-AC02-CD152668E226}"/>
+                <a16:creationId xmlns:a16="http://schemas.microsoft.com/office/drawing/2014/main" id="{8E01A6C7-DA01-48F9-B2EE-8813BF7C1792}"/>
+              </a:ext>
+            </a:extLst>
+          </p:cNvPr>
+          <p:cNvSpPr>
+            <a:spLocks xmlns:a="http://schemas.openxmlformats.org/drawingml/2006/main" noGrp="1"/>
+          </p:cNvSpPr>
+          <p:nvPr/>
+        </p:nvSpPr>
+        <p:spPr>
+          <a:xfrm xmlns:a="http://schemas.openxmlformats.org/drawingml/2006/main">
+            <a:off x="819150" y="2438400"/>
+            <a:ext cx="3009900" cy="209550"/>
+          </a:xfrm>
+          <a:prstGeom xmlns:a="http://schemas.openxmlformats.org/drawingml/2006/main" prst="rect">
+            <a:avLst/>
+          </a:prstGeom>
+        </p:spPr>
+        <p:txBody>
+          <a:bodyPr xmlns:a="http://schemas.openxmlformats.org/drawingml/2006/main" lIns="0" tIns="0" rIns="0" bIns="0"/>
+          <a:lstStyle xmlns:a="http://schemas.openxmlformats.org/drawingml/2006/main"/>
+          <a:p xmlns:a="http://schemas.openxmlformats.org/drawingml/2006/main">
+            <a:pPr>
+              <a:defRPr sz="1350" b="1">
+                <a:solidFill>
+                  <a:srgbClr val="246A73"/>
+                </a:solidFill>
+              </a:defRPr>
+            </a:pPr>
+            <a:r>
+              <a:rPr sz="1350" b="1">
+                <a:solidFill>
+                  <a:srgbClr val="246A73"/>
+                </a:solidFill>
+              </a:rPr>
+              <a:t>Benchmark</a:t>
+            </a:r>
+          </a:p>
+        </p:txBody>
+      </p:sp>
+      <p:sp>
+        <p:nvSpPr>
+          <p:cNvPr id="6" name="table-cell-1">
+            <a:extLst xmlns:a="http://schemas.openxmlformats.org/drawingml/2006/main">
+              <a:ext uri="{FF2B5EF4-FFF2-40B4-BE49-F238E27FC236}">
+                <a16:creationId xmlns:a16="http://schemas.microsoft.com/office/drawing/2014/main" id="{1B662E6E-65B6-4D45-B44F-6B25D02F6B1D}"/>
+              </a:ext>
+            </a:extLst>
+          </p:cNvPr>
+          <p:cNvSpPr>
+            <a:spLocks xmlns:a="http://schemas.openxmlformats.org/drawingml/2006/main" noGrp="1"/>
+          </p:cNvSpPr>
+          <p:nvPr/>
+        </p:nvSpPr>
+        <p:spPr>
+          <a:xfrm xmlns:a="http://schemas.openxmlformats.org/drawingml/2006/main">
+            <a:off x="4038600" y="2438400"/>
+            <a:ext cx="3886200" cy="209550"/>
+          </a:xfrm>
+          <a:prstGeom xmlns:a="http://schemas.openxmlformats.org/drawingml/2006/main" prst="rect">
+            <a:avLst/>
+          </a:prstGeom>
+        </p:spPr>
+        <p:txBody>
+          <a:bodyPr xmlns:a="http://schemas.openxmlformats.org/drawingml/2006/main" lIns="0" tIns="0" rIns="0" bIns="0"/>
+          <a:lstStyle xmlns:a="http://schemas.openxmlformats.org/drawingml/2006/main"/>
+          <a:p xmlns:a="http://schemas.openxmlformats.org/drawingml/2006/main">
+            <a:pPr>
+              <a:defRPr sz="1350" b="1">
+                <a:solidFill>
+                  <a:srgbClr val="246A73"/>
+                </a:solidFill>
+              </a:defRPr>
+            </a:pPr>
+            <a:r>
+              <a:rPr sz="1350" b="1">
+                <a:solidFill>
+                  <a:srgbClr val="246A73"/>
+                </a:solidFill>
+              </a:rPr>
+              <a:t>Best CS avg +/- std</a:t>
+            </a:r>
+          </a:p>
+        </p:txBody>
+      </p:sp>
+      <p:sp>
+        <p:nvSpPr>
+          <p:cNvPr id="7" name="table-cell-2">
+            <a:extLst xmlns:a="http://schemas.openxmlformats.org/drawingml/2006/main">
+              <a:ext uri="{FF2B5EF4-FFF2-40B4-BE49-F238E27FC236}">
+                <a16:creationId xmlns:a16="http://schemas.microsoft.com/office/drawing/2014/main" id="{4F212DF0-8E69-42A4-A172-4053464F81F4}"/>
+              </a:ext>
+            </a:extLst>
+          </p:cNvPr>
+          <p:cNvSpPr>
+            <a:spLocks xmlns:a="http://schemas.openxmlformats.org/drawingml/2006/main" noGrp="1"/>
+          </p:cNvSpPr>
+          <p:nvPr/>
+        </p:nvSpPr>
+        <p:spPr>
+          <a:xfrm xmlns:a="http://schemas.openxmlformats.org/drawingml/2006/main">
+            <a:off x="8134350" y="2438400"/>
+            <a:ext cx="3543300" cy="209550"/>
+          </a:xfrm>
+          <a:prstGeom xmlns:a="http://schemas.openxmlformats.org/drawingml/2006/main" prst="rect">
+            <a:avLst/>
+          </a:prstGeom>
+        </p:spPr>
+        <p:txBody>
+          <a:bodyPr xmlns:a="http://schemas.openxmlformats.org/drawingml/2006/main" lIns="0" tIns="0" rIns="0" bIns="0"/>
+          <a:lstStyle xmlns:a="http://schemas.openxmlformats.org/drawingml/2006/main"/>
+          <a:p xmlns:a="http://schemas.openxmlformats.org/drawingml/2006/main">
+            <a:pPr>
+              <a:defRPr sz="1350" b="1">
+                <a:solidFill>
+                  <a:srgbClr val="246A73"/>
+                </a:solidFill>
+              </a:defRPr>
+            </a:pPr>
+            <a:r>
+              <a:rPr sz="1350" b="1">
+                <a:solidFill>
+                  <a:srgbClr val="246A73"/>
+                </a:solidFill>
+              </a:rPr>
+              <a:t>Random avg</a:t>
+            </a:r>
+          </a:p>
+        </p:txBody>
+      </p:sp>
+      <p:sp>
+        <p:nvSpPr>
+          <p:cNvPr id="8" name="table-cell-3">
+            <a:extLst xmlns:a="http://schemas.openxmlformats.org/drawingml/2006/main">
+              <a:ext uri="{FF2B5EF4-FFF2-40B4-BE49-F238E27FC236}">
+                <a16:creationId xmlns:a16="http://schemas.microsoft.com/office/drawing/2014/main" id="{61668417-D764-489E-A7E4-9ECEE897E1F4}"/>
+              </a:ext>
+            </a:extLst>
+          </p:cNvPr>
+          <p:cNvSpPr>
+            <a:spLocks xmlns:a="http://schemas.openxmlformats.org/drawingml/2006/main" noGrp="1"/>
+          </p:cNvSpPr>
+          <p:nvPr/>
+        </p:nvSpPr>
+        <p:spPr>
+          <a:xfrm xmlns:a="http://schemas.openxmlformats.org/drawingml/2006/main">
+            <a:off x="11887200" y="2438400"/>
+            <a:ext cx="2762250" cy="209550"/>
+          </a:xfrm>
+          <a:prstGeom xmlns:a="http://schemas.openxmlformats.org/drawingml/2006/main" prst="rect">
+            <a:avLst/>
+          </a:prstGeom>
+        </p:spPr>
+        <p:txBody>
+          <a:bodyPr xmlns:a="http://schemas.openxmlformats.org/drawingml/2006/main" lIns="0" tIns="0" rIns="0" bIns="0"/>
+          <a:lstStyle xmlns:a="http://schemas.openxmlformats.org/drawingml/2006/main"/>
+          <a:p xmlns:a="http://schemas.openxmlformats.org/drawingml/2006/main">
+            <a:pPr>
+              <a:defRPr sz="1350" b="1">
+                <a:solidFill>
+                  <a:srgbClr val="246A73"/>
+                </a:solidFill>
+              </a:defRPr>
+            </a:pPr>
+            <a:r>
+              <a:rPr sz="1350" b="1">
+                <a:solidFill>
+                  <a:srgbClr val="246A73"/>
+                </a:solidFill>
+              </a:rPr>
+              <a:t>Gap</a:t>
+            </a:r>
+          </a:p>
+        </p:txBody>
+      </p:sp>
+      <p:sp>
+        <p:nvSpPr>
+          <p:cNvPr id="9" name="table-cell-4">
+            <a:extLst xmlns:a="http://schemas.openxmlformats.org/drawingml/2006/main">
+              <a:ext uri="{FF2B5EF4-FFF2-40B4-BE49-F238E27FC236}">
+                <a16:creationId xmlns:a16="http://schemas.microsoft.com/office/drawing/2014/main" id="{6C336D8A-CD04-47A6-A53D-BDB3644224AA}"/>
+              </a:ext>
+            </a:extLst>
+          </p:cNvPr>
+          <p:cNvSpPr>
+            <a:spLocks xmlns:a="http://schemas.openxmlformats.org/drawingml/2006/main" noGrp="1"/>
+          </p:cNvSpPr>
+          <p:nvPr/>
+        </p:nvSpPr>
+        <p:spPr>
+          <a:xfrm xmlns:a="http://schemas.openxmlformats.org/drawingml/2006/main">
+            <a:off x="14859000" y="2438400"/>
+            <a:ext cx="2609850" cy="209550"/>
+          </a:xfrm>
+          <a:prstGeom xmlns:a="http://schemas.openxmlformats.org/drawingml/2006/main" prst="rect">
+            <a:avLst/>
+          </a:prstGeom>
+        </p:spPr>
+        <p:txBody>
+          <a:bodyPr xmlns:a="http://schemas.openxmlformats.org/drawingml/2006/main" lIns="0" tIns="0" rIns="0" bIns="0"/>
+          <a:lstStyle xmlns:a="http://schemas.openxmlformats.org/drawingml/2006/main"/>
+          <a:p xmlns:a="http://schemas.openxmlformats.org/drawingml/2006/main">
+            <a:pPr>
+              <a:defRPr sz="1350" b="1">
+                <a:solidFill>
+                  <a:srgbClr val="246A73"/>
+                </a:solidFill>
+              </a:defRPr>
+            </a:pPr>
+            <a:r>
+              <a:rPr sz="1350" b="1">
+                <a:solidFill>
+                  <a:srgbClr val="246A73"/>
+                </a:solidFill>
+              </a:rPr>
+              <a:t>Wins</a:t>
+            </a:r>
+          </a:p>
+        </p:txBody>
+      </p:sp>
+      <p:sp>
+        <p:nvSpPr>
+          <p:cNvPr id="10" name="table-rule">
+            <a:extLst xmlns:a="http://schemas.openxmlformats.org/drawingml/2006/main">
+              <a:ext uri="{FF2B5EF4-FFF2-40B4-BE49-F238E27FC236}">
+                <a16:creationId xmlns:a16="http://schemas.microsoft.com/office/drawing/2014/main" id="{657257E5-374E-4BDE-B56E-30AE3EE28049}"/>
               </a:ext>
             </a:extLst>
           </p:cNvPr>
@@ -5872,186 +6885,6 @@
         <p:spPr>
           <a:xfrm xmlns:a="http://schemas.openxmlformats.org/drawingml/2006/main">
             <a:off x="819150" y="2743200"/>
-            <a:ext cx="3467100" cy="228600"/>
-          </a:xfrm>
-          <a:prstGeom xmlns:a="http://schemas.openxmlformats.org/drawingml/2006/main" prst="rect">
-            <a:avLst/>
-          </a:prstGeom>
-        </p:spPr>
-        <p:txBody>
-          <a:bodyPr xmlns:a="http://schemas.openxmlformats.org/drawingml/2006/main" lIns="0" tIns="0" rIns="0" bIns="0"/>
-          <a:lstStyle xmlns:a="http://schemas.openxmlformats.org/drawingml/2006/main"/>
-          <a:p xmlns:a="http://schemas.openxmlformats.org/drawingml/2006/main">
-            <a:pPr>
-              <a:defRPr sz="1425" b="1">
-                <a:solidFill>
-                  <a:srgbClr val="246A73"/>
-                </a:solidFill>
-              </a:defRPr>
-            </a:pPr>
-            <a:r>
-              <a:rPr sz="1425" b="1">
-                <a:solidFill>
-                  <a:srgbClr val="246A73"/>
-                </a:solidFill>
-              </a:rPr>
-              <a:t>Benchmark</a:t>
-            </a:r>
-          </a:p>
-        </p:txBody>
-      </p:sp>
-      <p:sp>
-        <p:nvSpPr>
-          <p:cNvPr id="6" name="table-cell-1">
-            <a:extLst xmlns:a="http://schemas.openxmlformats.org/drawingml/2006/main">
-              <a:ext uri="{FF2B5EF4-FFF2-40B4-BE49-F238E27FC236}">
-                <a16:creationId xmlns:a16="http://schemas.microsoft.com/office/drawing/2014/main" id="{031D9D82-F19C-4692-9417-1318664F2033}"/>
-              </a:ext>
-            </a:extLst>
-          </p:cNvPr>
-          <p:cNvSpPr>
-            <a:spLocks xmlns:a="http://schemas.openxmlformats.org/drawingml/2006/main" noGrp="1"/>
-          </p:cNvSpPr>
-          <p:nvPr/>
-        </p:nvSpPr>
-        <p:spPr>
-          <a:xfrm xmlns:a="http://schemas.openxmlformats.org/drawingml/2006/main">
-            <a:off x="4495800" y="2743200"/>
-            <a:ext cx="3829050" cy="228600"/>
-          </a:xfrm>
-          <a:prstGeom xmlns:a="http://schemas.openxmlformats.org/drawingml/2006/main" prst="rect">
-            <a:avLst/>
-          </a:prstGeom>
-        </p:spPr>
-        <p:txBody>
-          <a:bodyPr xmlns:a="http://schemas.openxmlformats.org/drawingml/2006/main" lIns="0" tIns="0" rIns="0" bIns="0"/>
-          <a:lstStyle xmlns:a="http://schemas.openxmlformats.org/drawingml/2006/main"/>
-          <a:p xmlns:a="http://schemas.openxmlformats.org/drawingml/2006/main">
-            <a:pPr>
-              <a:defRPr sz="1425" b="1">
-                <a:solidFill>
-                  <a:srgbClr val="246A73"/>
-                </a:solidFill>
-              </a:defRPr>
-            </a:pPr>
-            <a:r>
-              <a:rPr sz="1425" b="1">
-                <a:solidFill>
-                  <a:srgbClr val="246A73"/>
-                </a:solidFill>
-              </a:rPr>
-              <a:t>Best CS avg</a:t>
-            </a:r>
-          </a:p>
-        </p:txBody>
-      </p:sp>
-      <p:sp>
-        <p:nvSpPr>
-          <p:cNvPr id="7" name="table-cell-2">
-            <a:extLst xmlns:a="http://schemas.openxmlformats.org/drawingml/2006/main">
-              <a:ext uri="{FF2B5EF4-FFF2-40B4-BE49-F238E27FC236}">
-                <a16:creationId xmlns:a16="http://schemas.microsoft.com/office/drawing/2014/main" id="{37E9D77E-60CE-4BE2-B760-EDF075AB4F32}"/>
-              </a:ext>
-            </a:extLst>
-          </p:cNvPr>
-          <p:cNvSpPr>
-            <a:spLocks xmlns:a="http://schemas.openxmlformats.org/drawingml/2006/main" noGrp="1"/>
-          </p:cNvSpPr>
-          <p:nvPr/>
-        </p:nvSpPr>
-        <p:spPr>
-          <a:xfrm xmlns:a="http://schemas.openxmlformats.org/drawingml/2006/main">
-            <a:off x="8515350" y="2743200"/>
-            <a:ext cx="3638550" cy="228600"/>
-          </a:xfrm>
-          <a:prstGeom xmlns:a="http://schemas.openxmlformats.org/drawingml/2006/main" prst="rect">
-            <a:avLst/>
-          </a:prstGeom>
-        </p:spPr>
-        <p:txBody>
-          <a:bodyPr xmlns:a="http://schemas.openxmlformats.org/drawingml/2006/main" lIns="0" tIns="0" rIns="0" bIns="0"/>
-          <a:lstStyle xmlns:a="http://schemas.openxmlformats.org/drawingml/2006/main"/>
-          <a:p xmlns:a="http://schemas.openxmlformats.org/drawingml/2006/main">
-            <a:pPr>
-              <a:defRPr sz="1425" b="1">
-                <a:solidFill>
-                  <a:srgbClr val="246A73"/>
-                </a:solidFill>
-              </a:defRPr>
-            </a:pPr>
-            <a:r>
-              <a:rPr sz="1425" b="1">
-                <a:solidFill>
-                  <a:srgbClr val="246A73"/>
-                </a:solidFill>
-              </a:rPr>
-              <a:t>Random avg</a:t>
-            </a:r>
-          </a:p>
-        </p:txBody>
-      </p:sp>
-      <p:sp>
-        <p:nvSpPr>
-          <p:cNvPr id="8" name="table-cell-3">
-            <a:extLst xmlns:a="http://schemas.openxmlformats.org/drawingml/2006/main">
-              <a:ext uri="{FF2B5EF4-FFF2-40B4-BE49-F238E27FC236}">
-                <a16:creationId xmlns:a16="http://schemas.microsoft.com/office/drawing/2014/main" id="{EF99E960-3F32-4470-9FCB-1884F812E13C}"/>
-              </a:ext>
-            </a:extLst>
-          </p:cNvPr>
-          <p:cNvSpPr>
-            <a:spLocks xmlns:a="http://schemas.openxmlformats.org/drawingml/2006/main" noGrp="1"/>
-          </p:cNvSpPr>
-          <p:nvPr/>
-        </p:nvSpPr>
-        <p:spPr>
-          <a:xfrm xmlns:a="http://schemas.openxmlformats.org/drawingml/2006/main">
-            <a:off x="12363450" y="2743200"/>
-            <a:ext cx="5105400" cy="228600"/>
-          </a:xfrm>
-          <a:prstGeom xmlns:a="http://schemas.openxmlformats.org/drawingml/2006/main" prst="rect">
-            <a:avLst/>
-          </a:prstGeom>
-        </p:spPr>
-        <p:txBody>
-          <a:bodyPr xmlns:a="http://schemas.openxmlformats.org/drawingml/2006/main" lIns="0" tIns="0" rIns="0" bIns="0"/>
-          <a:lstStyle xmlns:a="http://schemas.openxmlformats.org/drawingml/2006/main"/>
-          <a:p xmlns:a="http://schemas.openxmlformats.org/drawingml/2006/main">
-            <a:pPr>
-              <a:defRPr sz="1425" b="1">
-                <a:solidFill>
-                  <a:srgbClr val="246A73"/>
-                </a:solidFill>
-              </a:defRPr>
-            </a:pPr>
-            <a:r>
-              <a:rPr sz="1425" b="1">
-                <a:solidFill>
-                  <a:srgbClr val="246A73"/>
-                </a:solidFill>
-              </a:rPr>
-              <a:t>Main read</a:t>
-            </a:r>
-          </a:p>
-        </p:txBody>
-      </p:sp>
-      <p:sp>
-        <p:nvSpPr>
-          <p:cNvPr id="9" name="table-rule">
-            <a:extLst xmlns:a="http://schemas.openxmlformats.org/drawingml/2006/main">
-              <a:ext uri="{FF2B5EF4-FFF2-40B4-BE49-F238E27FC236}">
-                <a16:creationId xmlns:a16="http://schemas.microsoft.com/office/drawing/2014/main" id="{C069FD0D-3288-48C7-A2AE-7CBF9895F050}"/>
-              </a:ext>
-            </a:extLst>
-          </p:cNvPr>
-          <p:cNvSpPr>
-            <a:spLocks xmlns:a="http://schemas.openxmlformats.org/drawingml/2006/main" noGrp="1"/>
-          </p:cNvSpPr>
-          <p:nvPr/>
-        </p:nvSpPr>
-        <p:spPr>
-          <a:xfrm xmlns:a="http://schemas.openxmlformats.org/drawingml/2006/main">
-            <a:off x="819150" y="3067050"/>
             <a:ext cx="16649700" cy="19050"/>
           </a:xfrm>
           <a:prstGeom xmlns:a="http://schemas.openxmlformats.org/drawingml/2006/main" prst="rect">
@@ -6070,40 +6903,40 @@
       </p:sp>
       <p:sp>
         <p:nvSpPr>
-          <p:cNvPr id="10" name="table-cell-0">
-            <a:extLst xmlns:a="http://schemas.openxmlformats.org/drawingml/2006/main">
-              <a:ext uri="{FF2B5EF4-FFF2-40B4-BE49-F238E27FC236}">
-                <a16:creationId xmlns:a16="http://schemas.microsoft.com/office/drawing/2014/main" id="{30C0E736-319D-4F00-B9D7-FAC87AB087BC}"/>
-              </a:ext>
-            </a:extLst>
-          </p:cNvPr>
-          <p:cNvSpPr>
-            <a:spLocks xmlns:a="http://schemas.openxmlformats.org/drawingml/2006/main" noGrp="1"/>
-          </p:cNvSpPr>
-          <p:nvPr/>
-        </p:nvSpPr>
-        <p:spPr>
-          <a:xfrm xmlns:a="http://schemas.openxmlformats.org/drawingml/2006/main">
-            <a:off x="819150" y="3200400"/>
-            <a:ext cx="3467100" cy="266700"/>
-          </a:xfrm>
-          <a:prstGeom xmlns:a="http://schemas.openxmlformats.org/drawingml/2006/main" prst="rect">
-            <a:avLst/>
-          </a:prstGeom>
-        </p:spPr>
-        <p:txBody>
-          <a:bodyPr xmlns:a="http://schemas.openxmlformats.org/drawingml/2006/main" lIns="0" tIns="0" rIns="0" bIns="0"/>
-          <a:lstStyle xmlns:a="http://schemas.openxmlformats.org/drawingml/2006/main"/>
-          <a:p xmlns:a="http://schemas.openxmlformats.org/drawingml/2006/main">
-            <a:pPr>
-              <a:defRPr sz="1650" b="0">
-                <a:solidFill>
-                  <a:srgbClr val="1F2933"/>
-                </a:solidFill>
-              </a:defRPr>
-            </a:pPr>
-            <a:r>
-              <a:rPr sz="1650" b="0">
+          <p:cNvPr id="11" name="table-cell-0">
+            <a:extLst xmlns:a="http://schemas.openxmlformats.org/drawingml/2006/main">
+              <a:ext uri="{FF2B5EF4-FFF2-40B4-BE49-F238E27FC236}">
+                <a16:creationId xmlns:a16="http://schemas.microsoft.com/office/drawing/2014/main" id="{6CF8DF93-882C-414E-B409-9ED02A4399F1}"/>
+              </a:ext>
+            </a:extLst>
+          </p:cNvPr>
+          <p:cNvSpPr>
+            <a:spLocks xmlns:a="http://schemas.openxmlformats.org/drawingml/2006/main" noGrp="1"/>
+          </p:cNvSpPr>
+          <p:nvPr/>
+        </p:nvSpPr>
+        <p:spPr>
+          <a:xfrm xmlns:a="http://schemas.openxmlformats.org/drawingml/2006/main">
+            <a:off x="819150" y="2876550"/>
+            <a:ext cx="3009900" cy="228600"/>
+          </a:xfrm>
+          <a:prstGeom xmlns:a="http://schemas.openxmlformats.org/drawingml/2006/main" prst="rect">
+            <a:avLst/>
+          </a:prstGeom>
+        </p:spPr>
+        <p:txBody>
+          <a:bodyPr xmlns:a="http://schemas.openxmlformats.org/drawingml/2006/main" lIns="0" tIns="0" rIns="0" bIns="0"/>
+          <a:lstStyle xmlns:a="http://schemas.openxmlformats.org/drawingml/2006/main"/>
+          <a:p xmlns:a="http://schemas.openxmlformats.org/drawingml/2006/main">
+            <a:pPr>
+              <a:defRPr sz="1500" b="0">
+                <a:solidFill>
+                  <a:srgbClr val="1F2933"/>
+                </a:solidFill>
+              </a:defRPr>
+            </a:pPr>
+            <a:r>
+              <a:rPr sz="1500" b="0">
                 <a:solidFill>
                   <a:srgbClr val="1F2933"/>
                 </a:solidFill>
@@ -6115,156 +6948,201 @@
       </p:sp>
       <p:sp>
         <p:nvSpPr>
-          <p:cNvPr id="11" name="table-cell-1">
-            <a:extLst xmlns:a="http://schemas.openxmlformats.org/drawingml/2006/main">
-              <a:ext uri="{FF2B5EF4-FFF2-40B4-BE49-F238E27FC236}">
-                <a16:creationId xmlns:a16="http://schemas.microsoft.com/office/drawing/2014/main" id="{74254FA5-7EFB-4271-ABF6-8AB1C9249518}"/>
-              </a:ext>
-            </a:extLst>
-          </p:cNvPr>
-          <p:cNvSpPr>
-            <a:spLocks xmlns:a="http://schemas.openxmlformats.org/drawingml/2006/main" noGrp="1"/>
-          </p:cNvSpPr>
-          <p:nvPr/>
-        </p:nvSpPr>
-        <p:spPr>
-          <a:xfrm xmlns:a="http://schemas.openxmlformats.org/drawingml/2006/main">
-            <a:off x="4495800" y="3200400"/>
-            <a:ext cx="3829050" cy="266700"/>
-          </a:xfrm>
-          <a:prstGeom xmlns:a="http://schemas.openxmlformats.org/drawingml/2006/main" prst="rect">
-            <a:avLst/>
-          </a:prstGeom>
-        </p:spPr>
-        <p:txBody>
-          <a:bodyPr xmlns:a="http://schemas.openxmlformats.org/drawingml/2006/main" lIns="0" tIns="0" rIns="0" bIns="0"/>
-          <a:lstStyle xmlns:a="http://schemas.openxmlformats.org/drawingml/2006/main"/>
-          <a:p xmlns:a="http://schemas.openxmlformats.org/drawingml/2006/main">
-            <a:pPr>
-              <a:defRPr sz="1650" b="0">
-                <a:solidFill>
-                  <a:srgbClr val="1F2933"/>
-                </a:solidFill>
-              </a:defRPr>
-            </a:pPr>
-            <a:r>
-              <a:rPr sz="1650" b="0">
-                <a:solidFill>
-                  <a:srgbClr val="1F2933"/>
-                </a:solidFill>
-              </a:rPr>
-              <a:t>exploratory: 3.01e-7</a:t>
-            </a:r>
-          </a:p>
-        </p:txBody>
-      </p:sp>
-      <p:sp>
-        <p:nvSpPr>
-          <p:cNvPr id="12" name="table-cell-2">
-            <a:extLst xmlns:a="http://schemas.openxmlformats.org/drawingml/2006/main">
-              <a:ext uri="{FF2B5EF4-FFF2-40B4-BE49-F238E27FC236}">
-                <a16:creationId xmlns:a16="http://schemas.microsoft.com/office/drawing/2014/main" id="{56BB2DCA-283A-4535-B151-F87DE4A0A17A}"/>
-              </a:ext>
-            </a:extLst>
-          </p:cNvPr>
-          <p:cNvSpPr>
-            <a:spLocks xmlns:a="http://schemas.openxmlformats.org/drawingml/2006/main" noGrp="1"/>
-          </p:cNvSpPr>
-          <p:nvPr/>
-        </p:nvSpPr>
-        <p:spPr>
-          <a:xfrm xmlns:a="http://schemas.openxmlformats.org/drawingml/2006/main">
-            <a:off x="8515350" y="3200400"/>
-            <a:ext cx="3638550" cy="266700"/>
-          </a:xfrm>
-          <a:prstGeom xmlns:a="http://schemas.openxmlformats.org/drawingml/2006/main" prst="rect">
-            <a:avLst/>
-          </a:prstGeom>
-        </p:spPr>
-        <p:txBody>
-          <a:bodyPr xmlns:a="http://schemas.openxmlformats.org/drawingml/2006/main" lIns="0" tIns="0" rIns="0" bIns="0"/>
-          <a:lstStyle xmlns:a="http://schemas.openxmlformats.org/drawingml/2006/main"/>
-          <a:p xmlns:a="http://schemas.openxmlformats.org/drawingml/2006/main">
-            <a:pPr>
-              <a:defRPr sz="1650" b="0">
-                <a:solidFill>
-                  <a:srgbClr val="1F2933"/>
-                </a:solidFill>
-              </a:defRPr>
-            </a:pPr>
-            <a:r>
-              <a:rPr sz="1650" b="0">
-                <a:solidFill>
-                  <a:srgbClr val="1F2933"/>
-                </a:solidFill>
-              </a:rPr>
-              <a:t>13.15</a:t>
-            </a:r>
-          </a:p>
-        </p:txBody>
-      </p:sp>
-      <p:sp>
-        <p:nvSpPr>
-          <p:cNvPr id="13" name="table-cell-3">
-            <a:extLst xmlns:a="http://schemas.openxmlformats.org/drawingml/2006/main">
-              <a:ext uri="{FF2B5EF4-FFF2-40B4-BE49-F238E27FC236}">
-                <a16:creationId xmlns:a16="http://schemas.microsoft.com/office/drawing/2014/main" id="{BE0AB618-CD68-4E61-9049-CB64170A3271}"/>
-              </a:ext>
-            </a:extLst>
-          </p:cNvPr>
-          <p:cNvSpPr>
-            <a:spLocks xmlns:a="http://schemas.openxmlformats.org/drawingml/2006/main" noGrp="1"/>
-          </p:cNvSpPr>
-          <p:nvPr/>
-        </p:nvSpPr>
-        <p:spPr>
-          <a:xfrm xmlns:a="http://schemas.openxmlformats.org/drawingml/2006/main">
-            <a:off x="12363450" y="3200400"/>
-            <a:ext cx="5105400" cy="266700"/>
-          </a:xfrm>
-          <a:prstGeom xmlns:a="http://schemas.openxmlformats.org/drawingml/2006/main" prst="rect">
-            <a:avLst/>
-          </a:prstGeom>
-        </p:spPr>
-        <p:txBody>
-          <a:bodyPr xmlns:a="http://schemas.openxmlformats.org/drawingml/2006/main" lIns="0" tIns="0" rIns="0" bIns="0"/>
-          <a:lstStyle xmlns:a="http://schemas.openxmlformats.org/drawingml/2006/main"/>
-          <a:p xmlns:a="http://schemas.openxmlformats.org/drawingml/2006/main">
-            <a:pPr>
-              <a:defRPr sz="1650" b="0">
-                <a:solidFill>
-                  <a:srgbClr val="1F2933"/>
-                </a:solidFill>
-              </a:defRPr>
-            </a:pPr>
-            <a:r>
-              <a:rPr sz="1650" b="0">
-                <a:solidFill>
-                  <a:srgbClr val="1F2933"/>
-                </a:solidFill>
-              </a:rPr>
-              <a:t>near-zero refinement</a:t>
-            </a:r>
-          </a:p>
-        </p:txBody>
-      </p:sp>
-      <p:sp>
-        <p:nvSpPr>
-          <p:cNvPr id="14" name="row-rule-0">
-            <a:extLst xmlns:a="http://schemas.openxmlformats.org/drawingml/2006/main">
-              <a:ext uri="{FF2B5EF4-FFF2-40B4-BE49-F238E27FC236}">
-                <a16:creationId xmlns:a16="http://schemas.microsoft.com/office/drawing/2014/main" id="{8D122A87-8BAF-4576-B2B3-77C71E702603}"/>
-              </a:ext>
-            </a:extLst>
-          </p:cNvPr>
-          <p:cNvSpPr>
-            <a:spLocks xmlns:a="http://schemas.openxmlformats.org/drawingml/2006/main" noGrp="1"/>
-          </p:cNvSpPr>
-          <p:nvPr/>
-        </p:nvSpPr>
-        <p:spPr>
-          <a:xfrm xmlns:a="http://schemas.openxmlformats.org/drawingml/2006/main">
-            <a:off x="819150" y="3562350"/>
+          <p:cNvPr id="12" name="table-cell-1">
+            <a:extLst xmlns:a="http://schemas.openxmlformats.org/drawingml/2006/main">
+              <a:ext uri="{FF2B5EF4-FFF2-40B4-BE49-F238E27FC236}">
+                <a16:creationId xmlns:a16="http://schemas.microsoft.com/office/drawing/2014/main" id="{3860212E-85CD-4506-9062-947674F042F0}"/>
+              </a:ext>
+            </a:extLst>
+          </p:cNvPr>
+          <p:cNvSpPr>
+            <a:spLocks xmlns:a="http://schemas.openxmlformats.org/drawingml/2006/main" noGrp="1"/>
+          </p:cNvSpPr>
+          <p:nvPr/>
+        </p:nvSpPr>
+        <p:spPr>
+          <a:xfrm xmlns:a="http://schemas.openxmlformats.org/drawingml/2006/main">
+            <a:off x="4038600" y="2876550"/>
+            <a:ext cx="3886200" cy="228600"/>
+          </a:xfrm>
+          <a:prstGeom xmlns:a="http://schemas.openxmlformats.org/drawingml/2006/main" prst="rect">
+            <a:avLst/>
+          </a:prstGeom>
+        </p:spPr>
+        <p:txBody>
+          <a:bodyPr xmlns:a="http://schemas.openxmlformats.org/drawingml/2006/main" lIns="0" tIns="0" rIns="0" bIns="0"/>
+          <a:lstStyle xmlns:a="http://schemas.openxmlformats.org/drawingml/2006/main"/>
+          <a:p xmlns:a="http://schemas.openxmlformats.org/drawingml/2006/main">
+            <a:pPr>
+              <a:defRPr sz="1500" b="0">
+                <a:solidFill>
+                  <a:srgbClr val="1F2933"/>
+                </a:solidFill>
+              </a:defRPr>
+            </a:pPr>
+            <a:r>
+              <a:rPr sz="1500" b="0">
+                <a:solidFill>
+                  <a:srgbClr val="1F2933"/>
+                </a:solidFill>
+              </a:rPr>
+              <a:t>exploratory: 3.00e-7 +/- 3.39e-7</a:t>
+            </a:r>
+          </a:p>
+        </p:txBody>
+      </p:sp>
+      <p:sp>
+        <p:nvSpPr>
+          <p:cNvPr id="13" name="table-cell-2">
+            <a:extLst xmlns:a="http://schemas.openxmlformats.org/drawingml/2006/main">
+              <a:ext uri="{FF2B5EF4-FFF2-40B4-BE49-F238E27FC236}">
+                <a16:creationId xmlns:a16="http://schemas.microsoft.com/office/drawing/2014/main" id="{7E08AFC5-F937-4D2C-BE24-FED4C87DAA76}"/>
+              </a:ext>
+            </a:extLst>
+          </p:cNvPr>
+          <p:cNvSpPr>
+            <a:spLocks xmlns:a="http://schemas.openxmlformats.org/drawingml/2006/main" noGrp="1"/>
+          </p:cNvSpPr>
+          <p:nvPr/>
+        </p:nvSpPr>
+        <p:spPr>
+          <a:xfrm xmlns:a="http://schemas.openxmlformats.org/drawingml/2006/main">
+            <a:off x="8134350" y="2876550"/>
+            <a:ext cx="3543300" cy="228600"/>
+          </a:xfrm>
+          <a:prstGeom xmlns:a="http://schemas.openxmlformats.org/drawingml/2006/main" prst="rect">
+            <a:avLst/>
+          </a:prstGeom>
+        </p:spPr>
+        <p:txBody>
+          <a:bodyPr xmlns:a="http://schemas.openxmlformats.org/drawingml/2006/main" lIns="0" tIns="0" rIns="0" bIns="0"/>
+          <a:lstStyle xmlns:a="http://schemas.openxmlformats.org/drawingml/2006/main"/>
+          <a:p xmlns:a="http://schemas.openxmlformats.org/drawingml/2006/main">
+            <a:pPr>
+              <a:defRPr sz="1500" b="0">
+                <a:solidFill>
+                  <a:srgbClr val="1F2933"/>
+                </a:solidFill>
+              </a:defRPr>
+            </a:pPr>
+            <a:r>
+              <a:rPr sz="1500" b="0">
+                <a:solidFill>
+                  <a:srgbClr val="1F2933"/>
+                </a:solidFill>
+              </a:rPr>
+              <a:t>12.50</a:t>
+            </a:r>
+          </a:p>
+        </p:txBody>
+      </p:sp>
+      <p:sp>
+        <p:nvSpPr>
+          <p:cNvPr id="14" name="table-cell-3">
+            <a:extLst xmlns:a="http://schemas.openxmlformats.org/drawingml/2006/main">
+              <a:ext uri="{FF2B5EF4-FFF2-40B4-BE49-F238E27FC236}">
+                <a16:creationId xmlns:a16="http://schemas.microsoft.com/office/drawing/2014/main" id="{111535D1-1A48-47A9-8840-8665F8054448}"/>
+              </a:ext>
+            </a:extLst>
+          </p:cNvPr>
+          <p:cNvSpPr>
+            <a:spLocks xmlns:a="http://schemas.openxmlformats.org/drawingml/2006/main" noGrp="1"/>
+          </p:cNvSpPr>
+          <p:nvPr/>
+        </p:nvSpPr>
+        <p:spPr>
+          <a:xfrm xmlns:a="http://schemas.openxmlformats.org/drawingml/2006/main">
+            <a:off x="11887200" y="2876550"/>
+            <a:ext cx="2762250" cy="228600"/>
+          </a:xfrm>
+          <a:prstGeom xmlns:a="http://schemas.openxmlformats.org/drawingml/2006/main" prst="rect">
+            <a:avLst/>
+          </a:prstGeom>
+        </p:spPr>
+        <p:txBody>
+          <a:bodyPr xmlns:a="http://schemas.openxmlformats.org/drawingml/2006/main" lIns="0" tIns="0" rIns="0" bIns="0"/>
+          <a:lstStyle xmlns:a="http://schemas.openxmlformats.org/drawingml/2006/main"/>
+          <a:p xmlns:a="http://schemas.openxmlformats.org/drawingml/2006/main">
+            <a:pPr>
+              <a:defRPr sz="1500" b="0">
+                <a:solidFill>
+                  <a:srgbClr val="1F2933"/>
+                </a:solidFill>
+              </a:defRPr>
+            </a:pPr>
+            <a:r>
+              <a:rPr sz="1500" b="0">
+                <a:solidFill>
+                  <a:srgbClr val="1F2933"/>
+                </a:solidFill>
+              </a:rPr>
+              <a:t>3.00e-7</a:t>
+            </a:r>
+          </a:p>
+        </p:txBody>
+      </p:sp>
+      <p:sp>
+        <p:nvSpPr>
+          <p:cNvPr id="15" name="table-cell-4">
+            <a:extLst xmlns:a="http://schemas.openxmlformats.org/drawingml/2006/main">
+              <a:ext uri="{FF2B5EF4-FFF2-40B4-BE49-F238E27FC236}">
+                <a16:creationId xmlns:a16="http://schemas.microsoft.com/office/drawing/2014/main" id="{438AC59A-BB1A-42C6-99E8-C1387326663E}"/>
+              </a:ext>
+            </a:extLst>
+          </p:cNvPr>
+          <p:cNvSpPr>
+            <a:spLocks xmlns:a="http://schemas.openxmlformats.org/drawingml/2006/main" noGrp="1"/>
+          </p:cNvSpPr>
+          <p:nvPr/>
+        </p:nvSpPr>
+        <p:spPr>
+          <a:xfrm xmlns:a="http://schemas.openxmlformats.org/drawingml/2006/main">
+            <a:off x="14859000" y="2876550"/>
+            <a:ext cx="2609850" cy="228600"/>
+          </a:xfrm>
+          <a:prstGeom xmlns:a="http://schemas.openxmlformats.org/drawingml/2006/main" prst="rect">
+            <a:avLst/>
+          </a:prstGeom>
+        </p:spPr>
+        <p:txBody>
+          <a:bodyPr xmlns:a="http://schemas.openxmlformats.org/drawingml/2006/main" lIns="0" tIns="0" rIns="0" bIns="0"/>
+          <a:lstStyle xmlns:a="http://schemas.openxmlformats.org/drawingml/2006/main"/>
+          <a:p xmlns:a="http://schemas.openxmlformats.org/drawingml/2006/main">
+            <a:pPr>
+              <a:defRPr sz="1500" b="0">
+                <a:solidFill>
+                  <a:srgbClr val="1F2933"/>
+                </a:solidFill>
+              </a:defRPr>
+            </a:pPr>
+            <a:r>
+              <a:rPr sz="1500" b="0">
+                <a:solidFill>
+                  <a:srgbClr val="1F2933"/>
+                </a:solidFill>
+              </a:rPr>
+              <a:t>30/30</a:t>
+            </a:r>
+          </a:p>
+        </p:txBody>
+      </p:sp>
+      <p:sp>
+        <p:nvSpPr>
+          <p:cNvPr id="16" name="row-rule-0">
+            <a:extLst xmlns:a="http://schemas.openxmlformats.org/drawingml/2006/main">
+              <a:ext uri="{FF2B5EF4-FFF2-40B4-BE49-F238E27FC236}">
+                <a16:creationId xmlns:a16="http://schemas.microsoft.com/office/drawing/2014/main" id="{587F12CD-6B13-4C5C-8B3E-96E9652904DC}"/>
+              </a:ext>
+            </a:extLst>
+          </p:cNvPr>
+          <p:cNvSpPr>
+            <a:spLocks xmlns:a="http://schemas.openxmlformats.org/drawingml/2006/main" noGrp="1"/>
+          </p:cNvSpPr>
+          <p:nvPr/>
+        </p:nvSpPr>
+        <p:spPr>
+          <a:xfrm xmlns:a="http://schemas.openxmlformats.org/drawingml/2006/main">
+            <a:off x="819150" y="3219450"/>
             <a:ext cx="16649700" cy="9525"/>
           </a:xfrm>
           <a:prstGeom xmlns:a="http://schemas.openxmlformats.org/drawingml/2006/main" prst="rect">
@@ -6283,10 +7161,235 @@
       </p:sp>
       <p:sp>
         <p:nvSpPr>
-          <p:cNvPr id="15" name="table-cell-0">
-            <a:extLst xmlns:a="http://schemas.openxmlformats.org/drawingml/2006/main">
-              <a:ext uri="{FF2B5EF4-FFF2-40B4-BE49-F238E27FC236}">
-                <a16:creationId xmlns:a16="http://schemas.microsoft.com/office/drawing/2014/main" id="{C7D0DA08-D562-4844-B15B-9E7ED34B37E8}"/>
+          <p:cNvPr id="17" name="table-cell-0">
+            <a:extLst xmlns:a="http://schemas.openxmlformats.org/drawingml/2006/main">
+              <a:ext uri="{FF2B5EF4-FFF2-40B4-BE49-F238E27FC236}">
+                <a16:creationId xmlns:a16="http://schemas.microsoft.com/office/drawing/2014/main" id="{A7B20964-6EEC-450B-90C2-1B653AEA919F}"/>
+              </a:ext>
+            </a:extLst>
+          </p:cNvPr>
+          <p:cNvSpPr>
+            <a:spLocks xmlns:a="http://schemas.openxmlformats.org/drawingml/2006/main" noGrp="1"/>
+          </p:cNvSpPr>
+          <p:nvPr/>
+        </p:nvSpPr>
+        <p:spPr>
+          <a:xfrm xmlns:a="http://schemas.openxmlformats.org/drawingml/2006/main">
+            <a:off x="819150" y="3352800"/>
+            <a:ext cx="3009900" cy="228600"/>
+          </a:xfrm>
+          <a:prstGeom xmlns:a="http://schemas.openxmlformats.org/drawingml/2006/main" prst="rect">
+            <a:avLst/>
+          </a:prstGeom>
+        </p:spPr>
+        <p:txBody>
+          <a:bodyPr xmlns:a="http://schemas.openxmlformats.org/drawingml/2006/main" lIns="0" tIns="0" rIns="0" bIns="0"/>
+          <a:lstStyle xmlns:a="http://schemas.openxmlformats.org/drawingml/2006/main"/>
+          <a:p xmlns:a="http://schemas.openxmlformats.org/drawingml/2006/main">
+            <a:pPr>
+              <a:defRPr sz="1500" b="0">
+                <a:solidFill>
+                  <a:srgbClr val="1F2933"/>
+                </a:solidFill>
+              </a:defRPr>
+            </a:pPr>
+            <a:r>
+              <a:rPr sz="1500" b="0">
+                <a:solidFill>
+                  <a:srgbClr val="1F2933"/>
+                </a:solidFill>
+              </a:rPr>
+              <a:t>Rastrigin</a:t>
+            </a:r>
+          </a:p>
+        </p:txBody>
+      </p:sp>
+      <p:sp>
+        <p:nvSpPr>
+          <p:cNvPr id="18" name="table-cell-1">
+            <a:extLst xmlns:a="http://schemas.openxmlformats.org/drawingml/2006/main">
+              <a:ext uri="{FF2B5EF4-FFF2-40B4-BE49-F238E27FC236}">
+                <a16:creationId xmlns:a16="http://schemas.microsoft.com/office/drawing/2014/main" id="{414953BB-AB68-4611-8BA7-6F64FA1CFBDA}"/>
+              </a:ext>
+            </a:extLst>
+          </p:cNvPr>
+          <p:cNvSpPr>
+            <a:spLocks xmlns:a="http://schemas.openxmlformats.org/drawingml/2006/main" noGrp="1"/>
+          </p:cNvSpPr>
+          <p:nvPr/>
+        </p:nvSpPr>
+        <p:spPr>
+          <a:xfrm xmlns:a="http://schemas.openxmlformats.org/drawingml/2006/main">
+            <a:off x="4038600" y="3352800"/>
+            <a:ext cx="3886200" cy="228600"/>
+          </a:xfrm>
+          <a:prstGeom xmlns:a="http://schemas.openxmlformats.org/drawingml/2006/main" prst="rect">
+            <a:avLst/>
+          </a:prstGeom>
+        </p:spPr>
+        <p:txBody>
+          <a:bodyPr xmlns:a="http://schemas.openxmlformats.org/drawingml/2006/main" lIns="0" tIns="0" rIns="0" bIns="0"/>
+          <a:lstStyle xmlns:a="http://schemas.openxmlformats.org/drawingml/2006/main"/>
+          <a:p xmlns:a="http://schemas.openxmlformats.org/drawingml/2006/main">
+            <a:pPr>
+              <a:defRPr sz="1500" b="0">
+                <a:solidFill>
+                  <a:srgbClr val="1F2933"/>
+                </a:solidFill>
+              </a:defRPr>
+            </a:pPr>
+            <a:r>
+              <a:rPr sz="1500" b="0">
+                <a:solidFill>
+                  <a:srgbClr val="1F2933"/>
+                </a:solidFill>
+              </a:rPr>
+              <a:t>balanced: 11.82 +/- 5.651</a:t>
+            </a:r>
+          </a:p>
+        </p:txBody>
+      </p:sp>
+      <p:sp>
+        <p:nvSpPr>
+          <p:cNvPr id="19" name="table-cell-2">
+            <a:extLst xmlns:a="http://schemas.openxmlformats.org/drawingml/2006/main">
+              <a:ext uri="{FF2B5EF4-FFF2-40B4-BE49-F238E27FC236}">
+                <a16:creationId xmlns:a16="http://schemas.microsoft.com/office/drawing/2014/main" id="{59E3AA40-EE35-4127-9CFE-D265B4D0B306}"/>
+              </a:ext>
+            </a:extLst>
+          </p:cNvPr>
+          <p:cNvSpPr>
+            <a:spLocks xmlns:a="http://schemas.openxmlformats.org/drawingml/2006/main" noGrp="1"/>
+          </p:cNvSpPr>
+          <p:nvPr/>
+        </p:nvSpPr>
+        <p:spPr>
+          <a:xfrm xmlns:a="http://schemas.openxmlformats.org/drawingml/2006/main">
+            <a:off x="8134350" y="3352800"/>
+            <a:ext cx="3543300" cy="228600"/>
+          </a:xfrm>
+          <a:prstGeom xmlns:a="http://schemas.openxmlformats.org/drawingml/2006/main" prst="rect">
+            <a:avLst/>
+          </a:prstGeom>
+        </p:spPr>
+        <p:txBody>
+          <a:bodyPr xmlns:a="http://schemas.openxmlformats.org/drawingml/2006/main" lIns="0" tIns="0" rIns="0" bIns="0"/>
+          <a:lstStyle xmlns:a="http://schemas.openxmlformats.org/drawingml/2006/main"/>
+          <a:p xmlns:a="http://schemas.openxmlformats.org/drawingml/2006/main">
+            <a:pPr>
+              <a:defRPr sz="1500" b="0">
+                <a:solidFill>
+                  <a:srgbClr val="1F2933"/>
+                </a:solidFill>
+              </a:defRPr>
+            </a:pPr>
+            <a:r>
+              <a:rPr sz="1500" b="0">
+                <a:solidFill>
+                  <a:srgbClr val="1F2933"/>
+                </a:solidFill>
+              </a:rPr>
+              <a:t>68.38</a:t>
+            </a:r>
+          </a:p>
+        </p:txBody>
+      </p:sp>
+      <p:sp>
+        <p:nvSpPr>
+          <p:cNvPr id="20" name="table-cell-3">
+            <a:extLst xmlns:a="http://schemas.openxmlformats.org/drawingml/2006/main">
+              <a:ext uri="{FF2B5EF4-FFF2-40B4-BE49-F238E27FC236}">
+                <a16:creationId xmlns:a16="http://schemas.microsoft.com/office/drawing/2014/main" id="{93D94F05-854B-4482-9AB8-57A8EC7DA116}"/>
+              </a:ext>
+            </a:extLst>
+          </p:cNvPr>
+          <p:cNvSpPr>
+            <a:spLocks xmlns:a="http://schemas.openxmlformats.org/drawingml/2006/main" noGrp="1"/>
+          </p:cNvSpPr>
+          <p:nvPr/>
+        </p:nvSpPr>
+        <p:spPr>
+          <a:xfrm xmlns:a="http://schemas.openxmlformats.org/drawingml/2006/main">
+            <a:off x="11887200" y="3352800"/>
+            <a:ext cx="2762250" cy="228600"/>
+          </a:xfrm>
+          <a:prstGeom xmlns:a="http://schemas.openxmlformats.org/drawingml/2006/main" prst="rect">
+            <a:avLst/>
+          </a:prstGeom>
+        </p:spPr>
+        <p:txBody>
+          <a:bodyPr xmlns:a="http://schemas.openxmlformats.org/drawingml/2006/main" lIns="0" tIns="0" rIns="0" bIns="0"/>
+          <a:lstStyle xmlns:a="http://schemas.openxmlformats.org/drawingml/2006/main"/>
+          <a:p xmlns:a="http://schemas.openxmlformats.org/drawingml/2006/main">
+            <a:pPr>
+              <a:defRPr sz="1500" b="0">
+                <a:solidFill>
+                  <a:srgbClr val="1F2933"/>
+                </a:solidFill>
+              </a:defRPr>
+            </a:pPr>
+            <a:r>
+              <a:rPr sz="1500" b="0">
+                <a:solidFill>
+                  <a:srgbClr val="1F2933"/>
+                </a:solidFill>
+              </a:rPr>
+              <a:t>11.82</a:t>
+            </a:r>
+          </a:p>
+        </p:txBody>
+      </p:sp>
+      <p:sp>
+        <p:nvSpPr>
+          <p:cNvPr id="21" name="table-cell-4">
+            <a:extLst xmlns:a="http://schemas.openxmlformats.org/drawingml/2006/main">
+              <a:ext uri="{FF2B5EF4-FFF2-40B4-BE49-F238E27FC236}">
+                <a16:creationId xmlns:a16="http://schemas.microsoft.com/office/drawing/2014/main" id="{64813306-36D6-4550-84D2-E5F71D498B52}"/>
+              </a:ext>
+            </a:extLst>
+          </p:cNvPr>
+          <p:cNvSpPr>
+            <a:spLocks xmlns:a="http://schemas.openxmlformats.org/drawingml/2006/main" noGrp="1"/>
+          </p:cNvSpPr>
+          <p:nvPr/>
+        </p:nvSpPr>
+        <p:spPr>
+          <a:xfrm xmlns:a="http://schemas.openxmlformats.org/drawingml/2006/main">
+            <a:off x="14859000" y="3352800"/>
+            <a:ext cx="2609850" cy="228600"/>
+          </a:xfrm>
+          <a:prstGeom xmlns:a="http://schemas.openxmlformats.org/drawingml/2006/main" prst="rect">
+            <a:avLst/>
+          </a:prstGeom>
+        </p:spPr>
+        <p:txBody>
+          <a:bodyPr xmlns:a="http://schemas.openxmlformats.org/drawingml/2006/main" lIns="0" tIns="0" rIns="0" bIns="0"/>
+          <a:lstStyle xmlns:a="http://schemas.openxmlformats.org/drawingml/2006/main"/>
+          <a:p xmlns:a="http://schemas.openxmlformats.org/drawingml/2006/main">
+            <a:pPr>
+              <a:defRPr sz="1500" b="0">
+                <a:solidFill>
+                  <a:srgbClr val="1F2933"/>
+                </a:solidFill>
+              </a:defRPr>
+            </a:pPr>
+            <a:r>
+              <a:rPr sz="1500" b="0">
+                <a:solidFill>
+                  <a:srgbClr val="1F2933"/>
+                </a:solidFill>
+              </a:rPr>
+              <a:t>30/30</a:t>
+            </a:r>
+          </a:p>
+        </p:txBody>
+      </p:sp>
+      <p:sp>
+        <p:nvSpPr>
+          <p:cNvPr id="22" name="row-rule-1">
+            <a:extLst xmlns:a="http://schemas.openxmlformats.org/drawingml/2006/main">
+              <a:ext uri="{FF2B5EF4-FFF2-40B4-BE49-F238E27FC236}">
+                <a16:creationId xmlns:a16="http://schemas.microsoft.com/office/drawing/2014/main" id="{845CCD3B-2800-48D1-ACD8-74C6C8536AA2}"/>
               </a:ext>
             </a:extLst>
           </p:cNvPr>
@@ -6298,186 +7401,6 @@
         <p:spPr>
           <a:xfrm xmlns:a="http://schemas.openxmlformats.org/drawingml/2006/main">
             <a:off x="819150" y="3695700"/>
-            <a:ext cx="3467100" cy="266700"/>
-          </a:xfrm>
-          <a:prstGeom xmlns:a="http://schemas.openxmlformats.org/drawingml/2006/main" prst="rect">
-            <a:avLst/>
-          </a:prstGeom>
-        </p:spPr>
-        <p:txBody>
-          <a:bodyPr xmlns:a="http://schemas.openxmlformats.org/drawingml/2006/main" lIns="0" tIns="0" rIns="0" bIns="0"/>
-          <a:lstStyle xmlns:a="http://schemas.openxmlformats.org/drawingml/2006/main"/>
-          <a:p xmlns:a="http://schemas.openxmlformats.org/drawingml/2006/main">
-            <a:pPr>
-              <a:defRPr sz="1650" b="0">
-                <a:solidFill>
-                  <a:srgbClr val="1F2933"/>
-                </a:solidFill>
-              </a:defRPr>
-            </a:pPr>
-            <a:r>
-              <a:rPr sz="1650" b="0">
-                <a:solidFill>
-                  <a:srgbClr val="1F2933"/>
-                </a:solidFill>
-              </a:rPr>
-              <a:t>Rastrigin</a:t>
-            </a:r>
-          </a:p>
-        </p:txBody>
-      </p:sp>
-      <p:sp>
-        <p:nvSpPr>
-          <p:cNvPr id="16" name="table-cell-1">
-            <a:extLst xmlns:a="http://schemas.openxmlformats.org/drawingml/2006/main">
-              <a:ext uri="{FF2B5EF4-FFF2-40B4-BE49-F238E27FC236}">
-                <a16:creationId xmlns:a16="http://schemas.microsoft.com/office/drawing/2014/main" id="{F40F3FFF-D3FF-4605-A6E7-40467E2043C7}"/>
-              </a:ext>
-            </a:extLst>
-          </p:cNvPr>
-          <p:cNvSpPr>
-            <a:spLocks xmlns:a="http://schemas.openxmlformats.org/drawingml/2006/main" noGrp="1"/>
-          </p:cNvSpPr>
-          <p:nvPr/>
-        </p:nvSpPr>
-        <p:spPr>
-          <a:xfrm xmlns:a="http://schemas.openxmlformats.org/drawingml/2006/main">
-            <a:off x="4495800" y="3695700"/>
-            <a:ext cx="3829050" cy="266700"/>
-          </a:xfrm>
-          <a:prstGeom xmlns:a="http://schemas.openxmlformats.org/drawingml/2006/main" prst="rect">
-            <a:avLst/>
-          </a:prstGeom>
-        </p:spPr>
-        <p:txBody>
-          <a:bodyPr xmlns:a="http://schemas.openxmlformats.org/drawingml/2006/main" lIns="0" tIns="0" rIns="0" bIns="0"/>
-          <a:lstStyle xmlns:a="http://schemas.openxmlformats.org/drawingml/2006/main"/>
-          <a:p xmlns:a="http://schemas.openxmlformats.org/drawingml/2006/main">
-            <a:pPr>
-              <a:defRPr sz="1650" b="0">
-                <a:solidFill>
-                  <a:srgbClr val="1F2933"/>
-                </a:solidFill>
-              </a:defRPr>
-            </a:pPr>
-            <a:r>
-              <a:rPr sz="1650" b="0">
-                <a:solidFill>
-                  <a:srgbClr val="1F2933"/>
-                </a:solidFill>
-              </a:rPr>
-              <a:t>exploratory: 13.53</a:t>
-            </a:r>
-          </a:p>
-        </p:txBody>
-      </p:sp>
-      <p:sp>
-        <p:nvSpPr>
-          <p:cNvPr id="17" name="table-cell-2">
-            <a:extLst xmlns:a="http://schemas.openxmlformats.org/drawingml/2006/main">
-              <a:ext uri="{FF2B5EF4-FFF2-40B4-BE49-F238E27FC236}">
-                <a16:creationId xmlns:a16="http://schemas.microsoft.com/office/drawing/2014/main" id="{DBFB9FF8-A846-4BFD-8574-1445FFCE710A}"/>
-              </a:ext>
-            </a:extLst>
-          </p:cNvPr>
-          <p:cNvSpPr>
-            <a:spLocks xmlns:a="http://schemas.openxmlformats.org/drawingml/2006/main" noGrp="1"/>
-          </p:cNvSpPr>
-          <p:nvPr/>
-        </p:nvSpPr>
-        <p:spPr>
-          <a:xfrm xmlns:a="http://schemas.openxmlformats.org/drawingml/2006/main">
-            <a:off x="8515350" y="3695700"/>
-            <a:ext cx="3638550" cy="266700"/>
-          </a:xfrm>
-          <a:prstGeom xmlns:a="http://schemas.openxmlformats.org/drawingml/2006/main" prst="rect">
-            <a:avLst/>
-          </a:prstGeom>
-        </p:spPr>
-        <p:txBody>
-          <a:bodyPr xmlns:a="http://schemas.openxmlformats.org/drawingml/2006/main" lIns="0" tIns="0" rIns="0" bIns="0"/>
-          <a:lstStyle xmlns:a="http://schemas.openxmlformats.org/drawingml/2006/main"/>
-          <a:p xmlns:a="http://schemas.openxmlformats.org/drawingml/2006/main">
-            <a:pPr>
-              <a:defRPr sz="1650" b="0">
-                <a:solidFill>
-                  <a:srgbClr val="1F2933"/>
-                </a:solidFill>
-              </a:defRPr>
-            </a:pPr>
-            <a:r>
-              <a:rPr sz="1650" b="0">
-                <a:solidFill>
-                  <a:srgbClr val="1F2933"/>
-                </a:solidFill>
-              </a:rPr>
-              <a:t>67.69</a:t>
-            </a:r>
-          </a:p>
-        </p:txBody>
-      </p:sp>
-      <p:sp>
-        <p:nvSpPr>
-          <p:cNvPr id="18" name="table-cell-3">
-            <a:extLst xmlns:a="http://schemas.openxmlformats.org/drawingml/2006/main">
-              <a:ext uri="{FF2B5EF4-FFF2-40B4-BE49-F238E27FC236}">
-                <a16:creationId xmlns:a16="http://schemas.microsoft.com/office/drawing/2014/main" id="{F1D27D76-F995-4953-80C5-40E79B3FF58E}"/>
-              </a:ext>
-            </a:extLst>
-          </p:cNvPr>
-          <p:cNvSpPr>
-            <a:spLocks xmlns:a="http://schemas.openxmlformats.org/drawingml/2006/main" noGrp="1"/>
-          </p:cNvSpPr>
-          <p:nvPr/>
-        </p:nvSpPr>
-        <p:spPr>
-          <a:xfrm xmlns:a="http://schemas.openxmlformats.org/drawingml/2006/main">
-            <a:off x="12363450" y="3695700"/>
-            <a:ext cx="5105400" cy="266700"/>
-          </a:xfrm>
-          <a:prstGeom xmlns:a="http://schemas.openxmlformats.org/drawingml/2006/main" prst="rect">
-            <a:avLst/>
-          </a:prstGeom>
-        </p:spPr>
-        <p:txBody>
-          <a:bodyPr xmlns:a="http://schemas.openxmlformats.org/drawingml/2006/main" lIns="0" tIns="0" rIns="0" bIns="0"/>
-          <a:lstStyle xmlns:a="http://schemas.openxmlformats.org/drawingml/2006/main"/>
-          <a:p xmlns:a="http://schemas.openxmlformats.org/drawingml/2006/main">
-            <a:pPr>
-              <a:defRPr sz="1650" b="0">
-                <a:solidFill>
-                  <a:srgbClr val="1F2933"/>
-                </a:solidFill>
-              </a:defRPr>
-            </a:pPr>
-            <a:r>
-              <a:rPr sz="1650" b="0">
-                <a:solidFill>
-                  <a:srgbClr val="1F2933"/>
-                </a:solidFill>
-              </a:rPr>
-              <a:t>escapes many local basins</a:t>
-            </a:r>
-          </a:p>
-        </p:txBody>
-      </p:sp>
-      <p:sp>
-        <p:nvSpPr>
-          <p:cNvPr id="19" name="row-rule-1">
-            <a:extLst xmlns:a="http://schemas.openxmlformats.org/drawingml/2006/main">
-              <a:ext uri="{FF2B5EF4-FFF2-40B4-BE49-F238E27FC236}">
-                <a16:creationId xmlns:a16="http://schemas.microsoft.com/office/drawing/2014/main" id="{13792843-3F5A-47B2-A206-E63351C9CB53}"/>
-              </a:ext>
-            </a:extLst>
-          </p:cNvPr>
-          <p:cNvSpPr>
-            <a:spLocks xmlns:a="http://schemas.openxmlformats.org/drawingml/2006/main" noGrp="1"/>
-          </p:cNvSpPr>
-          <p:nvPr/>
-        </p:nvSpPr>
-        <p:spPr>
-          <a:xfrm xmlns:a="http://schemas.openxmlformats.org/drawingml/2006/main">
-            <a:off x="819150" y="4057650"/>
             <a:ext cx="16649700" cy="9525"/>
           </a:xfrm>
           <a:prstGeom xmlns:a="http://schemas.openxmlformats.org/drawingml/2006/main" prst="rect">
@@ -6496,40 +7419,40 @@
       </p:sp>
       <p:sp>
         <p:nvSpPr>
-          <p:cNvPr id="20" name="table-cell-0">
-            <a:extLst xmlns:a="http://schemas.openxmlformats.org/drawingml/2006/main">
-              <a:ext uri="{FF2B5EF4-FFF2-40B4-BE49-F238E27FC236}">
-                <a16:creationId xmlns:a16="http://schemas.microsoft.com/office/drawing/2014/main" id="{B4A19E35-5117-444C-AF17-EF8C67A180FE}"/>
-              </a:ext>
-            </a:extLst>
-          </p:cNvPr>
-          <p:cNvSpPr>
-            <a:spLocks xmlns:a="http://schemas.openxmlformats.org/drawingml/2006/main" noGrp="1"/>
-          </p:cNvSpPr>
-          <p:nvPr/>
-        </p:nvSpPr>
-        <p:spPr>
-          <a:xfrm xmlns:a="http://schemas.openxmlformats.org/drawingml/2006/main">
-            <a:off x="819150" y="4191000"/>
-            <a:ext cx="3467100" cy="266700"/>
-          </a:xfrm>
-          <a:prstGeom xmlns:a="http://schemas.openxmlformats.org/drawingml/2006/main" prst="rect">
-            <a:avLst/>
-          </a:prstGeom>
-        </p:spPr>
-        <p:txBody>
-          <a:bodyPr xmlns:a="http://schemas.openxmlformats.org/drawingml/2006/main" lIns="0" tIns="0" rIns="0" bIns="0"/>
-          <a:lstStyle xmlns:a="http://schemas.openxmlformats.org/drawingml/2006/main"/>
-          <a:p xmlns:a="http://schemas.openxmlformats.org/drawingml/2006/main">
-            <a:pPr>
-              <a:defRPr sz="1650" b="0">
-                <a:solidFill>
-                  <a:srgbClr val="1F2933"/>
-                </a:solidFill>
-              </a:defRPr>
-            </a:pPr>
-            <a:r>
-              <a:rPr sz="1650" b="0">
+          <p:cNvPr id="23" name="table-cell-0">
+            <a:extLst xmlns:a="http://schemas.openxmlformats.org/drawingml/2006/main">
+              <a:ext uri="{FF2B5EF4-FFF2-40B4-BE49-F238E27FC236}">
+                <a16:creationId xmlns:a16="http://schemas.microsoft.com/office/drawing/2014/main" id="{7BEFCB99-FC73-469A-A4D5-6CB4073314A3}"/>
+              </a:ext>
+            </a:extLst>
+          </p:cNvPr>
+          <p:cNvSpPr>
+            <a:spLocks xmlns:a="http://schemas.openxmlformats.org/drawingml/2006/main" noGrp="1"/>
+          </p:cNvSpPr>
+          <p:nvPr/>
+        </p:nvSpPr>
+        <p:spPr>
+          <a:xfrm xmlns:a="http://schemas.openxmlformats.org/drawingml/2006/main">
+            <a:off x="819150" y="3810000"/>
+            <a:ext cx="3009900" cy="228600"/>
+          </a:xfrm>
+          <a:prstGeom xmlns:a="http://schemas.openxmlformats.org/drawingml/2006/main" prst="rect">
+            <a:avLst/>
+          </a:prstGeom>
+        </p:spPr>
+        <p:txBody>
+          <a:bodyPr xmlns:a="http://schemas.openxmlformats.org/drawingml/2006/main" lIns="0" tIns="0" rIns="0" bIns="0"/>
+          <a:lstStyle xmlns:a="http://schemas.openxmlformats.org/drawingml/2006/main"/>
+          <a:p xmlns:a="http://schemas.openxmlformats.org/drawingml/2006/main">
+            <a:pPr>
+              <a:defRPr sz="1500" b="0">
+                <a:solidFill>
+                  <a:srgbClr val="1F2933"/>
+                </a:solidFill>
+              </a:defRPr>
+            </a:pPr>
+            <a:r>
+              <a:rPr sz="1500" b="0">
                 <a:solidFill>
                   <a:srgbClr val="1F2933"/>
                 </a:solidFill>
@@ -6541,156 +7464,201 @@
       </p:sp>
       <p:sp>
         <p:nvSpPr>
-          <p:cNvPr id="21" name="table-cell-1">
-            <a:extLst xmlns:a="http://schemas.openxmlformats.org/drawingml/2006/main">
-              <a:ext uri="{FF2B5EF4-FFF2-40B4-BE49-F238E27FC236}">
-                <a16:creationId xmlns:a16="http://schemas.microsoft.com/office/drawing/2014/main" id="{0AEC4CEA-7851-407A-9932-20267AD588A5}"/>
-              </a:ext>
-            </a:extLst>
-          </p:cNvPr>
-          <p:cNvSpPr>
-            <a:spLocks xmlns:a="http://schemas.openxmlformats.org/drawingml/2006/main" noGrp="1"/>
-          </p:cNvSpPr>
-          <p:nvPr/>
-        </p:nvSpPr>
-        <p:spPr>
-          <a:xfrm xmlns:a="http://schemas.openxmlformats.org/drawingml/2006/main">
-            <a:off x="4495800" y="4191000"/>
-            <a:ext cx="3829050" cy="266700"/>
-          </a:xfrm>
-          <a:prstGeom xmlns:a="http://schemas.openxmlformats.org/drawingml/2006/main" prst="rect">
-            <a:avLst/>
-          </a:prstGeom>
-        </p:spPr>
-        <p:txBody>
-          <a:bodyPr xmlns:a="http://schemas.openxmlformats.org/drawingml/2006/main" lIns="0" tIns="0" rIns="0" bIns="0"/>
-          <a:lstStyle xmlns:a="http://schemas.openxmlformats.org/drawingml/2006/main"/>
-          <a:p xmlns:a="http://schemas.openxmlformats.org/drawingml/2006/main">
-            <a:pPr>
-              <a:defRPr sz="1650" b="0">
-                <a:solidFill>
-                  <a:srgbClr val="1F2933"/>
-                </a:solidFill>
-              </a:defRPr>
-            </a:pPr>
-            <a:r>
-              <a:rPr sz="1650" b="0">
-                <a:solidFill>
-                  <a:srgbClr val="1F2933"/>
-                </a:solidFill>
-              </a:rPr>
-              <a:t>exploratory: -8.598</a:t>
-            </a:r>
-          </a:p>
-        </p:txBody>
-      </p:sp>
-      <p:sp>
-        <p:nvSpPr>
-          <p:cNvPr id="22" name="table-cell-2">
-            <a:extLst xmlns:a="http://schemas.openxmlformats.org/drawingml/2006/main">
-              <a:ext uri="{FF2B5EF4-FFF2-40B4-BE49-F238E27FC236}">
-                <a16:creationId xmlns:a16="http://schemas.microsoft.com/office/drawing/2014/main" id="{BFAAEBDF-BD1F-4609-9122-27766FCC4858}"/>
-              </a:ext>
-            </a:extLst>
-          </p:cNvPr>
-          <p:cNvSpPr>
-            <a:spLocks xmlns:a="http://schemas.openxmlformats.org/drawingml/2006/main" noGrp="1"/>
-          </p:cNvSpPr>
-          <p:nvPr/>
-        </p:nvSpPr>
-        <p:spPr>
-          <a:xfrm xmlns:a="http://schemas.openxmlformats.org/drawingml/2006/main">
-            <a:off x="8515350" y="4191000"/>
-            <a:ext cx="3638550" cy="266700"/>
-          </a:xfrm>
-          <a:prstGeom xmlns:a="http://schemas.openxmlformats.org/drawingml/2006/main" prst="rect">
-            <a:avLst/>
-          </a:prstGeom>
-        </p:spPr>
-        <p:txBody>
-          <a:bodyPr xmlns:a="http://schemas.openxmlformats.org/drawingml/2006/main" lIns="0" tIns="0" rIns="0" bIns="0"/>
-          <a:lstStyle xmlns:a="http://schemas.openxmlformats.org/drawingml/2006/main"/>
-          <a:p xmlns:a="http://schemas.openxmlformats.org/drawingml/2006/main">
-            <a:pPr>
-              <a:defRPr sz="1650" b="0">
-                <a:solidFill>
-                  <a:srgbClr val="1F2933"/>
-                </a:solidFill>
-              </a:defRPr>
-            </a:pPr>
-            <a:r>
-              <a:rPr sz="1650" b="0">
-                <a:solidFill>
-                  <a:srgbClr val="1F2933"/>
-                </a:solidFill>
-              </a:rPr>
-              <a:t>-4.803</a:t>
-            </a:r>
-          </a:p>
-        </p:txBody>
-      </p:sp>
-      <p:sp>
-        <p:nvSpPr>
-          <p:cNvPr id="23" name="table-cell-3">
-            <a:extLst xmlns:a="http://schemas.openxmlformats.org/drawingml/2006/main">
-              <a:ext uri="{FF2B5EF4-FFF2-40B4-BE49-F238E27FC236}">
-                <a16:creationId xmlns:a16="http://schemas.microsoft.com/office/drawing/2014/main" id="{437C6777-C23A-417C-B18C-CA4E2BC103BD}"/>
-              </a:ext>
-            </a:extLst>
-          </p:cNvPr>
-          <p:cNvSpPr>
-            <a:spLocks xmlns:a="http://schemas.openxmlformats.org/drawingml/2006/main" noGrp="1"/>
-          </p:cNvSpPr>
-          <p:nvPr/>
-        </p:nvSpPr>
-        <p:spPr>
-          <a:xfrm xmlns:a="http://schemas.openxmlformats.org/drawingml/2006/main">
-            <a:off x="12363450" y="4191000"/>
-            <a:ext cx="5105400" cy="266700"/>
-          </a:xfrm>
-          <a:prstGeom xmlns:a="http://schemas.openxmlformats.org/drawingml/2006/main" prst="rect">
-            <a:avLst/>
-          </a:prstGeom>
-        </p:spPr>
-        <p:txBody>
-          <a:bodyPr xmlns:a="http://schemas.openxmlformats.org/drawingml/2006/main" lIns="0" tIns="0" rIns="0" bIns="0"/>
-          <a:lstStyle xmlns:a="http://schemas.openxmlformats.org/drawingml/2006/main"/>
-          <a:p xmlns:a="http://schemas.openxmlformats.org/drawingml/2006/main">
-            <a:pPr>
-              <a:defRPr sz="1650" b="0">
-                <a:solidFill>
-                  <a:srgbClr val="1F2933"/>
-                </a:solidFill>
-              </a:defRPr>
-            </a:pPr>
-            <a:r>
-              <a:rPr sz="1650" b="0">
-                <a:solidFill>
-                  <a:srgbClr val="1F2933"/>
-                </a:solidFill>
-              </a:rPr>
-              <a:t>close, but not guaranteed</a:t>
-            </a:r>
-          </a:p>
-        </p:txBody>
-      </p:sp>
-      <p:sp>
-        <p:nvSpPr>
-          <p:cNvPr id="24" name="row-rule-2">
-            <a:extLst xmlns:a="http://schemas.openxmlformats.org/drawingml/2006/main">
-              <a:ext uri="{FF2B5EF4-FFF2-40B4-BE49-F238E27FC236}">
-                <a16:creationId xmlns:a16="http://schemas.microsoft.com/office/drawing/2014/main" id="{0E807688-FDE9-49B9-A911-395B2BC1639B}"/>
-              </a:ext>
-            </a:extLst>
-          </p:cNvPr>
-          <p:cNvSpPr>
-            <a:spLocks xmlns:a="http://schemas.openxmlformats.org/drawingml/2006/main" noGrp="1"/>
-          </p:cNvSpPr>
-          <p:nvPr/>
-        </p:nvSpPr>
-        <p:spPr>
-          <a:xfrm xmlns:a="http://schemas.openxmlformats.org/drawingml/2006/main">
-            <a:off x="819150" y="4552950"/>
+          <p:cNvPr id="24" name="table-cell-1">
+            <a:extLst xmlns:a="http://schemas.openxmlformats.org/drawingml/2006/main">
+              <a:ext uri="{FF2B5EF4-FFF2-40B4-BE49-F238E27FC236}">
+                <a16:creationId xmlns:a16="http://schemas.microsoft.com/office/drawing/2014/main" id="{80DA4CCD-B8E4-460E-9C0C-366BDFA6C718}"/>
+              </a:ext>
+            </a:extLst>
+          </p:cNvPr>
+          <p:cNvSpPr>
+            <a:spLocks xmlns:a="http://schemas.openxmlformats.org/drawingml/2006/main" noGrp="1"/>
+          </p:cNvSpPr>
+          <p:nvPr/>
+        </p:nvSpPr>
+        <p:spPr>
+          <a:xfrm xmlns:a="http://schemas.openxmlformats.org/drawingml/2006/main">
+            <a:off x="4038600" y="3810000"/>
+            <a:ext cx="3886200" cy="228600"/>
+          </a:xfrm>
+          <a:prstGeom xmlns:a="http://schemas.openxmlformats.org/drawingml/2006/main" prst="rect">
+            <a:avLst/>
+          </a:prstGeom>
+        </p:spPr>
+        <p:txBody>
+          <a:bodyPr xmlns:a="http://schemas.openxmlformats.org/drawingml/2006/main" lIns="0" tIns="0" rIns="0" bIns="0"/>
+          <a:lstStyle xmlns:a="http://schemas.openxmlformats.org/drawingml/2006/main"/>
+          <a:p xmlns:a="http://schemas.openxmlformats.org/drawingml/2006/main">
+            <a:pPr>
+              <a:defRPr sz="1500" b="0">
+                <a:solidFill>
+                  <a:srgbClr val="1F2933"/>
+                </a:solidFill>
+              </a:defRPr>
+            </a:pPr>
+            <a:r>
+              <a:rPr sz="1500" b="0">
+                <a:solidFill>
+                  <a:srgbClr val="1F2933"/>
+                </a:solidFill>
+              </a:rPr>
+              <a:t>exploratory: -8.601 +/- 0.642</a:t>
+            </a:r>
+          </a:p>
+        </p:txBody>
+      </p:sp>
+      <p:sp>
+        <p:nvSpPr>
+          <p:cNvPr id="25" name="table-cell-2">
+            <a:extLst xmlns:a="http://schemas.openxmlformats.org/drawingml/2006/main">
+              <a:ext uri="{FF2B5EF4-FFF2-40B4-BE49-F238E27FC236}">
+                <a16:creationId xmlns:a16="http://schemas.microsoft.com/office/drawing/2014/main" id="{D6FFDE7D-9DFD-412B-B2DB-1626E1BC2AFE}"/>
+              </a:ext>
+            </a:extLst>
+          </p:cNvPr>
+          <p:cNvSpPr>
+            <a:spLocks xmlns:a="http://schemas.openxmlformats.org/drawingml/2006/main" noGrp="1"/>
+          </p:cNvSpPr>
+          <p:nvPr/>
+        </p:nvSpPr>
+        <p:spPr>
+          <a:xfrm xmlns:a="http://schemas.openxmlformats.org/drawingml/2006/main">
+            <a:off x="8134350" y="3810000"/>
+            <a:ext cx="3543300" cy="228600"/>
+          </a:xfrm>
+          <a:prstGeom xmlns:a="http://schemas.openxmlformats.org/drawingml/2006/main" prst="rect">
+            <a:avLst/>
+          </a:prstGeom>
+        </p:spPr>
+        <p:txBody>
+          <a:bodyPr xmlns:a="http://schemas.openxmlformats.org/drawingml/2006/main" lIns="0" tIns="0" rIns="0" bIns="0"/>
+          <a:lstStyle xmlns:a="http://schemas.openxmlformats.org/drawingml/2006/main"/>
+          <a:p xmlns:a="http://schemas.openxmlformats.org/drawingml/2006/main">
+            <a:pPr>
+              <a:defRPr sz="1500" b="0">
+                <a:solidFill>
+                  <a:srgbClr val="1F2933"/>
+                </a:solidFill>
+              </a:defRPr>
+            </a:pPr>
+            <a:r>
+              <a:rPr sz="1500" b="0">
+                <a:solidFill>
+                  <a:srgbClr val="1F2933"/>
+                </a:solidFill>
+              </a:rPr>
+              <a:t>-4.829</a:t>
+            </a:r>
+          </a:p>
+        </p:txBody>
+      </p:sp>
+      <p:sp>
+        <p:nvSpPr>
+          <p:cNvPr id="26" name="table-cell-3">
+            <a:extLst xmlns:a="http://schemas.openxmlformats.org/drawingml/2006/main">
+              <a:ext uri="{FF2B5EF4-FFF2-40B4-BE49-F238E27FC236}">
+                <a16:creationId xmlns:a16="http://schemas.microsoft.com/office/drawing/2014/main" id="{C90A527D-9EFE-4F7F-8886-3A9ACC0255AF}"/>
+              </a:ext>
+            </a:extLst>
+          </p:cNvPr>
+          <p:cNvSpPr>
+            <a:spLocks xmlns:a="http://schemas.openxmlformats.org/drawingml/2006/main" noGrp="1"/>
+          </p:cNvSpPr>
+          <p:nvPr/>
+        </p:nvSpPr>
+        <p:spPr>
+          <a:xfrm xmlns:a="http://schemas.openxmlformats.org/drawingml/2006/main">
+            <a:off x="11887200" y="3810000"/>
+            <a:ext cx="2762250" cy="228600"/>
+          </a:xfrm>
+          <a:prstGeom xmlns:a="http://schemas.openxmlformats.org/drawingml/2006/main" prst="rect">
+            <a:avLst/>
+          </a:prstGeom>
+        </p:spPr>
+        <p:txBody>
+          <a:bodyPr xmlns:a="http://schemas.openxmlformats.org/drawingml/2006/main" lIns="0" tIns="0" rIns="0" bIns="0"/>
+          <a:lstStyle xmlns:a="http://schemas.openxmlformats.org/drawingml/2006/main"/>
+          <a:p xmlns:a="http://schemas.openxmlformats.org/drawingml/2006/main">
+            <a:pPr>
+              <a:defRPr sz="1500" b="0">
+                <a:solidFill>
+                  <a:srgbClr val="1F2933"/>
+                </a:solidFill>
+              </a:defRPr>
+            </a:pPr>
+            <a:r>
+              <a:rPr sz="1500" b="0">
+                <a:solidFill>
+                  <a:srgbClr val="1F2933"/>
+                </a:solidFill>
+              </a:rPr>
+              <a:t>1.059</a:t>
+            </a:r>
+          </a:p>
+        </p:txBody>
+      </p:sp>
+      <p:sp>
+        <p:nvSpPr>
+          <p:cNvPr id="27" name="table-cell-4">
+            <a:extLst xmlns:a="http://schemas.openxmlformats.org/drawingml/2006/main">
+              <a:ext uri="{FF2B5EF4-FFF2-40B4-BE49-F238E27FC236}">
+                <a16:creationId xmlns:a16="http://schemas.microsoft.com/office/drawing/2014/main" id="{C31C1268-CC3F-42B1-8D1C-C064EB31A830}"/>
+              </a:ext>
+            </a:extLst>
+          </p:cNvPr>
+          <p:cNvSpPr>
+            <a:spLocks xmlns:a="http://schemas.openxmlformats.org/drawingml/2006/main" noGrp="1"/>
+          </p:cNvSpPr>
+          <p:nvPr/>
+        </p:nvSpPr>
+        <p:spPr>
+          <a:xfrm xmlns:a="http://schemas.openxmlformats.org/drawingml/2006/main">
+            <a:off x="14859000" y="3810000"/>
+            <a:ext cx="2609850" cy="228600"/>
+          </a:xfrm>
+          <a:prstGeom xmlns:a="http://schemas.openxmlformats.org/drawingml/2006/main" prst="rect">
+            <a:avLst/>
+          </a:prstGeom>
+        </p:spPr>
+        <p:txBody>
+          <a:bodyPr xmlns:a="http://schemas.openxmlformats.org/drawingml/2006/main" lIns="0" tIns="0" rIns="0" bIns="0"/>
+          <a:lstStyle xmlns:a="http://schemas.openxmlformats.org/drawingml/2006/main"/>
+          <a:p xmlns:a="http://schemas.openxmlformats.org/drawingml/2006/main">
+            <a:pPr>
+              <a:defRPr sz="1500" b="0">
+                <a:solidFill>
+                  <a:srgbClr val="1F2933"/>
+                </a:solidFill>
+              </a:defRPr>
+            </a:pPr>
+            <a:r>
+              <a:rPr sz="1500" b="0">
+                <a:solidFill>
+                  <a:srgbClr val="1F2933"/>
+                </a:solidFill>
+              </a:rPr>
+              <a:t>30/30</a:t>
+            </a:r>
+          </a:p>
+        </p:txBody>
+      </p:sp>
+      <p:sp>
+        <p:nvSpPr>
+          <p:cNvPr id="28" name="row-rule-2">
+            <a:extLst xmlns:a="http://schemas.openxmlformats.org/drawingml/2006/main">
+              <a:ext uri="{FF2B5EF4-FFF2-40B4-BE49-F238E27FC236}">
+                <a16:creationId xmlns:a16="http://schemas.microsoft.com/office/drawing/2014/main" id="{5B7CE5AF-34FC-40D5-95CB-F1A36FC16535}"/>
+              </a:ext>
+            </a:extLst>
+          </p:cNvPr>
+          <p:cNvSpPr>
+            <a:spLocks xmlns:a="http://schemas.openxmlformats.org/drawingml/2006/main" noGrp="1"/>
+          </p:cNvSpPr>
+          <p:nvPr/>
+        </p:nvSpPr>
+        <p:spPr>
+          <a:xfrm xmlns:a="http://schemas.openxmlformats.org/drawingml/2006/main">
+            <a:off x="819150" y="4152900"/>
             <a:ext cx="16649700" cy="9525"/>
           </a:xfrm>
           <a:prstGeom xmlns:a="http://schemas.openxmlformats.org/drawingml/2006/main" prst="rect">
@@ -6709,21 +7677,21 @@
       </p:sp>
       <p:sp>
         <p:nvSpPr>
-          <p:cNvPr id="25" name="metric-value">
-            <a:extLst xmlns:a="http://schemas.openxmlformats.org/drawingml/2006/main">
-              <a:ext uri="{FF2B5EF4-FFF2-40B4-BE49-F238E27FC236}">
-                <a16:creationId xmlns:a16="http://schemas.microsoft.com/office/drawing/2014/main" id="{FB09747E-633D-40A0-BA08-6B106CD2EC06}"/>
-              </a:ext>
-            </a:extLst>
-          </p:cNvPr>
-          <p:cNvSpPr>
-            <a:spLocks xmlns:a="http://schemas.openxmlformats.org/drawingml/2006/main" noGrp="1"/>
-          </p:cNvSpPr>
-          <p:nvPr/>
-        </p:nvSpPr>
-        <p:spPr>
-          <a:xfrm xmlns:a="http://schemas.openxmlformats.org/drawingml/2006/main">
-            <a:off x="819150" y="6553200"/>
+          <p:cNvPr id="29" name="metric-value">
+            <a:extLst xmlns:a="http://schemas.openxmlformats.org/drawingml/2006/main">
+              <a:ext uri="{FF2B5EF4-FFF2-40B4-BE49-F238E27FC236}">
+                <a16:creationId xmlns:a16="http://schemas.microsoft.com/office/drawing/2014/main" id="{4B3AB7ED-7914-4AF1-8F68-501F30842AD6}"/>
+              </a:ext>
+            </a:extLst>
+          </p:cNvPr>
+          <p:cNvSpPr>
+            <a:spLocks xmlns:a="http://schemas.openxmlformats.org/drawingml/2006/main" noGrp="1"/>
+          </p:cNvSpPr>
+          <p:nvPr/>
+        </p:nvSpPr>
+        <p:spPr>
+          <a:xfrm xmlns:a="http://schemas.openxmlformats.org/drawingml/2006/main">
+            <a:off x="819150" y="6362700"/>
             <a:ext cx="5238750" cy="647700"/>
           </a:xfrm>
           <a:prstGeom xmlns:a="http://schemas.openxmlformats.org/drawingml/2006/main" prst="rect">
@@ -6747,28 +7715,28 @@
                   <a:srgbClr val="246A73"/>
                 </a:solidFill>
               </a:rPr>
-              <a:t>3.01e-7</a:t>
-            </a:r>
-          </a:p>
-        </p:txBody>
-      </p:sp>
-      <p:sp>
-        <p:nvSpPr>
-          <p:cNvPr id="26" name="metric-label">
-            <a:extLst xmlns:a="http://schemas.openxmlformats.org/drawingml/2006/main">
-              <a:ext uri="{FF2B5EF4-FFF2-40B4-BE49-F238E27FC236}">
-                <a16:creationId xmlns:a16="http://schemas.microsoft.com/office/drawing/2014/main" id="{01D1D98A-1A24-46BD-B4F9-CE665B8C2552}"/>
-              </a:ext>
-            </a:extLst>
-          </p:cNvPr>
-          <p:cNvSpPr>
-            <a:spLocks xmlns:a="http://schemas.openxmlformats.org/drawingml/2006/main" noGrp="1"/>
-          </p:cNvSpPr>
-          <p:nvPr/>
-        </p:nvSpPr>
-        <p:spPr>
-          <a:xfrm xmlns:a="http://schemas.openxmlformats.org/drawingml/2006/main">
-            <a:off x="819150" y="7277100"/>
+              <a:t>3.00e-7</a:t>
+            </a:r>
+          </a:p>
+        </p:txBody>
+      </p:sp>
+      <p:sp>
+        <p:nvSpPr>
+          <p:cNvPr id="30" name="metric-label">
+            <a:extLst xmlns:a="http://schemas.openxmlformats.org/drawingml/2006/main">
+              <a:ext uri="{FF2B5EF4-FFF2-40B4-BE49-F238E27FC236}">
+                <a16:creationId xmlns:a16="http://schemas.microsoft.com/office/drawing/2014/main" id="{A55EF0D8-A93B-4BEA-9EB3-F508B7DA9A50}"/>
+              </a:ext>
+            </a:extLst>
+          </p:cNvPr>
+          <p:cNvSpPr>
+            <a:spLocks xmlns:a="http://schemas.openxmlformats.org/drawingml/2006/main" noGrp="1"/>
+          </p:cNvSpPr>
+          <p:nvPr/>
+        </p:nvSpPr>
+        <p:spPr>
+          <a:xfrm xmlns:a="http://schemas.openxmlformats.org/drawingml/2006/main">
+            <a:off x="819150" y="7086600"/>
             <a:ext cx="5238750" cy="228600"/>
           </a:xfrm>
           <a:prstGeom xmlns:a="http://schemas.openxmlformats.org/drawingml/2006/main" prst="rect">
@@ -6799,21 +7767,21 @@
       </p:sp>
       <p:sp>
         <p:nvSpPr>
-          <p:cNvPr id="27" name="metric-value">
-            <a:extLst xmlns:a="http://schemas.openxmlformats.org/drawingml/2006/main">
-              <a:ext uri="{FF2B5EF4-FFF2-40B4-BE49-F238E27FC236}">
-                <a16:creationId xmlns:a16="http://schemas.microsoft.com/office/drawing/2014/main" id="{E57471F5-6507-403A-A013-EA659AE2FC2C}"/>
-              </a:ext>
-            </a:extLst>
-          </p:cNvPr>
-          <p:cNvSpPr>
-            <a:spLocks xmlns:a="http://schemas.openxmlformats.org/drawingml/2006/main" noGrp="1"/>
-          </p:cNvSpPr>
-          <p:nvPr/>
-        </p:nvSpPr>
-        <p:spPr>
-          <a:xfrm xmlns:a="http://schemas.openxmlformats.org/drawingml/2006/main">
-            <a:off x="6534150" y="6553200"/>
+          <p:cNvPr id="31" name="metric-value">
+            <a:extLst xmlns:a="http://schemas.openxmlformats.org/drawingml/2006/main">
+              <a:ext uri="{FF2B5EF4-FFF2-40B4-BE49-F238E27FC236}">
+                <a16:creationId xmlns:a16="http://schemas.microsoft.com/office/drawing/2014/main" id="{6ED91B5C-7163-44D0-B80C-1231082A86D1}"/>
+              </a:ext>
+            </a:extLst>
+          </p:cNvPr>
+          <p:cNvSpPr>
+            <a:spLocks xmlns:a="http://schemas.openxmlformats.org/drawingml/2006/main" noGrp="1"/>
+          </p:cNvSpPr>
+          <p:nvPr/>
+        </p:nvSpPr>
+        <p:spPr>
+          <a:xfrm xmlns:a="http://schemas.openxmlformats.org/drawingml/2006/main">
+            <a:off x="6534150" y="6362700"/>
             <a:ext cx="5238750" cy="647700"/>
           </a:xfrm>
           <a:prstGeom xmlns:a="http://schemas.openxmlformats.org/drawingml/2006/main" prst="rect">
@@ -6837,28 +7805,28 @@
                   <a:srgbClr val="B5532F"/>
                 </a:solidFill>
               </a:rPr>
-              <a:t>13.53</a:t>
-            </a:r>
-          </a:p>
-        </p:txBody>
-      </p:sp>
-      <p:sp>
-        <p:nvSpPr>
-          <p:cNvPr id="28" name="metric-label">
-            <a:extLst xmlns:a="http://schemas.openxmlformats.org/drawingml/2006/main">
-              <a:ext uri="{FF2B5EF4-FFF2-40B4-BE49-F238E27FC236}">
-                <a16:creationId xmlns:a16="http://schemas.microsoft.com/office/drawing/2014/main" id="{BCDA0A94-D77B-400A-A6A4-E3FE2228918B}"/>
-              </a:ext>
-            </a:extLst>
-          </p:cNvPr>
-          <p:cNvSpPr>
-            <a:spLocks xmlns:a="http://schemas.openxmlformats.org/drawingml/2006/main" noGrp="1"/>
-          </p:cNvSpPr>
-          <p:nvPr/>
-        </p:nvSpPr>
-        <p:spPr>
-          <a:xfrm xmlns:a="http://schemas.openxmlformats.org/drawingml/2006/main">
-            <a:off x="6534150" y="7277100"/>
+              <a:t>11.82</a:t>
+            </a:r>
+          </a:p>
+        </p:txBody>
+      </p:sp>
+      <p:sp>
+        <p:nvSpPr>
+          <p:cNvPr id="32" name="metric-label">
+            <a:extLst xmlns:a="http://schemas.openxmlformats.org/drawingml/2006/main">
+              <a:ext uri="{FF2B5EF4-FFF2-40B4-BE49-F238E27FC236}">
+                <a16:creationId xmlns:a16="http://schemas.microsoft.com/office/drawing/2014/main" id="{7856FA08-82F6-49E0-8CFB-53F1DC1A9F9A}"/>
+              </a:ext>
+            </a:extLst>
+          </p:cNvPr>
+          <p:cNvSpPr>
+            <a:spLocks xmlns:a="http://schemas.openxmlformats.org/drawingml/2006/main" noGrp="1"/>
+          </p:cNvSpPr>
+          <p:nvPr/>
+        </p:nvSpPr>
+        <p:spPr>
+          <a:xfrm xmlns:a="http://schemas.openxmlformats.org/drawingml/2006/main">
+            <a:off x="6534150" y="7086600"/>
             <a:ext cx="5238750" cy="228600"/>
           </a:xfrm>
           <a:prstGeom xmlns:a="http://schemas.openxmlformats.org/drawingml/2006/main" prst="rect">
@@ -6889,21 +7857,21 @@
       </p:sp>
       <p:sp>
         <p:nvSpPr>
-          <p:cNvPr id="29" name="metric-value">
-            <a:extLst xmlns:a="http://schemas.openxmlformats.org/drawingml/2006/main">
-              <a:ext uri="{FF2B5EF4-FFF2-40B4-BE49-F238E27FC236}">
-                <a16:creationId xmlns:a16="http://schemas.microsoft.com/office/drawing/2014/main" id="{36F0BC7C-1CE1-4702-A86A-490EF722DF47}"/>
-              </a:ext>
-            </a:extLst>
-          </p:cNvPr>
-          <p:cNvSpPr>
-            <a:spLocks xmlns:a="http://schemas.openxmlformats.org/drawingml/2006/main" noGrp="1"/>
-          </p:cNvSpPr>
-          <p:nvPr/>
-        </p:nvSpPr>
-        <p:spPr>
-          <a:xfrm xmlns:a="http://schemas.openxmlformats.org/drawingml/2006/main">
-            <a:off x="12230100" y="6553200"/>
+          <p:cNvPr id="33" name="metric-value">
+            <a:extLst xmlns:a="http://schemas.openxmlformats.org/drawingml/2006/main">
+              <a:ext uri="{FF2B5EF4-FFF2-40B4-BE49-F238E27FC236}">
+                <a16:creationId xmlns:a16="http://schemas.microsoft.com/office/drawing/2014/main" id="{DDBE7C3E-0E69-4D5F-837B-4A74A8FEF23A}"/>
+              </a:ext>
+            </a:extLst>
+          </p:cNvPr>
+          <p:cNvSpPr>
+            <a:spLocks xmlns:a="http://schemas.openxmlformats.org/drawingml/2006/main" noGrp="1"/>
+          </p:cNvSpPr>
+          <p:nvPr/>
+        </p:nvSpPr>
+        <p:spPr>
+          <a:xfrm xmlns:a="http://schemas.openxmlformats.org/drawingml/2006/main">
+            <a:off x="12230100" y="6362700"/>
             <a:ext cx="5238750" cy="647700"/>
           </a:xfrm>
           <a:prstGeom xmlns:a="http://schemas.openxmlformats.org/drawingml/2006/main" prst="rect">
@@ -6934,21 +7902,21 @@
       </p:sp>
       <p:sp>
         <p:nvSpPr>
-          <p:cNvPr id="30" name="metric-label">
-            <a:extLst xmlns:a="http://schemas.openxmlformats.org/drawingml/2006/main">
-              <a:ext uri="{FF2B5EF4-FFF2-40B4-BE49-F238E27FC236}">
-                <a16:creationId xmlns:a16="http://schemas.microsoft.com/office/drawing/2014/main" id="{02B8725C-10EE-4BED-85B3-A8209DA089B9}"/>
-              </a:ext>
-            </a:extLst>
-          </p:cNvPr>
-          <p:cNvSpPr>
-            <a:spLocks xmlns:a="http://schemas.openxmlformats.org/drawingml/2006/main" noGrp="1"/>
-          </p:cNvSpPr>
-          <p:nvPr/>
-        </p:nvSpPr>
-        <p:spPr>
-          <a:xfrm xmlns:a="http://schemas.openxmlformats.org/drawingml/2006/main">
-            <a:off x="12230100" y="7277100"/>
+          <p:cNvPr id="34" name="metric-label">
+            <a:extLst xmlns:a="http://schemas.openxmlformats.org/drawingml/2006/main">
+              <a:ext uri="{FF2B5EF4-FFF2-40B4-BE49-F238E27FC236}">
+                <a16:creationId xmlns:a16="http://schemas.microsoft.com/office/drawing/2014/main" id="{43E1BF30-9C96-40CE-B7B2-82C0021089ED}"/>
+              </a:ext>
+            </a:extLst>
+          </p:cNvPr>
+          <p:cNvSpPr>
+            <a:spLocks xmlns:a="http://schemas.openxmlformats.org/drawingml/2006/main" noGrp="1"/>
+          </p:cNvSpPr>
+          <p:nvPr/>
+        </p:nvSpPr>
+        <p:spPr>
+          <a:xfrm xmlns:a="http://schemas.openxmlformats.org/drawingml/2006/main">
+            <a:off x="12230100" y="7086600"/>
             <a:ext cx="5238750" cy="228600"/>
           </a:xfrm>
           <a:prstGeom xmlns:a="http://schemas.openxmlformats.org/drawingml/2006/main" prst="rect">
@@ -6979,10 +7947,10 @@
       </p:sp>
       <p:sp>
         <p:nvSpPr>
-          <p:cNvPr id="31" name="source-footer">
-            <a:extLst xmlns:a="http://schemas.openxmlformats.org/drawingml/2006/main">
-              <a:ext uri="{FF2B5EF4-FFF2-40B4-BE49-F238E27FC236}">
-                <a16:creationId xmlns:a16="http://schemas.microsoft.com/office/drawing/2014/main" id="{6805BF7E-1678-4837-B2EE-3300870A6948}"/>
+          <p:cNvPr id="35" name="source-footer">
+            <a:extLst xmlns:a="http://schemas.openxmlformats.org/drawingml/2006/main">
+              <a:ext uri="{FF2B5EF4-FFF2-40B4-BE49-F238E27FC236}">
+                <a16:creationId xmlns:a16="http://schemas.microsoft.com/office/drawing/2014/main" id="{61CCA7D0-4DDC-4662-B17B-DC9D05F2CD3A}"/>
               </a:ext>
             </a:extLst>
           </p:cNvPr>
@@ -7017,7 +7985,7 @@
                   <a:srgbClr val="5F6368"/>
                 </a:solidFill>
               </a:rPr>
-              <a:t>Experiments in Cuckoo_Search_via_Levy_Flights_Final.ipynb; lower objective value is better.</a:t>
+              <a:t>Experiments in Cuckoo_Search_via_Levy_Flights_Final.ipynb; wins compare CS and Random Search run indices under the same budget.</a:t>
             </a:r>
           </a:p>
         </p:txBody>
@@ -7025,7 +7993,7 @@
     </p:spTree>
     <p:extLst>
       <p:ext uri="{BB962C8B-B14F-4D97-AF65-F5344CB8AC3E}">
-        <p14:creationId xmlns:p14="http://schemas.microsoft.com/office/powerpoint/2010/main" val="1334183072"/>
+        <p14:creationId xmlns:p14="http://schemas.microsoft.com/office/powerpoint/2010/main" val="149971662"/>
       </p:ext>
     </p:extLst>
   </p:cSld>
@@ -7049,7 +8017,7 @@
           <p:cNvPr id="1" name="slide-background">
             <a:extLst xmlns:a="http://schemas.openxmlformats.org/drawingml/2006/main">
               <a:ext uri="{FF2B5EF4-FFF2-40B4-BE49-F238E27FC236}">
-                <a16:creationId xmlns:a16="http://schemas.microsoft.com/office/drawing/2014/main" id="{4AD1D375-863D-47C6-A0D1-38BB478A55A1}"/>
+                <a16:creationId xmlns:a16="http://schemas.microsoft.com/office/drawing/2014/main" id="{677C5F4F-BD68-4516-A5AE-D2427D925C7E}"/>
               </a:ext>
             </a:extLst>
           </p:cNvPr>
@@ -7076,7 +8044,7 @@
           <p:cNvPr id="2" name="kicker">
             <a:extLst xmlns:a="http://schemas.openxmlformats.org/drawingml/2006/main">
               <a:ext uri="{FF2B5EF4-FFF2-40B4-BE49-F238E27FC236}">
-                <a16:creationId xmlns:a16="http://schemas.microsoft.com/office/drawing/2014/main" id="{C411ABB9-D1DE-4C1A-8EB6-40B75AD35F58}"/>
+                <a16:creationId xmlns:a16="http://schemas.microsoft.com/office/drawing/2014/main" id="{3FE7AE00-4717-47AC-B96D-EE5D28F77C7C}"/>
               </a:ext>
             </a:extLst>
           </p:cNvPr>
@@ -7121,7 +8089,7 @@
           <p:cNvPr id="3" name="slide-title">
             <a:extLst xmlns:a="http://schemas.openxmlformats.org/drawingml/2006/main">
               <a:ext uri="{FF2B5EF4-FFF2-40B4-BE49-F238E27FC236}">
-                <a16:creationId xmlns:a16="http://schemas.microsoft.com/office/drawing/2014/main" id="{25718F41-9BCF-4D0A-889B-47B8EA39C133}"/>
+                <a16:creationId xmlns:a16="http://schemas.microsoft.com/office/drawing/2014/main" id="{84221902-A3C3-48C9-933D-9E22915BAF84}"/>
               </a:ext>
             </a:extLst>
           </p:cNvPr>
@@ -7166,7 +8134,7 @@
           <p:cNvPr id="4" name="slide-subtitle">
             <a:extLst xmlns:a="http://schemas.openxmlformats.org/drawingml/2006/main">
               <a:ext uri="{FF2B5EF4-FFF2-40B4-BE49-F238E27FC236}">
-                <a16:creationId xmlns:a16="http://schemas.microsoft.com/office/drawing/2014/main" id="{48B4928A-CECD-467E-AAB5-A9329C124EFF}"/>
+                <a16:creationId xmlns:a16="http://schemas.microsoft.com/office/drawing/2014/main" id="{00575D5A-8EF9-4F00-A06C-2E5EF610A705}"/>
               </a:ext>
             </a:extLst>
           </p:cNvPr>
@@ -7201,7 +8169,7 @@
                   <a:srgbClr val="5F6368"/>
                 </a:solidFill>
               </a:rPr>
-              <a:t>Average curves over 10 runs show where CS is stable and where it remains sensitive to settings.</a:t>
+              <a:t>Average curves over 30 runs show where CS is stable and where it remains sensitive to settings.</a:t>
             </a:r>
           </a:p>
         </p:txBody>
@@ -7215,7 +8183,7 @@
           <p:nvPr/>
         </p:nvPicPr>
         <p:blipFill>
-          <a:blip xmlns:r="http://schemas.openxmlformats.org/officeDocument/2006/relationships" xmlns:a="http://schemas.openxmlformats.org/drawingml/2006/main" r:embed="R9e6970de8c4243fe"/>
+          <a:blip xmlns:r="http://schemas.openxmlformats.org/officeDocument/2006/relationships" xmlns:a="http://schemas.openxmlformats.org/drawingml/2006/main" r:embed="Rfdd6882e2dda4cb3"/>
           <a:stretch xmlns:a="http://schemas.openxmlformats.org/drawingml/2006/main"/>
         </p:blipFill>
         <p:spPr>
@@ -7233,7 +8201,7 @@
           <p:cNvPr id="6" name="metric-value">
             <a:extLst xmlns:a="http://schemas.openxmlformats.org/drawingml/2006/main">
               <a:ext uri="{FF2B5EF4-FFF2-40B4-BE49-F238E27FC236}">
-                <a16:creationId xmlns:a16="http://schemas.microsoft.com/office/drawing/2014/main" id="{F3282A95-1136-4DAD-B2C7-CE3158CD4599}"/>
+                <a16:creationId xmlns:a16="http://schemas.microsoft.com/office/drawing/2014/main" id="{BCF43276-7136-4900-A640-8AE91DD3BC97}"/>
               </a:ext>
             </a:extLst>
           </p:cNvPr>
@@ -7278,7 +8246,7 @@
           <p:cNvPr id="7" name="metric-label">
             <a:extLst xmlns:a="http://schemas.openxmlformats.org/drawingml/2006/main">
               <a:ext uri="{FF2B5EF4-FFF2-40B4-BE49-F238E27FC236}">
-                <a16:creationId xmlns:a16="http://schemas.microsoft.com/office/drawing/2014/main" id="{2C641AAD-4EE9-44DF-8CAC-E49F7A9B7F9D}"/>
+                <a16:creationId xmlns:a16="http://schemas.microsoft.com/office/drawing/2014/main" id="{9138B547-D568-4E76-83DA-C1624F08B259}"/>
               </a:ext>
             </a:extLst>
           </p:cNvPr>
@@ -7323,7 +8291,7 @@
           <p:cNvPr id="8" name="read-1">
             <a:extLst xmlns:a="http://schemas.openxmlformats.org/drawingml/2006/main">
               <a:ext uri="{FF2B5EF4-FFF2-40B4-BE49-F238E27FC236}">
-                <a16:creationId xmlns:a16="http://schemas.microsoft.com/office/drawing/2014/main" id="{7C93BC4A-4F25-4195-A5FB-E0A730CA822B}"/>
+                <a16:creationId xmlns:a16="http://schemas.microsoft.com/office/drawing/2014/main" id="{977A5091-CCAE-4EE4-AE93-A8D6AE9A1FFB}"/>
               </a:ext>
             </a:extLst>
           </p:cNvPr>
@@ -7368,7 +8336,7 @@
           <p:cNvPr id="9" name="metric-value">
             <a:extLst xmlns:a="http://schemas.openxmlformats.org/drawingml/2006/main">
               <a:ext uri="{FF2B5EF4-FFF2-40B4-BE49-F238E27FC236}">
-                <a16:creationId xmlns:a16="http://schemas.microsoft.com/office/drawing/2014/main" id="{63012DC0-D804-4E50-BD51-FF5540D5031E}"/>
+                <a16:creationId xmlns:a16="http://schemas.microsoft.com/office/drawing/2014/main" id="{6E0C5110-6728-44B0-964E-E4C3581A73E7}"/>
               </a:ext>
             </a:extLst>
           </p:cNvPr>
@@ -7413,7 +8381,7 @@
           <p:cNvPr id="10" name="metric-label">
             <a:extLst xmlns:a="http://schemas.openxmlformats.org/drawingml/2006/main">
               <a:ext uri="{FF2B5EF4-FFF2-40B4-BE49-F238E27FC236}">
-                <a16:creationId xmlns:a16="http://schemas.microsoft.com/office/drawing/2014/main" id="{124738D4-A050-4673-9EDB-A78CCB9C9BFA}"/>
+                <a16:creationId xmlns:a16="http://schemas.microsoft.com/office/drawing/2014/main" id="{0E1C3642-F26E-4262-8969-3688A25B53AE}"/>
               </a:ext>
             </a:extLst>
           </p:cNvPr>
@@ -7458,7 +8426,7 @@
           <p:cNvPr id="11" name="read-2">
             <a:extLst xmlns:a="http://schemas.openxmlformats.org/drawingml/2006/main">
               <a:ext uri="{FF2B5EF4-FFF2-40B4-BE49-F238E27FC236}">
-                <a16:creationId xmlns:a16="http://schemas.microsoft.com/office/drawing/2014/main" id="{D91FA166-508D-45BB-B286-5B7335D31955}"/>
+                <a16:creationId xmlns:a16="http://schemas.microsoft.com/office/drawing/2014/main" id="{E0177CCF-3793-4723-ABB8-D0F47361E6C8}"/>
               </a:ext>
             </a:extLst>
           </p:cNvPr>
@@ -7503,7 +8471,7 @@
           <p:cNvPr id="12" name="source-footer">
             <a:extLst xmlns:a="http://schemas.openxmlformats.org/drawingml/2006/main">
               <a:ext uri="{FF2B5EF4-FFF2-40B4-BE49-F238E27FC236}">
-                <a16:creationId xmlns:a16="http://schemas.microsoft.com/office/drawing/2014/main" id="{BE5C2849-4C32-4606-88D4-8685253074BA}"/>
+                <a16:creationId xmlns:a16="http://schemas.microsoft.com/office/drawing/2014/main" id="{7F1AAACA-C501-43D8-8D48-5FA5415BFCA9}"/>
               </a:ext>
             </a:extLst>
           </p:cNvPr>
@@ -7538,7 +8506,7 @@
                   <a:srgbClr val="5F6368"/>
                 </a:solidFill>
               </a:rPr>
-              <a:t>Representative plot from the same 10-run experiment; Sphere and Rastrigin plots are saved in the output folder.</a:t>
+              <a:t>Representative plot from the same 30-run experiment; Sphere and Rastrigin plots are saved in the output folder.</a:t>
             </a:r>
           </a:p>
         </p:txBody>
@@ -7546,7 +8514,7 @@
     </p:spTree>
     <p:extLst>
       <p:ext uri="{BB962C8B-B14F-4D97-AF65-F5344CB8AC3E}">
-        <p14:creationId xmlns:p14="http://schemas.microsoft.com/office/powerpoint/2010/main" val="911417696"/>
+        <p14:creationId xmlns:p14="http://schemas.microsoft.com/office/powerpoint/2010/main" val="1642066362"/>
       </p:ext>
     </p:extLst>
   </p:cSld>
@@ -7570,7 +8538,7 @@
           <p:cNvPr id="1" name="slide-background">
             <a:extLst xmlns:a="http://schemas.openxmlformats.org/drawingml/2006/main">
               <a:ext uri="{FF2B5EF4-FFF2-40B4-BE49-F238E27FC236}">
-                <a16:creationId xmlns:a16="http://schemas.microsoft.com/office/drawing/2014/main" id="{41DD923D-3459-4312-8ED1-B2E608B238DA}"/>
+                <a16:creationId xmlns:a16="http://schemas.microsoft.com/office/drawing/2014/main" id="{8FBD6F68-C9EC-4117-BEAE-80486501F428}"/>
               </a:ext>
             </a:extLst>
           </p:cNvPr>
@@ -7597,7 +8565,7 @@
           <p:cNvPr id="2" name="kicker">
             <a:extLst xmlns:a="http://schemas.openxmlformats.org/drawingml/2006/main">
               <a:ext uri="{FF2B5EF4-FFF2-40B4-BE49-F238E27FC236}">
-                <a16:creationId xmlns:a16="http://schemas.microsoft.com/office/drawing/2014/main" id="{AA85B507-5096-4351-A5B3-985A1E6174AF}"/>
+                <a16:creationId xmlns:a16="http://schemas.microsoft.com/office/drawing/2014/main" id="{2AA92549-B68B-423C-85B2-EEFA964A9E41}"/>
               </a:ext>
             </a:extLst>
           </p:cNvPr>
@@ -7642,7 +8610,7 @@
           <p:cNvPr id="3" name="slide-title">
             <a:extLst xmlns:a="http://schemas.openxmlformats.org/drawingml/2006/main">
               <a:ext uri="{FF2B5EF4-FFF2-40B4-BE49-F238E27FC236}">
-                <a16:creationId xmlns:a16="http://schemas.microsoft.com/office/drawing/2014/main" id="{A8FEAD30-4356-423E-85DB-5E2C4C471B8C}"/>
+                <a16:creationId xmlns:a16="http://schemas.microsoft.com/office/drawing/2014/main" id="{0E376BED-190F-437D-9E0E-4FFC6E0BE867}"/>
               </a:ext>
             </a:extLst>
           </p:cNvPr>
@@ -7687,7 +8655,7 @@
           <p:cNvPr id="4" name="slide-subtitle">
             <a:extLst xmlns:a="http://schemas.openxmlformats.org/drawingml/2006/main">
               <a:ext uri="{FF2B5EF4-FFF2-40B4-BE49-F238E27FC236}">
-                <a16:creationId xmlns:a16="http://schemas.microsoft.com/office/drawing/2014/main" id="{076C025F-5883-4A94-8640-5776FD8BDF5D}"/>
+                <a16:creationId xmlns:a16="http://schemas.microsoft.com/office/drawing/2014/main" id="{849DA6A3-A587-4396-9890-CFF82EF564AB}"/>
               </a:ext>
             </a:extLst>
           </p:cNvPr>
@@ -7732,7 +8700,7 @@
           <p:cNvPr id="5" name="adv-title">
             <a:extLst xmlns:a="http://schemas.openxmlformats.org/drawingml/2006/main">
               <a:ext uri="{FF2B5EF4-FFF2-40B4-BE49-F238E27FC236}">
-                <a16:creationId xmlns:a16="http://schemas.microsoft.com/office/drawing/2014/main" id="{70C271B6-4124-4195-BB2E-9DDD6E38F745}"/>
+                <a16:creationId xmlns:a16="http://schemas.microsoft.com/office/drawing/2014/main" id="{4B0E9D72-E1B9-4B36-8B60-EA088FACE4DA}"/>
               </a:ext>
             </a:extLst>
           </p:cNvPr>
@@ -7777,7 +8745,7 @@
           <p:cNvPr id="6" name="bullet-mark">
             <a:extLst xmlns:a="http://schemas.openxmlformats.org/drawingml/2006/main">
               <a:ext uri="{FF2B5EF4-FFF2-40B4-BE49-F238E27FC236}">
-                <a16:creationId xmlns:a16="http://schemas.microsoft.com/office/drawing/2014/main" id="{06FEB83F-D6B0-482E-8AF4-FC511E923D5C}"/>
+                <a16:creationId xmlns:a16="http://schemas.microsoft.com/office/drawing/2014/main" id="{83DAA07C-7F33-4519-A185-C6FF3FDDABA8}"/>
               </a:ext>
             </a:extLst>
           </p:cNvPr>
@@ -7804,7 +8772,7 @@
           <p:cNvPr id="7" name="bullet-text">
             <a:extLst xmlns:a="http://schemas.openxmlformats.org/drawingml/2006/main">
               <a:ext uri="{FF2B5EF4-FFF2-40B4-BE49-F238E27FC236}">
-                <a16:creationId xmlns:a16="http://schemas.microsoft.com/office/drawing/2014/main" id="{C06E2A1C-95A6-4E4C-ADAE-E0AB39119537}"/>
+                <a16:creationId xmlns:a16="http://schemas.microsoft.com/office/drawing/2014/main" id="{04952616-092C-4C25-82A2-FB1029DCD5D3}"/>
               </a:ext>
             </a:extLst>
           </p:cNvPr>
@@ -7849,7 +8817,7 @@
           <p:cNvPr id="8" name="bullet-mark">
             <a:extLst xmlns:a="http://schemas.openxmlformats.org/drawingml/2006/main">
               <a:ext uri="{FF2B5EF4-FFF2-40B4-BE49-F238E27FC236}">
-                <a16:creationId xmlns:a16="http://schemas.microsoft.com/office/drawing/2014/main" id="{41330E69-982E-4747-AB5E-D232163178CB}"/>
+                <a16:creationId xmlns:a16="http://schemas.microsoft.com/office/drawing/2014/main" id="{1AD5E43B-829F-4342-AE4F-F9F4E3FCFC71}"/>
               </a:ext>
             </a:extLst>
           </p:cNvPr>
@@ -7876,7 +8844,7 @@
           <p:cNvPr id="9" name="bullet-text">
             <a:extLst xmlns:a="http://schemas.openxmlformats.org/drawingml/2006/main">
               <a:ext uri="{FF2B5EF4-FFF2-40B4-BE49-F238E27FC236}">
-                <a16:creationId xmlns:a16="http://schemas.microsoft.com/office/drawing/2014/main" id="{68CC679C-5D39-4755-8D1E-95FB7EACDEBD}"/>
+                <a16:creationId xmlns:a16="http://schemas.microsoft.com/office/drawing/2014/main" id="{B570FA91-EA64-4D95-8B50-D2C1E672B273}"/>
               </a:ext>
             </a:extLst>
           </p:cNvPr>
@@ -7921,7 +8889,7 @@
           <p:cNvPr id="10" name="bullet-mark">
             <a:extLst xmlns:a="http://schemas.openxmlformats.org/drawingml/2006/main">
               <a:ext uri="{FF2B5EF4-FFF2-40B4-BE49-F238E27FC236}">
-                <a16:creationId xmlns:a16="http://schemas.microsoft.com/office/drawing/2014/main" id="{1A0856AB-4E02-446B-8F76-AE04CB40A56E}"/>
+                <a16:creationId xmlns:a16="http://schemas.microsoft.com/office/drawing/2014/main" id="{862207E9-E22F-4238-911E-2DC49833847D}"/>
               </a:ext>
             </a:extLst>
           </p:cNvPr>
@@ -7948,7 +8916,7 @@
           <p:cNvPr id="11" name="bullet-text">
             <a:extLst xmlns:a="http://schemas.openxmlformats.org/drawingml/2006/main">
               <a:ext uri="{FF2B5EF4-FFF2-40B4-BE49-F238E27FC236}">
-                <a16:creationId xmlns:a16="http://schemas.microsoft.com/office/drawing/2014/main" id="{67DD141E-85AE-477A-A6B1-95105F718667}"/>
+                <a16:creationId xmlns:a16="http://schemas.microsoft.com/office/drawing/2014/main" id="{3079855C-2883-40E4-9931-99AD7F1064A5}"/>
               </a:ext>
             </a:extLst>
           </p:cNvPr>
@@ -7993,7 +8961,7 @@
           <p:cNvPr id="12" name="lim-title">
             <a:extLst xmlns:a="http://schemas.openxmlformats.org/drawingml/2006/main">
               <a:ext uri="{FF2B5EF4-FFF2-40B4-BE49-F238E27FC236}">
-                <a16:creationId xmlns:a16="http://schemas.microsoft.com/office/drawing/2014/main" id="{CF090161-3AB4-4DC5-A805-83C158B6B1D2}"/>
+                <a16:creationId xmlns:a16="http://schemas.microsoft.com/office/drawing/2014/main" id="{CAAE4E6D-ECE2-4ADA-AB52-4EE3B222ECD4}"/>
               </a:ext>
             </a:extLst>
           </p:cNvPr>
@@ -8038,7 +9006,7 @@
           <p:cNvPr id="13" name="bullet-mark">
             <a:extLst xmlns:a="http://schemas.openxmlformats.org/drawingml/2006/main">
               <a:ext uri="{FF2B5EF4-FFF2-40B4-BE49-F238E27FC236}">
-                <a16:creationId xmlns:a16="http://schemas.microsoft.com/office/drawing/2014/main" id="{E4CE1289-1B22-4638-8672-B1BB61DB2B59}"/>
+                <a16:creationId xmlns:a16="http://schemas.microsoft.com/office/drawing/2014/main" id="{30B3B424-EEBB-466F-B59D-1358CA25ED14}"/>
               </a:ext>
             </a:extLst>
           </p:cNvPr>
@@ -8065,7 +9033,7 @@
           <p:cNvPr id="14" name="bullet-text">
             <a:extLst xmlns:a="http://schemas.openxmlformats.org/drawingml/2006/main">
               <a:ext uri="{FF2B5EF4-FFF2-40B4-BE49-F238E27FC236}">
-                <a16:creationId xmlns:a16="http://schemas.microsoft.com/office/drawing/2014/main" id="{697BD1F8-50E3-447E-84FA-491E746C59AD}"/>
+                <a16:creationId xmlns:a16="http://schemas.microsoft.com/office/drawing/2014/main" id="{1482A36C-4C8E-4CAD-9421-D2B2E38F38D8}"/>
               </a:ext>
             </a:extLst>
           </p:cNvPr>
@@ -8110,7 +9078,7 @@
           <p:cNvPr id="15" name="bullet-mark">
             <a:extLst xmlns:a="http://schemas.openxmlformats.org/drawingml/2006/main">
               <a:ext uri="{FF2B5EF4-FFF2-40B4-BE49-F238E27FC236}">
-                <a16:creationId xmlns:a16="http://schemas.microsoft.com/office/drawing/2014/main" id="{1058CE1C-FAEB-4325-A2C7-62092DBB5D49}"/>
+                <a16:creationId xmlns:a16="http://schemas.microsoft.com/office/drawing/2014/main" id="{9078D168-7A51-46E9-8899-880597E536D2}"/>
               </a:ext>
             </a:extLst>
           </p:cNvPr>
@@ -8137,7 +9105,7 @@
           <p:cNvPr id="16" name="bullet-text">
             <a:extLst xmlns:a="http://schemas.openxmlformats.org/drawingml/2006/main">
               <a:ext uri="{FF2B5EF4-FFF2-40B4-BE49-F238E27FC236}">
-                <a16:creationId xmlns:a16="http://schemas.microsoft.com/office/drawing/2014/main" id="{147CB957-A17E-4C08-A7D4-72DE60E1F978}"/>
+                <a16:creationId xmlns:a16="http://schemas.microsoft.com/office/drawing/2014/main" id="{F0D6E1FE-E683-4211-AB14-374713F16948}"/>
               </a:ext>
             </a:extLst>
           </p:cNvPr>
@@ -8182,7 +9150,7 @@
           <p:cNvPr id="17" name="bullet-mark">
             <a:extLst xmlns:a="http://schemas.openxmlformats.org/drawingml/2006/main">
               <a:ext uri="{FF2B5EF4-FFF2-40B4-BE49-F238E27FC236}">
-                <a16:creationId xmlns:a16="http://schemas.microsoft.com/office/drawing/2014/main" id="{AE792AF2-8AB4-4F54-885F-7CE1B06DD13D}"/>
+                <a16:creationId xmlns:a16="http://schemas.microsoft.com/office/drawing/2014/main" id="{F03E9F23-8E32-410A-83CB-7C9AF8EA7186}"/>
               </a:ext>
             </a:extLst>
           </p:cNvPr>
@@ -8209,7 +9177,7 @@
           <p:cNvPr id="18" name="bullet-text">
             <a:extLst xmlns:a="http://schemas.openxmlformats.org/drawingml/2006/main">
               <a:ext uri="{FF2B5EF4-FFF2-40B4-BE49-F238E27FC236}">
-                <a16:creationId xmlns:a16="http://schemas.microsoft.com/office/drawing/2014/main" id="{2DCE11CB-AB97-4819-81ED-8A0E990B2664}"/>
+                <a16:creationId xmlns:a16="http://schemas.microsoft.com/office/drawing/2014/main" id="{733A2CBA-368B-4E1F-A75F-36798595DCD4}"/>
               </a:ext>
             </a:extLst>
           </p:cNvPr>
@@ -8254,7 +9222,7 @@
           <p:cNvPr id="19" name="ext-title">
             <a:extLst xmlns:a="http://schemas.openxmlformats.org/drawingml/2006/main">
               <a:ext uri="{FF2B5EF4-FFF2-40B4-BE49-F238E27FC236}">
-                <a16:creationId xmlns:a16="http://schemas.microsoft.com/office/drawing/2014/main" id="{570A3C07-E40D-438D-9109-ADFF5903797F}"/>
+                <a16:creationId xmlns:a16="http://schemas.microsoft.com/office/drawing/2014/main" id="{388F952F-6757-4E9B-AA90-DAF25FBA306D}"/>
               </a:ext>
             </a:extLst>
           </p:cNvPr>
@@ -8299,7 +9267,7 @@
           <p:cNvPr id="20" name="bullet-mark">
             <a:extLst xmlns:a="http://schemas.openxmlformats.org/drawingml/2006/main">
               <a:ext uri="{FF2B5EF4-FFF2-40B4-BE49-F238E27FC236}">
-                <a16:creationId xmlns:a16="http://schemas.microsoft.com/office/drawing/2014/main" id="{0D84D107-2592-482C-9C86-100539EE22CA}"/>
+                <a16:creationId xmlns:a16="http://schemas.microsoft.com/office/drawing/2014/main" id="{FEB18729-9195-4C01-9885-63E935E57B0C}"/>
               </a:ext>
             </a:extLst>
           </p:cNvPr>
@@ -8326,7 +9294,7 @@
           <p:cNvPr id="21" name="bullet-text">
             <a:extLst xmlns:a="http://schemas.openxmlformats.org/drawingml/2006/main">
               <a:ext uri="{FF2B5EF4-FFF2-40B4-BE49-F238E27FC236}">
-                <a16:creationId xmlns:a16="http://schemas.microsoft.com/office/drawing/2014/main" id="{26D87510-F47C-4EDF-83CD-AC448CFB911A}"/>
+                <a16:creationId xmlns:a16="http://schemas.microsoft.com/office/drawing/2014/main" id="{77B352E5-EF28-4E6B-B466-B417EC2B5FD4}"/>
               </a:ext>
             </a:extLst>
           </p:cNvPr>
@@ -8371,7 +9339,7 @@
           <p:cNvPr id="22" name="bullet-mark">
             <a:extLst xmlns:a="http://schemas.openxmlformats.org/drawingml/2006/main">
               <a:ext uri="{FF2B5EF4-FFF2-40B4-BE49-F238E27FC236}">
-                <a16:creationId xmlns:a16="http://schemas.microsoft.com/office/drawing/2014/main" id="{F09667C0-6541-419A-BAA7-DD1ADFFA86C3}"/>
+                <a16:creationId xmlns:a16="http://schemas.microsoft.com/office/drawing/2014/main" id="{5E71E776-34BA-449A-AD2D-A152EB3FC44D}"/>
               </a:ext>
             </a:extLst>
           </p:cNvPr>
@@ -8398,7 +9366,7 @@
           <p:cNvPr id="23" name="bullet-text">
             <a:extLst xmlns:a="http://schemas.openxmlformats.org/drawingml/2006/main">
               <a:ext uri="{FF2B5EF4-FFF2-40B4-BE49-F238E27FC236}">
-                <a16:creationId xmlns:a16="http://schemas.microsoft.com/office/drawing/2014/main" id="{685D3B8E-DDE5-441D-A2C2-9FE22D1821C7}"/>
+                <a16:creationId xmlns:a16="http://schemas.microsoft.com/office/drawing/2014/main" id="{BA554381-FF9F-40C3-98A6-9C12D1A74DEF}"/>
               </a:ext>
             </a:extLst>
           </p:cNvPr>
@@ -8443,7 +9411,7 @@
           <p:cNvPr id="24" name="bullet-mark">
             <a:extLst xmlns:a="http://schemas.openxmlformats.org/drawingml/2006/main">
               <a:ext uri="{FF2B5EF4-FFF2-40B4-BE49-F238E27FC236}">
-                <a16:creationId xmlns:a16="http://schemas.microsoft.com/office/drawing/2014/main" id="{F7DCC038-4351-4D53-9792-0D5325BBD55B}"/>
+                <a16:creationId xmlns:a16="http://schemas.microsoft.com/office/drawing/2014/main" id="{DC7A1011-677C-42D2-A9B8-A95F93FF450E}"/>
               </a:ext>
             </a:extLst>
           </p:cNvPr>
@@ -8470,7 +9438,7 @@
           <p:cNvPr id="25" name="bullet-text">
             <a:extLst xmlns:a="http://schemas.openxmlformats.org/drawingml/2006/main">
               <a:ext uri="{FF2B5EF4-FFF2-40B4-BE49-F238E27FC236}">
-                <a16:creationId xmlns:a16="http://schemas.microsoft.com/office/drawing/2014/main" id="{692FE5DE-F497-4449-AAAB-9E8F3A15D0AF}"/>
+                <a16:creationId xmlns:a16="http://schemas.microsoft.com/office/drawing/2014/main" id="{6FA258F2-907B-40BA-AAA1-7E898322BA22}"/>
               </a:ext>
             </a:extLst>
           </p:cNvPr>
@@ -8515,7 +9483,7 @@
           <p:cNvPr id="26" name="source-footer">
             <a:extLst xmlns:a="http://schemas.openxmlformats.org/drawingml/2006/main">
               <a:ext uri="{FF2B5EF4-FFF2-40B4-BE49-F238E27FC236}">
-                <a16:creationId xmlns:a16="http://schemas.microsoft.com/office/drawing/2014/main" id="{43F5F7A9-F1C0-4B4C-A844-3C84394EFF85}"/>
+                <a16:creationId xmlns:a16="http://schemas.microsoft.com/office/drawing/2014/main" id="{50EC81D4-CDD6-4749-80E1-C58EED966E46}"/>
               </a:ext>
             </a:extLst>
           </p:cNvPr>
@@ -8558,7 +9526,7 @@
     </p:spTree>
     <p:extLst>
       <p:ext uri="{BB962C8B-B14F-4D97-AF65-F5344CB8AC3E}">
-        <p14:creationId xmlns:p14="http://schemas.microsoft.com/office/powerpoint/2010/main" val="493597897"/>
+        <p14:creationId xmlns:p14="http://schemas.microsoft.com/office/powerpoint/2010/main" val="1681292569"/>
       </p:ext>
     </p:extLst>
   </p:cSld>
